--- a/B.Sc. LRT/Luftfahrttechnik/images/LFT-Images.pptx
+++ b/B.Sc. LRT/Luftfahrttechnik/images/LFT-Images.pptx
@@ -5,11 +5,12 @@
     <p:sldMasterId id="2147483660" r:id="rId1"/>
   </p:sldMasterIdLst>
   <p:notesMasterIdLst>
-    <p:notesMasterId r:id="rId4"/>
+    <p:notesMasterId r:id="rId5"/>
   </p:notesMasterIdLst>
   <p:sldIdLst>
     <p:sldId id="256" r:id="rId2"/>
     <p:sldId id="257" r:id="rId3"/>
+    <p:sldId id="258" r:id="rId4"/>
   </p:sldIdLst>
   <p:sldSz cx="3600450" cy="3600450"/>
   <p:notesSz cx="6858000" cy="9144000"/>
@@ -11689,6 +11690,772 @@
     <p:extLst>
       <p:ext uri="{BB962C8B-B14F-4D97-AF65-F5344CB8AC3E}">
         <p14:creationId xmlns:p14="http://schemas.microsoft.com/office/powerpoint/2010/main" val="925403280"/>
+      </p:ext>
+    </p:extLst>
+  </p:cSld>
+  <p:clrMapOvr>
+    <a:masterClrMapping/>
+  </p:clrMapOvr>
+</p:sld>
+</file>
+
+<file path=ppt/slides/slide3.xml><?xml version="1.0" encoding="utf-8"?>
+<p:sld xmlns:a="http://schemas.openxmlformats.org/drawingml/2006/main" xmlns:r="http://schemas.openxmlformats.org/officeDocument/2006/relationships" xmlns:p="http://schemas.openxmlformats.org/presentationml/2006/main">
+  <p:cSld>
+    <p:spTree>
+      <p:nvGrpSpPr>
+        <p:cNvPr id="1" name=""/>
+        <p:cNvGrpSpPr/>
+        <p:nvPr/>
+      </p:nvGrpSpPr>
+      <p:grpSpPr>
+        <a:xfrm>
+          <a:off x="0" y="0"/>
+          <a:ext cx="0" cy="0"/>
+          <a:chOff x="0" y="0"/>
+          <a:chExt cx="0" cy="0"/>
+        </a:xfrm>
+      </p:grpSpPr>
+      <p:cxnSp>
+        <p:nvCxnSpPr>
+          <p:cNvPr id="13" name="Gerader Verbinder 12">
+            <a:extLst>
+              <a:ext uri="{FF2B5EF4-FFF2-40B4-BE49-F238E27FC236}">
+                <a16:creationId xmlns:a16="http://schemas.microsoft.com/office/drawing/2014/main" id="{4DCE6737-D821-330A-8D79-3B40B201CD72}"/>
+              </a:ext>
+            </a:extLst>
+          </p:cNvPr>
+          <p:cNvCxnSpPr>
+            <a:cxnSpLocks/>
+          </p:cNvCxnSpPr>
+          <p:nvPr/>
+        </p:nvCxnSpPr>
+        <p:spPr>
+          <a:xfrm flipV="1">
+            <a:off x="888435" y="1464496"/>
+            <a:ext cx="1618857" cy="1093945"/>
+          </a:xfrm>
+          <a:prstGeom prst="line">
+            <a:avLst/>
+          </a:prstGeom>
+          <a:ln w="12700" cap="rnd">
+            <a:prstDash val="sysDash"/>
+            <a:round/>
+          </a:ln>
+        </p:spPr>
+        <p:style>
+          <a:lnRef idx="2">
+            <a:schemeClr val="accent1"/>
+          </a:lnRef>
+          <a:fillRef idx="0">
+            <a:schemeClr val="accent1"/>
+          </a:fillRef>
+          <a:effectRef idx="1">
+            <a:schemeClr val="accent1"/>
+          </a:effectRef>
+          <a:fontRef idx="minor">
+            <a:schemeClr val="tx1"/>
+          </a:fontRef>
+        </p:style>
+      </p:cxnSp>
+      <p:cxnSp>
+        <p:nvCxnSpPr>
+          <p:cNvPr id="12" name="Gerader Verbinder 11">
+            <a:extLst>
+              <a:ext uri="{FF2B5EF4-FFF2-40B4-BE49-F238E27FC236}">
+                <a16:creationId xmlns:a16="http://schemas.microsoft.com/office/drawing/2014/main" id="{21EA963A-B307-98D3-98FE-91FEAD4BE2C3}"/>
+              </a:ext>
+            </a:extLst>
+          </p:cNvPr>
+          <p:cNvCxnSpPr/>
+          <p:nvPr/>
+        </p:nvCxnSpPr>
+        <p:spPr>
+          <a:xfrm>
+            <a:off x="888435" y="2007296"/>
+            <a:ext cx="1701321" cy="0"/>
+          </a:xfrm>
+          <a:prstGeom prst="line">
+            <a:avLst/>
+          </a:prstGeom>
+          <a:ln w="12700" cap="rnd">
+            <a:solidFill>
+              <a:schemeClr val="accent2">
+                <a:lumMod val="75000"/>
+              </a:schemeClr>
+            </a:solidFill>
+            <a:prstDash val="sysDash"/>
+            <a:round/>
+          </a:ln>
+        </p:spPr>
+        <p:style>
+          <a:lnRef idx="2">
+            <a:schemeClr val="accent1"/>
+          </a:lnRef>
+          <a:fillRef idx="0">
+            <a:schemeClr val="accent1"/>
+          </a:fillRef>
+          <a:effectRef idx="1">
+            <a:schemeClr val="accent1"/>
+          </a:effectRef>
+          <a:fontRef idx="minor">
+            <a:schemeClr val="tx1"/>
+          </a:fontRef>
+        </p:style>
+      </p:cxnSp>
+      <p:cxnSp>
+        <p:nvCxnSpPr>
+          <p:cNvPr id="5" name="Gerade Verbindung mit Pfeil 4">
+            <a:extLst>
+              <a:ext uri="{FF2B5EF4-FFF2-40B4-BE49-F238E27FC236}">
+                <a16:creationId xmlns:a16="http://schemas.microsoft.com/office/drawing/2014/main" id="{0FAA555A-4E85-C572-BE97-09867CDEE58F}"/>
+              </a:ext>
+            </a:extLst>
+          </p:cNvPr>
+          <p:cNvCxnSpPr/>
+          <p:nvPr/>
+        </p:nvCxnSpPr>
+        <p:spPr>
+          <a:xfrm flipV="1">
+            <a:off x="888435" y="851770"/>
+            <a:ext cx="0" cy="1706671"/>
+          </a:xfrm>
+          <a:prstGeom prst="straightConnector1">
+            <a:avLst/>
+          </a:prstGeom>
+          <a:ln w="15875" cap="rnd">
+            <a:solidFill>
+              <a:schemeClr val="tx1"/>
+            </a:solidFill>
+            <a:round/>
+            <a:tailEnd type="triangle"/>
+          </a:ln>
+        </p:spPr>
+        <p:style>
+          <a:lnRef idx="2">
+            <a:schemeClr val="accent1"/>
+          </a:lnRef>
+          <a:fillRef idx="0">
+            <a:schemeClr val="accent1"/>
+          </a:fillRef>
+          <a:effectRef idx="1">
+            <a:schemeClr val="accent1"/>
+          </a:effectRef>
+          <a:fontRef idx="minor">
+            <a:schemeClr val="tx1"/>
+          </a:fontRef>
+        </p:style>
+      </p:cxnSp>
+      <p:sp>
+        <p:nvSpPr>
+          <p:cNvPr id="8" name="Textfeld 7">
+            <a:extLst>
+              <a:ext uri="{FF2B5EF4-FFF2-40B4-BE49-F238E27FC236}">
+                <a16:creationId xmlns:a16="http://schemas.microsoft.com/office/drawing/2014/main" id="{98BF43D2-163A-E046-5ACE-5728381A1227}"/>
+              </a:ext>
+            </a:extLst>
+          </p:cNvPr>
+          <p:cNvSpPr txBox="1"/>
+          <p:nvPr/>
+        </p:nvSpPr>
+        <p:spPr>
+          <a:xfrm>
+            <a:off x="836113" y="757380"/>
+            <a:ext cx="450936" cy="307777"/>
+          </a:xfrm>
+          <a:prstGeom prst="rect">
+            <a:avLst/>
+          </a:prstGeom>
+          <a:noFill/>
+        </p:spPr>
+        <p:txBody>
+          <a:bodyPr wrap="square" rtlCol="0" anchor="ctr">
+            <a:spAutoFit/>
+          </a:bodyPr>
+          <a:lstStyle/>
+          <a:p>
+            <a:pPr algn="ctr"/>
+            <a:r>
+              <a:rPr lang="de-DE" sz="1400" i="1" dirty="0">
+                <a:latin typeface="Latin Modern Math" panose="02000503000000000000" pitchFamily="50" charset="0"/>
+                <a:ea typeface="Latin Modern Math" panose="02000503000000000000" pitchFamily="50" charset="0"/>
+                <a:cs typeface="CMU Serif" panose="02000603000000000000" pitchFamily="2" charset="0"/>
+              </a:rPr>
+              <a:t>χ</a:t>
+            </a:r>
+          </a:p>
+        </p:txBody>
+      </p:sp>
+      <p:sp>
+        <p:nvSpPr>
+          <p:cNvPr id="9" name="Textfeld 8">
+            <a:extLst>
+              <a:ext uri="{FF2B5EF4-FFF2-40B4-BE49-F238E27FC236}">
+                <a16:creationId xmlns:a16="http://schemas.microsoft.com/office/drawing/2014/main" id="{429D3C29-FB50-02F5-367F-1B4E6109C580}"/>
+              </a:ext>
+            </a:extLst>
+          </p:cNvPr>
+          <p:cNvSpPr txBox="1"/>
+          <p:nvPr/>
+        </p:nvSpPr>
+        <p:spPr>
+          <a:xfrm>
+            <a:off x="2507292" y="2406636"/>
+            <a:ext cx="450936" cy="307777"/>
+          </a:xfrm>
+          <a:prstGeom prst="rect">
+            <a:avLst/>
+          </a:prstGeom>
+          <a:noFill/>
+        </p:spPr>
+        <p:txBody>
+          <a:bodyPr wrap="square" rtlCol="0" anchor="ctr">
+            <a:spAutoFit/>
+          </a:bodyPr>
+          <a:lstStyle/>
+          <a:p>
+            <a:pPr algn="ctr"/>
+            <a:r>
+              <a:rPr lang="de-DE" sz="1400" i="1" dirty="0">
+                <a:latin typeface="CMU Serif" panose="02000603000000000000" pitchFamily="2" charset="0"/>
+                <a:ea typeface="CMU Serif" panose="02000603000000000000" pitchFamily="2" charset="0"/>
+                <a:cs typeface="CMU Serif" panose="02000603000000000000" pitchFamily="2" charset="0"/>
+              </a:rPr>
+              <a:t>v</a:t>
+            </a:r>
+          </a:p>
+        </p:txBody>
+      </p:sp>
+      <p:sp>
+        <p:nvSpPr>
+          <p:cNvPr id="10" name="Freihandform: Form 9">
+            <a:extLst>
+              <a:ext uri="{FF2B5EF4-FFF2-40B4-BE49-F238E27FC236}">
+                <a16:creationId xmlns:a16="http://schemas.microsoft.com/office/drawing/2014/main" id="{3DD8C586-4BE1-3355-6B9D-1A55021D8279}"/>
+              </a:ext>
+            </a:extLst>
+          </p:cNvPr>
+          <p:cNvSpPr/>
+          <p:nvPr/>
+        </p:nvSpPr>
+        <p:spPr>
+          <a:xfrm>
+            <a:off x="1249472" y="1121080"/>
+            <a:ext cx="980161" cy="886216"/>
+          </a:xfrm>
+          <a:custGeom>
+            <a:avLst/>
+            <a:gdLst>
+              <a:gd name="csX0" fmla="*/ 0 w 980161"/>
+              <a:gd name="csY0" fmla="*/ 40710 h 1029878"/>
+              <a:gd name="csX1" fmla="*/ 244257 w 980161"/>
+              <a:gd name="csY1" fmla="*/ 939452 h 1029878"/>
+              <a:gd name="csX2" fmla="*/ 604381 w 980161"/>
+              <a:gd name="csY2" fmla="*/ 892479 h 1029878"/>
+              <a:gd name="csX3" fmla="*/ 980161 w 980161"/>
+              <a:gd name="csY3" fmla="*/ 0 h 1029878"/>
+            </a:gdLst>
+            <a:ahLst/>
+            <a:cxnLst>
+              <a:cxn ang="0">
+                <a:pos x="csX0" y="csY0"/>
+              </a:cxn>
+              <a:cxn ang="0">
+                <a:pos x="csX1" y="csY1"/>
+              </a:cxn>
+              <a:cxn ang="0">
+                <a:pos x="csX2" y="csY2"/>
+              </a:cxn>
+              <a:cxn ang="0">
+                <a:pos x="csX3" y="csY3"/>
+              </a:cxn>
+            </a:cxnLst>
+            <a:rect l="l" t="t" r="r" b="b"/>
+            <a:pathLst>
+              <a:path w="980161" h="1029878">
+                <a:moveTo>
+                  <a:pt x="0" y="40710"/>
+                </a:moveTo>
+                <a:cubicBezTo>
+                  <a:pt x="71763" y="419100"/>
+                  <a:pt x="143527" y="797490"/>
+                  <a:pt x="244257" y="939452"/>
+                </a:cubicBezTo>
+                <a:cubicBezTo>
+                  <a:pt x="344987" y="1081414"/>
+                  <a:pt x="481730" y="1049054"/>
+                  <a:pt x="604381" y="892479"/>
+                </a:cubicBezTo>
+                <a:cubicBezTo>
+                  <a:pt x="727032" y="735904"/>
+                  <a:pt x="853596" y="367952"/>
+                  <a:pt x="980161" y="0"/>
+                </a:cubicBezTo>
+              </a:path>
+            </a:pathLst>
+          </a:custGeom>
+          <a:noFill/>
+          <a:ln w="15875" cap="rnd">
+            <a:solidFill>
+              <a:schemeClr val="tx1"/>
+            </a:solidFill>
+            <a:round/>
+          </a:ln>
+        </p:spPr>
+        <p:style>
+          <a:lnRef idx="2">
+            <a:schemeClr val="accent1">
+              <a:shade val="15000"/>
+            </a:schemeClr>
+          </a:lnRef>
+          <a:fillRef idx="1">
+            <a:schemeClr val="accent1"/>
+          </a:fillRef>
+          <a:effectRef idx="0">
+            <a:schemeClr val="accent1"/>
+          </a:effectRef>
+          <a:fontRef idx="minor">
+            <a:schemeClr val="lt1"/>
+          </a:fontRef>
+        </p:style>
+        <p:txBody>
+          <a:bodyPr rtlCol="0" anchor="ctr"/>
+          <a:lstStyle/>
+          <a:p>
+            <a:pPr algn="ctr"/>
+            <a:endParaRPr lang="de-DE"/>
+          </a:p>
+        </p:txBody>
+      </p:sp>
+      <p:sp>
+        <p:nvSpPr>
+          <p:cNvPr id="16" name="Ellipse 15">
+            <a:extLst>
+              <a:ext uri="{FF2B5EF4-FFF2-40B4-BE49-F238E27FC236}">
+                <a16:creationId xmlns:a16="http://schemas.microsoft.com/office/drawing/2014/main" id="{E996857E-A6BB-F900-D30B-E1F7FB182328}"/>
+              </a:ext>
+            </a:extLst>
+          </p:cNvPr>
+          <p:cNvSpPr/>
+          <p:nvPr/>
+        </p:nvSpPr>
+        <p:spPr>
+          <a:xfrm>
+            <a:off x="1749886" y="1937411"/>
+            <a:ext cx="45719" cy="45719"/>
+          </a:xfrm>
+          <a:prstGeom prst="ellipse">
+            <a:avLst/>
+          </a:prstGeom>
+          <a:solidFill>
+            <a:schemeClr val="accent1"/>
+          </a:solidFill>
+          <a:ln>
+            <a:noFill/>
+          </a:ln>
+        </p:spPr>
+        <p:style>
+          <a:lnRef idx="2">
+            <a:schemeClr val="accent1">
+              <a:shade val="15000"/>
+            </a:schemeClr>
+          </a:lnRef>
+          <a:fillRef idx="1">
+            <a:schemeClr val="accent1"/>
+          </a:fillRef>
+          <a:effectRef idx="0">
+            <a:schemeClr val="accent1"/>
+          </a:effectRef>
+          <a:fontRef idx="minor">
+            <a:schemeClr val="lt1"/>
+          </a:fontRef>
+        </p:style>
+        <p:txBody>
+          <a:bodyPr rtlCol="0" anchor="ctr"/>
+          <a:lstStyle/>
+          <a:p>
+            <a:pPr algn="ctr"/>
+            <a:endParaRPr lang="de-DE"/>
+          </a:p>
+        </p:txBody>
+      </p:sp>
+      <p:sp>
+        <p:nvSpPr>
+          <p:cNvPr id="17" name="Ellipse 16">
+            <a:extLst>
+              <a:ext uri="{FF2B5EF4-FFF2-40B4-BE49-F238E27FC236}">
+                <a16:creationId xmlns:a16="http://schemas.microsoft.com/office/drawing/2014/main" id="{9F42A8E9-4357-0D33-77AC-C9B620F56EED}"/>
+              </a:ext>
+            </a:extLst>
+          </p:cNvPr>
+          <p:cNvSpPr/>
+          <p:nvPr/>
+        </p:nvSpPr>
+        <p:spPr>
+          <a:xfrm>
+            <a:off x="1618441" y="1985036"/>
+            <a:ext cx="45719" cy="45719"/>
+          </a:xfrm>
+          <a:prstGeom prst="ellipse">
+            <a:avLst/>
+          </a:prstGeom>
+          <a:solidFill>
+            <a:schemeClr val="accent2">
+              <a:lumMod val="75000"/>
+            </a:schemeClr>
+          </a:solidFill>
+          <a:ln>
+            <a:noFill/>
+          </a:ln>
+        </p:spPr>
+        <p:style>
+          <a:lnRef idx="2">
+            <a:schemeClr val="accent1">
+              <a:shade val="15000"/>
+            </a:schemeClr>
+          </a:lnRef>
+          <a:fillRef idx="1">
+            <a:schemeClr val="accent1"/>
+          </a:fillRef>
+          <a:effectRef idx="0">
+            <a:schemeClr val="accent1"/>
+          </a:effectRef>
+          <a:fontRef idx="minor">
+            <a:schemeClr val="lt1"/>
+          </a:fontRef>
+        </p:style>
+        <p:txBody>
+          <a:bodyPr rtlCol="0" anchor="ctr"/>
+          <a:lstStyle/>
+          <a:p>
+            <a:pPr algn="ctr"/>
+            <a:endParaRPr lang="de-DE"/>
+          </a:p>
+        </p:txBody>
+      </p:sp>
+      <p:cxnSp>
+        <p:nvCxnSpPr>
+          <p:cNvPr id="18" name="Gerader Verbinder 17">
+            <a:extLst>
+              <a:ext uri="{FF2B5EF4-FFF2-40B4-BE49-F238E27FC236}">
+                <a16:creationId xmlns:a16="http://schemas.microsoft.com/office/drawing/2014/main" id="{07676432-51C0-EFB0-A632-51B22CEA8103}"/>
+              </a:ext>
+            </a:extLst>
+          </p:cNvPr>
+          <p:cNvCxnSpPr>
+            <a:cxnSpLocks/>
+            <a:endCxn id="17" idx="4"/>
+          </p:cNvCxnSpPr>
+          <p:nvPr/>
+        </p:nvCxnSpPr>
+        <p:spPr>
+          <a:xfrm flipV="1">
+            <a:off x="1641300" y="2030755"/>
+            <a:ext cx="1" cy="527686"/>
+          </a:xfrm>
+          <a:prstGeom prst="line">
+            <a:avLst/>
+          </a:prstGeom>
+          <a:ln w="12700" cap="rnd">
+            <a:solidFill>
+              <a:schemeClr val="accent2">
+                <a:lumMod val="75000"/>
+              </a:schemeClr>
+            </a:solidFill>
+            <a:prstDash val="solid"/>
+            <a:round/>
+            <a:headEnd type="triangle" w="sm" len="sm"/>
+          </a:ln>
+        </p:spPr>
+        <p:style>
+          <a:lnRef idx="2">
+            <a:schemeClr val="accent1"/>
+          </a:lnRef>
+          <a:fillRef idx="0">
+            <a:schemeClr val="accent1"/>
+          </a:fillRef>
+          <a:effectRef idx="1">
+            <a:schemeClr val="accent1"/>
+          </a:effectRef>
+          <a:fontRef idx="minor">
+            <a:schemeClr val="tx1"/>
+          </a:fontRef>
+        </p:style>
+      </p:cxnSp>
+      <p:cxnSp>
+        <p:nvCxnSpPr>
+          <p:cNvPr id="21" name="Gerader Verbinder 20">
+            <a:extLst>
+              <a:ext uri="{FF2B5EF4-FFF2-40B4-BE49-F238E27FC236}">
+                <a16:creationId xmlns:a16="http://schemas.microsoft.com/office/drawing/2014/main" id="{5AC0AC09-61FC-6919-56F7-26919F532C67}"/>
+              </a:ext>
+            </a:extLst>
+          </p:cNvPr>
+          <p:cNvCxnSpPr>
+            <a:cxnSpLocks/>
+            <a:endCxn id="16" idx="4"/>
+          </p:cNvCxnSpPr>
+          <p:nvPr/>
+        </p:nvCxnSpPr>
+        <p:spPr>
+          <a:xfrm flipV="1">
+            <a:off x="1772745" y="1983130"/>
+            <a:ext cx="1" cy="575311"/>
+          </a:xfrm>
+          <a:prstGeom prst="line">
+            <a:avLst/>
+          </a:prstGeom>
+          <a:ln w="12700" cap="rnd">
+            <a:solidFill>
+              <a:schemeClr val="accent1"/>
+            </a:solidFill>
+            <a:prstDash val="solid"/>
+            <a:round/>
+            <a:headEnd type="triangle" w="sm" len="sm"/>
+          </a:ln>
+        </p:spPr>
+        <p:style>
+          <a:lnRef idx="2">
+            <a:schemeClr val="accent1"/>
+          </a:lnRef>
+          <a:fillRef idx="0">
+            <a:schemeClr val="accent1"/>
+          </a:fillRef>
+          <a:effectRef idx="1">
+            <a:schemeClr val="accent1"/>
+          </a:effectRef>
+          <a:fontRef idx="minor">
+            <a:schemeClr val="tx1"/>
+          </a:fontRef>
+        </p:style>
+      </p:cxnSp>
+      <p:cxnSp>
+        <p:nvCxnSpPr>
+          <p:cNvPr id="6" name="Gerade Verbindung mit Pfeil 5">
+            <a:extLst>
+              <a:ext uri="{FF2B5EF4-FFF2-40B4-BE49-F238E27FC236}">
+                <a16:creationId xmlns:a16="http://schemas.microsoft.com/office/drawing/2014/main" id="{9D82C0B4-EF39-2168-2AD7-6FE8F444F077}"/>
+              </a:ext>
+            </a:extLst>
+          </p:cNvPr>
+          <p:cNvCxnSpPr>
+            <a:cxnSpLocks/>
+          </p:cNvCxnSpPr>
+          <p:nvPr/>
+        </p:nvCxnSpPr>
+        <p:spPr>
+          <a:xfrm>
+            <a:off x="888435" y="2560528"/>
+            <a:ext cx="1748424" cy="0"/>
+          </a:xfrm>
+          <a:prstGeom prst="straightConnector1">
+            <a:avLst/>
+          </a:prstGeom>
+          <a:ln w="15875" cap="rnd">
+            <a:solidFill>
+              <a:schemeClr val="tx1"/>
+            </a:solidFill>
+            <a:round/>
+            <a:tailEnd type="triangle"/>
+          </a:ln>
+        </p:spPr>
+        <p:style>
+          <a:lnRef idx="2">
+            <a:schemeClr val="accent1"/>
+          </a:lnRef>
+          <a:fillRef idx="0">
+            <a:schemeClr val="accent1"/>
+          </a:fillRef>
+          <a:effectRef idx="1">
+            <a:schemeClr val="accent1"/>
+          </a:effectRef>
+          <a:fontRef idx="minor">
+            <a:schemeClr val="tx1"/>
+          </a:fontRef>
+        </p:style>
+      </p:cxnSp>
+      <p:sp>
+        <p:nvSpPr>
+          <p:cNvPr id="25" name="Textfeld 24">
+            <a:extLst>
+              <a:ext uri="{FF2B5EF4-FFF2-40B4-BE49-F238E27FC236}">
+                <a16:creationId xmlns:a16="http://schemas.microsoft.com/office/drawing/2014/main" id="{B116B872-F152-3DB2-6777-229C62D5CB3A}"/>
+              </a:ext>
+            </a:extLst>
+          </p:cNvPr>
+          <p:cNvSpPr txBox="1"/>
+          <p:nvPr/>
+        </p:nvSpPr>
+        <p:spPr>
+          <a:xfrm>
+            <a:off x="1070514" y="2506210"/>
+            <a:ext cx="752301" cy="307777"/>
+          </a:xfrm>
+          <a:prstGeom prst="rect">
+            <a:avLst/>
+          </a:prstGeom>
+          <a:noFill/>
+        </p:spPr>
+        <p:txBody>
+          <a:bodyPr wrap="square" rtlCol="0" anchor="ctr">
+            <a:spAutoFit/>
+          </a:bodyPr>
+          <a:lstStyle/>
+          <a:p>
+            <a:pPr algn="ctr"/>
+            <a:r>
+              <a:rPr lang="de-DE" sz="1400" i="1" dirty="0" err="1">
+                <a:solidFill>
+                  <a:schemeClr val="accent2">
+                    <a:lumMod val="75000"/>
+                  </a:schemeClr>
+                </a:solidFill>
+                <a:latin typeface="CMU Serif" panose="02000603000000000000" pitchFamily="2" charset="0"/>
+                <a:ea typeface="CMU Serif" panose="02000603000000000000" pitchFamily="2" charset="0"/>
+                <a:cs typeface="CMU Serif" panose="02000603000000000000" pitchFamily="2" charset="0"/>
+              </a:rPr>
+              <a:t>v</a:t>
+            </a:r>
+            <a:r>
+              <a:rPr lang="de-DE" sz="1400" i="1" baseline="-25000" dirty="0" err="1">
+                <a:solidFill>
+                  <a:schemeClr val="accent2">
+                    <a:lumMod val="75000"/>
+                  </a:schemeClr>
+                </a:solidFill>
+                <a:latin typeface="CMU Serif" panose="02000603000000000000" pitchFamily="2" charset="0"/>
+                <a:ea typeface="CMU Serif" panose="02000603000000000000" pitchFamily="2" charset="0"/>
+                <a:cs typeface="CMU Serif" panose="02000603000000000000" pitchFamily="2" charset="0"/>
+              </a:rPr>
+              <a:t>T</a:t>
+            </a:r>
+            <a:r>
+              <a:rPr lang="de-DE" sz="500" baseline="-25000" dirty="0">
+                <a:solidFill>
+                  <a:schemeClr val="accent2">
+                    <a:lumMod val="75000"/>
+                  </a:schemeClr>
+                </a:solidFill>
+                <a:latin typeface="CMU Serif" panose="02000603000000000000" pitchFamily="2" charset="0"/>
+                <a:ea typeface="CMU Serif" panose="02000603000000000000" pitchFamily="2" charset="0"/>
+                <a:cs typeface="CMU Serif" panose="02000603000000000000" pitchFamily="2" charset="0"/>
+              </a:rPr>
+              <a:t> </a:t>
+            </a:r>
+            <a:r>
+              <a:rPr lang="de-DE" sz="1400" baseline="-25000" dirty="0" err="1">
+                <a:solidFill>
+                  <a:schemeClr val="accent2">
+                    <a:lumMod val="75000"/>
+                  </a:schemeClr>
+                </a:solidFill>
+                <a:latin typeface="CMU Serif" panose="02000603000000000000" pitchFamily="2" charset="0"/>
+                <a:ea typeface="CMU Serif" panose="02000603000000000000" pitchFamily="2" charset="0"/>
+                <a:cs typeface="CMU Serif" panose="02000603000000000000" pitchFamily="2" charset="0"/>
+              </a:rPr>
+              <a:t>max</a:t>
+            </a:r>
+            <a:endParaRPr lang="de-DE" sz="1400" baseline="-25000" dirty="0">
+              <a:solidFill>
+                <a:schemeClr val="accent2">
+                  <a:lumMod val="75000"/>
+                </a:schemeClr>
+              </a:solidFill>
+              <a:latin typeface="CMU Serif" panose="02000603000000000000" pitchFamily="2" charset="0"/>
+              <a:ea typeface="CMU Serif" panose="02000603000000000000" pitchFamily="2" charset="0"/>
+              <a:cs typeface="CMU Serif" panose="02000603000000000000" pitchFamily="2" charset="0"/>
+            </a:endParaRPr>
+          </a:p>
+        </p:txBody>
+      </p:sp>
+      <p:sp>
+        <p:nvSpPr>
+          <p:cNvPr id="26" name="Textfeld 25">
+            <a:extLst>
+              <a:ext uri="{FF2B5EF4-FFF2-40B4-BE49-F238E27FC236}">
+                <a16:creationId xmlns:a16="http://schemas.microsoft.com/office/drawing/2014/main" id="{E749AB0C-B985-4164-DFCA-8B87FD599201}"/>
+              </a:ext>
+            </a:extLst>
+          </p:cNvPr>
+          <p:cNvSpPr txBox="1"/>
+          <p:nvPr/>
+        </p:nvSpPr>
+        <p:spPr>
+          <a:xfrm>
+            <a:off x="1609686" y="2503670"/>
+            <a:ext cx="752301" cy="307777"/>
+          </a:xfrm>
+          <a:prstGeom prst="rect">
+            <a:avLst/>
+          </a:prstGeom>
+          <a:noFill/>
+        </p:spPr>
+        <p:txBody>
+          <a:bodyPr wrap="square" rtlCol="0" anchor="ctr">
+            <a:spAutoFit/>
+          </a:bodyPr>
+          <a:lstStyle/>
+          <a:p>
+            <a:pPr algn="ctr"/>
+            <a:r>
+              <a:rPr lang="de-DE" sz="1400" i="1" dirty="0" err="1">
+                <a:solidFill>
+                  <a:schemeClr val="accent1"/>
+                </a:solidFill>
+                <a:latin typeface="CMU Serif" panose="02000603000000000000" pitchFamily="2" charset="0"/>
+                <a:ea typeface="CMU Serif" panose="02000603000000000000" pitchFamily="2" charset="0"/>
+                <a:cs typeface="CMU Serif" panose="02000603000000000000" pitchFamily="2" charset="0"/>
+              </a:rPr>
+              <a:t>v</a:t>
+            </a:r>
+            <a:r>
+              <a:rPr lang="de-DE" sz="1400" i="1" baseline="-25000" dirty="0" err="1">
+                <a:solidFill>
+                  <a:schemeClr val="accent1"/>
+                </a:solidFill>
+                <a:latin typeface="CMU Serif" panose="02000603000000000000" pitchFamily="2" charset="0"/>
+                <a:ea typeface="CMU Serif" panose="02000603000000000000" pitchFamily="2" charset="0"/>
+                <a:cs typeface="CMU Serif" panose="02000603000000000000" pitchFamily="2" charset="0"/>
+              </a:rPr>
+              <a:t>R</a:t>
+            </a:r>
+            <a:r>
+              <a:rPr lang="de-DE" sz="500" baseline="-25000" dirty="0">
+                <a:solidFill>
+                  <a:schemeClr val="accent1"/>
+                </a:solidFill>
+                <a:latin typeface="CMU Serif" panose="02000603000000000000" pitchFamily="2" charset="0"/>
+                <a:ea typeface="CMU Serif" panose="02000603000000000000" pitchFamily="2" charset="0"/>
+                <a:cs typeface="CMU Serif" panose="02000603000000000000" pitchFamily="2" charset="0"/>
+              </a:rPr>
+              <a:t> </a:t>
+            </a:r>
+            <a:r>
+              <a:rPr lang="de-DE" sz="1400" baseline="-25000" dirty="0" err="1">
+                <a:solidFill>
+                  <a:schemeClr val="accent1"/>
+                </a:solidFill>
+                <a:latin typeface="CMU Serif" panose="02000603000000000000" pitchFamily="2" charset="0"/>
+                <a:ea typeface="CMU Serif" panose="02000603000000000000" pitchFamily="2" charset="0"/>
+                <a:cs typeface="CMU Serif" panose="02000603000000000000" pitchFamily="2" charset="0"/>
+              </a:rPr>
+              <a:t>max</a:t>
+            </a:r>
+            <a:endParaRPr lang="de-DE" sz="1400" baseline="-25000" dirty="0">
+              <a:solidFill>
+                <a:schemeClr val="accent1"/>
+              </a:solidFill>
+              <a:latin typeface="CMU Serif" panose="02000603000000000000" pitchFamily="2" charset="0"/>
+              <a:ea typeface="CMU Serif" panose="02000603000000000000" pitchFamily="2" charset="0"/>
+              <a:cs typeface="CMU Serif" panose="02000603000000000000" pitchFamily="2" charset="0"/>
+            </a:endParaRPr>
+          </a:p>
+        </p:txBody>
+      </p:sp>
+    </p:spTree>
+    <p:extLst>
+      <p:ext uri="{BB962C8B-B14F-4D97-AF65-F5344CB8AC3E}">
+        <p14:creationId xmlns:p14="http://schemas.microsoft.com/office/powerpoint/2010/main" val="4010601396"/>
       </p:ext>
     </p:extLst>
   </p:cSld>

--- a/B.Sc. LRT/Luftfahrttechnik/images/LFT-Images.pptx
+++ b/B.Sc. LRT/Luftfahrttechnik/images/LFT-Images.pptx
@@ -5,12 +5,13 @@
     <p:sldMasterId id="2147483660" r:id="rId1"/>
   </p:sldMasterIdLst>
   <p:notesMasterIdLst>
-    <p:notesMasterId r:id="rId5"/>
+    <p:notesMasterId r:id="rId6"/>
   </p:notesMasterIdLst>
   <p:sldIdLst>
     <p:sldId id="256" r:id="rId2"/>
     <p:sldId id="257" r:id="rId3"/>
     <p:sldId id="258" r:id="rId4"/>
+    <p:sldId id="259" r:id="rId5"/>
   </p:sldIdLst>
   <p:sldSz cx="3600450" cy="3600450"/>
   <p:notesSz cx="6858000" cy="9144000"/>
@@ -166,7 +167,7 @@
             </a:lvl1pPr>
           </a:lstStyle>
           <a:p>
-            <a:endParaRPr lang="de-DE"/>
+            <a:endParaRPr lang="de-DE" dirty="0"/>
           </a:p>
         </p:txBody>
       </p:sp>
@@ -199,9 +200,9 @@
           <a:p>
             <a:fld id="{0C596C2D-C72C-406E-B79E-9BAC142DD20E}" type="datetimeFigureOut">
               <a:rPr lang="de-DE" smtClean="0"/>
-              <a:t>04.02.2026</a:t>
+              <a:t>05.02.2026</a:t>
             </a:fld>
-            <a:endParaRPr lang="de-DE"/>
+            <a:endParaRPr lang="de-DE" dirty="0"/>
           </a:p>
         </p:txBody>
       </p:sp>
@@ -234,7 +235,7 @@
           <a:bodyPr vert="horz" lIns="91440" tIns="45720" rIns="91440" bIns="45720" rtlCol="0" anchor="ctr"/>
           <a:lstStyle/>
           <a:p>
-            <a:endParaRPr lang="de-DE"/>
+            <a:endParaRPr lang="de-DE" dirty="0"/>
           </a:p>
         </p:txBody>
       </p:sp>
@@ -324,7 +325,7 @@
             </a:lvl1pPr>
           </a:lstStyle>
           <a:p>
-            <a:endParaRPr lang="de-DE"/>
+            <a:endParaRPr lang="de-DE" dirty="0"/>
           </a:p>
         </p:txBody>
       </p:sp>
@@ -359,7 +360,7 @@
               <a:rPr lang="de-DE" smtClean="0"/>
               <a:t>‹Nr.›</a:t>
             </a:fld>
-            <a:endParaRPr lang="de-DE"/>
+            <a:endParaRPr lang="de-DE" dirty="0"/>
           </a:p>
         </p:txBody>
       </p:sp>
@@ -597,9 +598,9 @@
           <a:p>
             <a:fld id="{6EAE28AA-0912-4DA0-8B30-7F3CA3FE6671}" type="datetimeFigureOut">
               <a:rPr lang="de-DE" smtClean="0"/>
-              <a:t>04.02.2026</a:t>
+              <a:t>05.02.2026</a:t>
             </a:fld>
-            <a:endParaRPr lang="de-DE"/>
+            <a:endParaRPr lang="de-DE" dirty="0"/>
           </a:p>
         </p:txBody>
       </p:sp>
@@ -618,7 +619,7 @@
           <a:bodyPr/>
           <a:lstStyle/>
           <a:p>
-            <a:endParaRPr lang="de-DE"/>
+            <a:endParaRPr lang="de-DE" dirty="0"/>
           </a:p>
         </p:txBody>
       </p:sp>
@@ -641,7 +642,7 @@
               <a:rPr lang="de-DE" smtClean="0"/>
               <a:t>‹Nr.›</a:t>
             </a:fld>
-            <a:endParaRPr lang="de-DE"/>
+            <a:endParaRPr lang="de-DE" dirty="0"/>
           </a:p>
         </p:txBody>
       </p:sp>
@@ -767,9 +768,9 @@
           <a:p>
             <a:fld id="{6EAE28AA-0912-4DA0-8B30-7F3CA3FE6671}" type="datetimeFigureOut">
               <a:rPr lang="de-DE" smtClean="0"/>
-              <a:t>04.02.2026</a:t>
+              <a:t>05.02.2026</a:t>
             </a:fld>
-            <a:endParaRPr lang="de-DE"/>
+            <a:endParaRPr lang="de-DE" dirty="0"/>
           </a:p>
         </p:txBody>
       </p:sp>
@@ -788,7 +789,7 @@
           <a:bodyPr/>
           <a:lstStyle/>
           <a:p>
-            <a:endParaRPr lang="de-DE"/>
+            <a:endParaRPr lang="de-DE" dirty="0"/>
           </a:p>
         </p:txBody>
       </p:sp>
@@ -811,7 +812,7 @@
               <a:rPr lang="de-DE" smtClean="0"/>
               <a:t>‹Nr.›</a:t>
             </a:fld>
-            <a:endParaRPr lang="de-DE"/>
+            <a:endParaRPr lang="de-DE" dirty="0"/>
           </a:p>
         </p:txBody>
       </p:sp>
@@ -947,9 +948,9 @@
           <a:p>
             <a:fld id="{6EAE28AA-0912-4DA0-8B30-7F3CA3FE6671}" type="datetimeFigureOut">
               <a:rPr lang="de-DE" smtClean="0"/>
-              <a:t>04.02.2026</a:t>
+              <a:t>05.02.2026</a:t>
             </a:fld>
-            <a:endParaRPr lang="de-DE"/>
+            <a:endParaRPr lang="de-DE" dirty="0"/>
           </a:p>
         </p:txBody>
       </p:sp>
@@ -968,7 +969,7 @@
           <a:bodyPr/>
           <a:lstStyle/>
           <a:p>
-            <a:endParaRPr lang="de-DE"/>
+            <a:endParaRPr lang="de-DE" dirty="0"/>
           </a:p>
         </p:txBody>
       </p:sp>
@@ -991,7 +992,7 @@
               <a:rPr lang="de-DE" smtClean="0"/>
               <a:t>‹Nr.›</a:t>
             </a:fld>
-            <a:endParaRPr lang="de-DE"/>
+            <a:endParaRPr lang="de-DE" dirty="0"/>
           </a:p>
         </p:txBody>
       </p:sp>
@@ -1117,9 +1118,9 @@
           <a:p>
             <a:fld id="{6EAE28AA-0912-4DA0-8B30-7F3CA3FE6671}" type="datetimeFigureOut">
               <a:rPr lang="de-DE" smtClean="0"/>
-              <a:t>04.02.2026</a:t>
+              <a:t>05.02.2026</a:t>
             </a:fld>
-            <a:endParaRPr lang="de-DE"/>
+            <a:endParaRPr lang="de-DE" dirty="0"/>
           </a:p>
         </p:txBody>
       </p:sp>
@@ -1138,7 +1139,7 @@
           <a:bodyPr/>
           <a:lstStyle/>
           <a:p>
-            <a:endParaRPr lang="de-DE"/>
+            <a:endParaRPr lang="de-DE" dirty="0"/>
           </a:p>
         </p:txBody>
       </p:sp>
@@ -1161,7 +1162,7 @@
               <a:rPr lang="de-DE" smtClean="0"/>
               <a:t>‹Nr.›</a:t>
             </a:fld>
-            <a:endParaRPr lang="de-DE"/>
+            <a:endParaRPr lang="de-DE" dirty="0"/>
           </a:p>
         </p:txBody>
       </p:sp>
@@ -1363,9 +1364,9 @@
           <a:p>
             <a:fld id="{6EAE28AA-0912-4DA0-8B30-7F3CA3FE6671}" type="datetimeFigureOut">
               <a:rPr lang="de-DE" smtClean="0"/>
-              <a:t>04.02.2026</a:t>
+              <a:t>05.02.2026</a:t>
             </a:fld>
-            <a:endParaRPr lang="de-DE"/>
+            <a:endParaRPr lang="de-DE" dirty="0"/>
           </a:p>
         </p:txBody>
       </p:sp>
@@ -1384,7 +1385,7 @@
           <a:bodyPr/>
           <a:lstStyle/>
           <a:p>
-            <a:endParaRPr lang="de-DE"/>
+            <a:endParaRPr lang="de-DE" dirty="0"/>
           </a:p>
         </p:txBody>
       </p:sp>
@@ -1407,7 +1408,7 @@
               <a:rPr lang="de-DE" smtClean="0"/>
               <a:t>‹Nr.›</a:t>
             </a:fld>
-            <a:endParaRPr lang="de-DE"/>
+            <a:endParaRPr lang="de-DE" dirty="0"/>
           </a:p>
         </p:txBody>
       </p:sp>
@@ -1595,9 +1596,9 @@
           <a:p>
             <a:fld id="{6EAE28AA-0912-4DA0-8B30-7F3CA3FE6671}" type="datetimeFigureOut">
               <a:rPr lang="de-DE" smtClean="0"/>
-              <a:t>04.02.2026</a:t>
+              <a:t>05.02.2026</a:t>
             </a:fld>
-            <a:endParaRPr lang="de-DE"/>
+            <a:endParaRPr lang="de-DE" dirty="0"/>
           </a:p>
         </p:txBody>
       </p:sp>
@@ -1616,7 +1617,7 @@
           <a:bodyPr/>
           <a:lstStyle/>
           <a:p>
-            <a:endParaRPr lang="de-DE"/>
+            <a:endParaRPr lang="de-DE" dirty="0"/>
           </a:p>
         </p:txBody>
       </p:sp>
@@ -1639,7 +1640,7 @@
               <a:rPr lang="de-DE" smtClean="0"/>
               <a:t>‹Nr.›</a:t>
             </a:fld>
-            <a:endParaRPr lang="de-DE"/>
+            <a:endParaRPr lang="de-DE" dirty="0"/>
           </a:p>
         </p:txBody>
       </p:sp>
@@ -1962,9 +1963,9 @@
           <a:p>
             <a:fld id="{6EAE28AA-0912-4DA0-8B30-7F3CA3FE6671}" type="datetimeFigureOut">
               <a:rPr lang="de-DE" smtClean="0"/>
-              <a:t>04.02.2026</a:t>
+              <a:t>05.02.2026</a:t>
             </a:fld>
-            <a:endParaRPr lang="de-DE"/>
+            <a:endParaRPr lang="de-DE" dirty="0"/>
           </a:p>
         </p:txBody>
       </p:sp>
@@ -1983,7 +1984,7 @@
           <a:bodyPr/>
           <a:lstStyle/>
           <a:p>
-            <a:endParaRPr lang="de-DE"/>
+            <a:endParaRPr lang="de-DE" dirty="0"/>
           </a:p>
         </p:txBody>
       </p:sp>
@@ -2006,7 +2007,7 @@
               <a:rPr lang="de-DE" smtClean="0"/>
               <a:t>‹Nr.›</a:t>
             </a:fld>
-            <a:endParaRPr lang="de-DE"/>
+            <a:endParaRPr lang="de-DE" dirty="0"/>
           </a:p>
         </p:txBody>
       </p:sp>
@@ -2080,9 +2081,9 @@
           <a:p>
             <a:fld id="{6EAE28AA-0912-4DA0-8B30-7F3CA3FE6671}" type="datetimeFigureOut">
               <a:rPr lang="de-DE" smtClean="0"/>
-              <a:t>04.02.2026</a:t>
+              <a:t>05.02.2026</a:t>
             </a:fld>
-            <a:endParaRPr lang="de-DE"/>
+            <a:endParaRPr lang="de-DE" dirty="0"/>
           </a:p>
         </p:txBody>
       </p:sp>
@@ -2101,7 +2102,7 @@
           <a:bodyPr/>
           <a:lstStyle/>
           <a:p>
-            <a:endParaRPr lang="de-DE"/>
+            <a:endParaRPr lang="de-DE" dirty="0"/>
           </a:p>
         </p:txBody>
       </p:sp>
@@ -2124,7 +2125,7 @@
               <a:rPr lang="de-DE" smtClean="0"/>
               <a:t>‹Nr.›</a:t>
             </a:fld>
-            <a:endParaRPr lang="de-DE"/>
+            <a:endParaRPr lang="de-DE" dirty="0"/>
           </a:p>
         </p:txBody>
       </p:sp>
@@ -2175,9 +2176,9 @@
           <a:p>
             <a:fld id="{6EAE28AA-0912-4DA0-8B30-7F3CA3FE6671}" type="datetimeFigureOut">
               <a:rPr lang="de-DE" smtClean="0"/>
-              <a:t>04.02.2026</a:t>
+              <a:t>05.02.2026</a:t>
             </a:fld>
-            <a:endParaRPr lang="de-DE"/>
+            <a:endParaRPr lang="de-DE" dirty="0"/>
           </a:p>
         </p:txBody>
       </p:sp>
@@ -2196,7 +2197,7 @@
           <a:bodyPr/>
           <a:lstStyle/>
           <a:p>
-            <a:endParaRPr lang="de-DE"/>
+            <a:endParaRPr lang="de-DE" dirty="0"/>
           </a:p>
         </p:txBody>
       </p:sp>
@@ -2219,7 +2220,7 @@
               <a:rPr lang="de-DE" smtClean="0"/>
               <a:t>‹Nr.›</a:t>
             </a:fld>
-            <a:endParaRPr lang="de-DE"/>
+            <a:endParaRPr lang="de-DE" dirty="0"/>
           </a:p>
         </p:txBody>
       </p:sp>
@@ -2452,9 +2453,9 @@
           <a:p>
             <a:fld id="{6EAE28AA-0912-4DA0-8B30-7F3CA3FE6671}" type="datetimeFigureOut">
               <a:rPr lang="de-DE" smtClean="0"/>
-              <a:t>04.02.2026</a:t>
+              <a:t>05.02.2026</a:t>
             </a:fld>
-            <a:endParaRPr lang="de-DE"/>
+            <a:endParaRPr lang="de-DE" dirty="0"/>
           </a:p>
         </p:txBody>
       </p:sp>
@@ -2473,7 +2474,7 @@
           <a:bodyPr/>
           <a:lstStyle/>
           <a:p>
-            <a:endParaRPr lang="de-DE"/>
+            <a:endParaRPr lang="de-DE" dirty="0"/>
           </a:p>
         </p:txBody>
       </p:sp>
@@ -2496,7 +2497,7 @@
               <a:rPr lang="de-DE" smtClean="0"/>
               <a:t>‹Nr.›</a:t>
             </a:fld>
-            <a:endParaRPr lang="de-DE"/>
+            <a:endParaRPr lang="de-DE" dirty="0"/>
           </a:p>
         </p:txBody>
       </p:sp>
@@ -2620,7 +2621,7 @@
           </a:lstStyle>
           <a:p>
             <a:r>
-              <a:rPr lang="de-DE"/>
+              <a:rPr lang="de-DE" dirty="0"/>
               <a:t>Bild durch Klicken auf Symbol hinzufügen</a:t>
             </a:r>
             <a:endParaRPr lang="en-US" dirty="0"/>
@@ -2709,9 +2710,9 @@
           <a:p>
             <a:fld id="{6EAE28AA-0912-4DA0-8B30-7F3CA3FE6671}" type="datetimeFigureOut">
               <a:rPr lang="de-DE" smtClean="0"/>
-              <a:t>04.02.2026</a:t>
+              <a:t>05.02.2026</a:t>
             </a:fld>
-            <a:endParaRPr lang="de-DE"/>
+            <a:endParaRPr lang="de-DE" dirty="0"/>
           </a:p>
         </p:txBody>
       </p:sp>
@@ -2730,7 +2731,7 @@
           <a:bodyPr/>
           <a:lstStyle/>
           <a:p>
-            <a:endParaRPr lang="de-DE"/>
+            <a:endParaRPr lang="de-DE" dirty="0"/>
           </a:p>
         </p:txBody>
       </p:sp>
@@ -2753,7 +2754,7 @@
               <a:rPr lang="de-DE" smtClean="0"/>
               <a:t>‹Nr.›</a:t>
             </a:fld>
-            <a:endParaRPr lang="de-DE"/>
+            <a:endParaRPr lang="de-DE" dirty="0"/>
           </a:p>
         </p:txBody>
       </p:sp>
@@ -2922,9 +2923,9 @@
           <a:p>
             <a:fld id="{6EAE28AA-0912-4DA0-8B30-7F3CA3FE6671}" type="datetimeFigureOut">
               <a:rPr lang="de-DE" smtClean="0"/>
-              <a:t>04.02.2026</a:t>
+              <a:t>05.02.2026</a:t>
             </a:fld>
-            <a:endParaRPr lang="de-DE"/>
+            <a:endParaRPr lang="de-DE" dirty="0"/>
           </a:p>
         </p:txBody>
       </p:sp>
@@ -2961,7 +2962,7 @@
             </a:lvl1pPr>
           </a:lstStyle>
           <a:p>
-            <a:endParaRPr lang="de-DE"/>
+            <a:endParaRPr lang="de-DE" dirty="0"/>
           </a:p>
         </p:txBody>
       </p:sp>
@@ -3002,7 +3003,7 @@
               <a:rPr lang="de-DE" smtClean="0"/>
               <a:t>‹Nr.›</a:t>
             </a:fld>
-            <a:endParaRPr lang="de-DE"/>
+            <a:endParaRPr lang="de-DE" dirty="0"/>
           </a:p>
         </p:txBody>
       </p:sp>
@@ -3421,7 +3422,7 @@
           <a:lstStyle/>
           <a:p>
             <a:pPr algn="ctr"/>
-            <a:endParaRPr lang="de-DE"/>
+            <a:endParaRPr lang="de-DE" dirty="0"/>
           </a:p>
         </p:txBody>
       </p:sp>
@@ -3652,7 +3653,7 @@
               <a:lstStyle/>
               <a:p>
                 <a:pPr algn="ctr"/>
-                <a:endParaRPr lang="de-DE" sz="1100"/>
+                <a:endParaRPr lang="de-DE" sz="1100" dirty="0"/>
               </a:p>
             </p:txBody>
           </p:sp>
@@ -3702,7 +3703,7 @@
               <a:lstStyle/>
               <a:p>
                 <a:pPr algn="ctr"/>
-                <a:endParaRPr lang="de-DE" sz="1100"/>
+                <a:endParaRPr lang="de-DE" sz="1100" dirty="0"/>
               </a:p>
             </p:txBody>
           </p:sp>
@@ -3752,7 +3753,7 @@
               <a:lstStyle/>
               <a:p>
                 <a:pPr algn="ctr"/>
-                <a:endParaRPr lang="de-DE" sz="1100"/>
+                <a:endParaRPr lang="de-DE" sz="1100" dirty="0"/>
               </a:p>
             </p:txBody>
           </p:sp>
@@ -4003,7 +4004,7 @@
                 <a:lstStyle/>
                 <a:p>
                   <a:pPr algn="ctr"/>
-                  <a:endParaRPr lang="de-DE" sz="1100"/>
+                  <a:endParaRPr lang="de-DE" sz="1100" dirty="0"/>
                 </a:p>
               </p:txBody>
             </p:sp>
@@ -4449,7 +4450,7 @@
                 <a:lstStyle/>
                 <a:p>
                   <a:pPr algn="ctr"/>
-                  <a:endParaRPr lang="de-DE" sz="1100"/>
+                  <a:endParaRPr lang="de-DE" sz="1100" dirty="0"/>
                 </a:p>
               </p:txBody>
             </p:sp>
@@ -4499,7 +4500,7 @@
                 <a:lstStyle/>
                 <a:p>
                   <a:pPr algn="ctr"/>
-                  <a:endParaRPr lang="de-DE" sz="1100"/>
+                  <a:endParaRPr lang="de-DE" sz="1100" dirty="0"/>
                 </a:p>
               </p:txBody>
             </p:sp>
@@ -4552,7 +4553,7 @@
                 <a:lstStyle/>
                 <a:p>
                   <a:pPr algn="ctr"/>
-                  <a:endParaRPr lang="de-DE" sz="1100"/>
+                  <a:endParaRPr lang="de-DE" sz="1100" dirty="0"/>
                 </a:p>
               </p:txBody>
             </p:sp>
@@ -4693,7 +4694,7 @@
                 <a:lstStyle/>
                 <a:p>
                   <a:pPr algn="ctr"/>
-                  <a:endParaRPr lang="de-DE" sz="1100"/>
+                  <a:endParaRPr lang="de-DE" sz="1100" dirty="0"/>
                 </a:p>
               </p:txBody>
             </p:sp>
@@ -4960,7 +4961,7 @@
                 <a:lstStyle/>
                 <a:p>
                   <a:pPr algn="ctr"/>
-                  <a:endParaRPr lang="de-DE" sz="1100"/>
+                  <a:endParaRPr lang="de-DE" sz="1100" dirty="0"/>
                 </a:p>
               </p:txBody>
             </p:sp>
@@ -5268,7 +5269,7 @@
                 <a:lstStyle/>
                 <a:p>
                   <a:pPr algn="ctr"/>
-                  <a:endParaRPr lang="de-DE" sz="1100"/>
+                  <a:endParaRPr lang="de-DE" sz="1100" dirty="0"/>
                 </a:p>
               </p:txBody>
             </p:sp>
@@ -5714,7 +5715,7 @@
                 <a:lstStyle/>
                 <a:p>
                   <a:pPr algn="ctr"/>
-                  <a:endParaRPr lang="de-DE" sz="1100"/>
+                  <a:endParaRPr lang="de-DE" sz="1100" dirty="0"/>
                 </a:p>
               </p:txBody>
             </p:sp>
@@ -5764,7 +5765,7 @@
                 <a:lstStyle/>
                 <a:p>
                   <a:pPr algn="ctr"/>
-                  <a:endParaRPr lang="de-DE" sz="1100"/>
+                  <a:endParaRPr lang="de-DE" sz="1100" dirty="0"/>
                 </a:p>
               </p:txBody>
             </p:sp>
@@ -5817,7 +5818,7 @@
                 <a:lstStyle/>
                 <a:p>
                   <a:pPr algn="ctr"/>
-                  <a:endParaRPr lang="de-DE" sz="1100"/>
+                  <a:endParaRPr lang="de-DE" sz="1100" dirty="0"/>
                 </a:p>
               </p:txBody>
             </p:sp>
@@ -5958,7 +5959,7 @@
                 <a:lstStyle/>
                 <a:p>
                   <a:pPr algn="ctr"/>
-                  <a:endParaRPr lang="de-DE" sz="1100"/>
+                  <a:endParaRPr lang="de-DE" sz="1100" dirty="0"/>
                 </a:p>
               </p:txBody>
             </p:sp>
@@ -6225,7 +6226,7 @@
                 <a:lstStyle/>
                 <a:p>
                   <a:pPr algn="ctr"/>
-                  <a:endParaRPr lang="de-DE" sz="1100"/>
+                  <a:endParaRPr lang="de-DE" sz="1100" dirty="0"/>
                 </a:p>
               </p:txBody>
             </p:sp>
@@ -6466,7 +6467,7 @@
             <a:lstStyle/>
             <a:p>
               <a:pPr algn="ctr"/>
-              <a:endParaRPr lang="de-DE" sz="1100"/>
+              <a:endParaRPr lang="de-DE" sz="1100" dirty="0"/>
             </a:p>
           </p:txBody>
         </p:sp>
@@ -6519,7 +6520,7 @@
             <a:lstStyle/>
             <a:p>
               <a:pPr algn="ctr"/>
-              <a:endParaRPr lang="de-DE" sz="1100"/>
+              <a:endParaRPr lang="de-DE" sz="1100" dirty="0"/>
             </a:p>
           </p:txBody>
         </p:sp>
@@ -7550,7 +7551,7 @@
           <a:p>
             <a:pPr algn="ctr"/>
             <a:r>
-              <a:rPr lang="de-DE" sz="1100" i="1" dirty="0" err="1">
+              <a:rPr lang="de-DE" sz="1100" i="1" dirty="0">
                 <a:latin typeface="CMU Serif" panose="02000603000000000000" pitchFamily="2" charset="0"/>
                 <a:ea typeface="CMU Serif" panose="02000603000000000000" pitchFamily="2" charset="0"/>
                 <a:cs typeface="CMU Serif" panose="02000603000000000000" pitchFamily="2" charset="0"/>
@@ -7558,18 +7559,13 @@
               <a:t>b</a:t>
             </a:r>
             <a:r>
-              <a:rPr lang="de-DE" sz="1100" baseline="-25000" dirty="0" err="1">
+              <a:rPr lang="de-DE" sz="1100" baseline="-25000" dirty="0">
                 <a:latin typeface="CMU Serif" panose="02000603000000000000" pitchFamily="2" charset="0"/>
                 <a:ea typeface="CMU Serif" panose="02000603000000000000" pitchFamily="2" charset="0"/>
                 <a:cs typeface="CMU Serif" panose="02000603000000000000" pitchFamily="2" charset="0"/>
               </a:rPr>
               <a:t>H</a:t>
             </a:r>
-            <a:endParaRPr lang="de-DE" sz="1100" baseline="-25000" dirty="0">
-              <a:latin typeface="CMU Serif" panose="02000603000000000000" pitchFamily="2" charset="0"/>
-              <a:ea typeface="CMU Serif" panose="02000603000000000000" pitchFamily="2" charset="0"/>
-              <a:cs typeface="CMU Serif" panose="02000603000000000000" pitchFamily="2" charset="0"/>
-            </a:endParaRPr>
           </a:p>
         </p:txBody>
       </p:sp>
@@ -7649,7 +7645,7 @@
           <a:p>
             <a:pPr algn="ctr"/>
             <a:r>
-              <a:rPr lang="de-DE" sz="1100" i="1" dirty="0" err="1">
+              <a:rPr lang="de-DE" sz="1100" i="1" dirty="0">
                 <a:latin typeface="CMU Serif" panose="02000603000000000000" pitchFamily="2" charset="0"/>
                 <a:ea typeface="CMU Serif" panose="02000603000000000000" pitchFamily="2" charset="0"/>
                 <a:cs typeface="CMU Serif" panose="02000603000000000000" pitchFamily="2" charset="0"/>
@@ -7657,18 +7653,13 @@
               <a:t>s</a:t>
             </a:r>
             <a:r>
-              <a:rPr lang="de-DE" sz="1100" baseline="-25000" dirty="0" err="1">
+              <a:rPr lang="de-DE" sz="1100" baseline="-25000" dirty="0">
                 <a:latin typeface="CMU Serif" panose="02000603000000000000" pitchFamily="2" charset="0"/>
                 <a:ea typeface="CMU Serif" panose="02000603000000000000" pitchFamily="2" charset="0"/>
                 <a:cs typeface="CMU Serif" panose="02000603000000000000" pitchFamily="2" charset="0"/>
               </a:rPr>
               <a:t>H</a:t>
             </a:r>
-            <a:endParaRPr lang="de-DE" sz="1100" baseline="-25000" dirty="0">
-              <a:latin typeface="CMU Serif" panose="02000603000000000000" pitchFamily="2" charset="0"/>
-              <a:ea typeface="CMU Serif" panose="02000603000000000000" pitchFamily="2" charset="0"/>
-              <a:cs typeface="CMU Serif" panose="02000603000000000000" pitchFamily="2" charset="0"/>
-            </a:endParaRPr>
           </a:p>
         </p:txBody>
       </p:sp>
@@ -8004,7 +7995,7 @@
           <a:lstStyle/>
           <a:p>
             <a:pPr algn="ctr"/>
-            <a:endParaRPr lang="de-DE"/>
+            <a:endParaRPr lang="de-DE" dirty="0"/>
           </a:p>
         </p:txBody>
       </p:sp>
@@ -8095,7 +8086,7 @@
           <a:p>
             <a:pPr algn="ctr"/>
             <a:r>
-              <a:rPr lang="de-DE" sz="1100" i="1" dirty="0" err="1">
+              <a:rPr lang="de-DE" sz="1100" i="1" dirty="0">
                 <a:latin typeface="CMU Serif" panose="02000603000000000000" pitchFamily="2" charset="0"/>
                 <a:ea typeface="CMU Serif" panose="02000603000000000000" pitchFamily="2" charset="0"/>
                 <a:cs typeface="CMU Serif" panose="02000603000000000000" pitchFamily="2" charset="0"/>
@@ -8103,18 +8094,13 @@
               <a:t>l</a:t>
             </a:r>
             <a:r>
-              <a:rPr lang="de-DE" sz="1100" baseline="-25000" dirty="0" err="1">
+              <a:rPr lang="de-DE" sz="1100" baseline="-25000" dirty="0">
                 <a:latin typeface="CMU Serif" panose="02000603000000000000" pitchFamily="2" charset="0"/>
                 <a:ea typeface="CMU Serif" panose="02000603000000000000" pitchFamily="2" charset="0"/>
                 <a:cs typeface="CMU Serif" panose="02000603000000000000" pitchFamily="2" charset="0"/>
               </a:rPr>
               <a:t>R</a:t>
             </a:r>
-            <a:endParaRPr lang="de-DE" sz="1100" baseline="-25000" dirty="0">
-              <a:latin typeface="CMU Serif" panose="02000603000000000000" pitchFamily="2" charset="0"/>
-              <a:ea typeface="CMU Serif" panose="02000603000000000000" pitchFamily="2" charset="0"/>
-              <a:cs typeface="CMU Serif" panose="02000603000000000000" pitchFamily="2" charset="0"/>
-            </a:endParaRPr>
           </a:p>
         </p:txBody>
       </p:sp>
@@ -8169,7 +8155,7 @@
           <a:lstStyle/>
           <a:p>
             <a:pPr algn="ctr"/>
-            <a:endParaRPr lang="de-DE"/>
+            <a:endParaRPr lang="de-DE" dirty="0"/>
           </a:p>
         </p:txBody>
       </p:sp>
@@ -8203,7 +8189,7 @@
           <a:p>
             <a:pPr algn="ctr"/>
             <a:r>
-              <a:rPr lang="de-DE" sz="1100" i="1" dirty="0" err="1">
+              <a:rPr lang="de-DE" sz="1100" i="1" dirty="0">
                 <a:solidFill>
                   <a:schemeClr val="accent5"/>
                 </a:solidFill>
@@ -8214,7 +8200,7 @@
               <a:t>φ</a:t>
             </a:r>
             <a:r>
-              <a:rPr lang="de-DE" sz="1100" baseline="-25000" dirty="0" err="1">
+              <a:rPr lang="de-DE" sz="1100" baseline="-25000" dirty="0">
                 <a:solidFill>
                   <a:schemeClr val="accent5"/>
                 </a:solidFill>
@@ -8224,14 +8210,6 @@
               </a:rPr>
               <a:t>v</a:t>
             </a:r>
-            <a:endParaRPr lang="de-DE" sz="1100" baseline="-25000" dirty="0">
-              <a:solidFill>
-                <a:schemeClr val="accent5"/>
-              </a:solidFill>
-              <a:latin typeface="CMU Serif" panose="02000603000000000000" pitchFamily="2" charset="0"/>
-              <a:ea typeface="CMU Serif" panose="02000603000000000000" pitchFamily="2" charset="0"/>
-              <a:cs typeface="CMU Serif" panose="02000603000000000000" pitchFamily="2" charset="0"/>
-            </a:endParaRPr>
           </a:p>
         </p:txBody>
       </p:sp>
@@ -8330,7 +8308,7 @@
           <a:lstStyle/>
           <a:p>
             <a:pPr algn="ctr"/>
-            <a:endParaRPr lang="de-DE"/>
+            <a:endParaRPr lang="de-DE" dirty="0"/>
           </a:p>
         </p:txBody>
       </p:sp>
@@ -8826,7 +8804,7 @@
           <a:p>
             <a:pPr algn="ctr"/>
             <a:r>
-              <a:rPr lang="de-DE" sz="1100" i="1" dirty="0" err="1">
+              <a:rPr lang="de-DE" sz="1100" i="1" dirty="0">
                 <a:latin typeface="CMU Serif" panose="02000603000000000000" pitchFamily="2" charset="0"/>
                 <a:ea typeface="CMU Serif" panose="02000603000000000000" pitchFamily="2" charset="0"/>
                 <a:cs typeface="CMU Serif" panose="02000603000000000000" pitchFamily="2" charset="0"/>
@@ -8834,18 +8812,13 @@
               <a:t>r</a:t>
             </a:r>
             <a:r>
-              <a:rPr lang="de-DE" sz="1100" baseline="-25000" dirty="0" err="1">
+              <a:rPr lang="de-DE" sz="1100" baseline="-25000" dirty="0">
                 <a:latin typeface="CMU Serif" panose="02000603000000000000" pitchFamily="2" charset="0"/>
                 <a:ea typeface="CMU Serif" panose="02000603000000000000" pitchFamily="2" charset="0"/>
                 <a:cs typeface="CMU Serif" panose="02000603000000000000" pitchFamily="2" charset="0"/>
               </a:rPr>
               <a:t>aH</a:t>
             </a:r>
-            <a:endParaRPr lang="de-DE" sz="1100" baseline="-25000" dirty="0">
-              <a:latin typeface="CMU Serif" panose="02000603000000000000" pitchFamily="2" charset="0"/>
-              <a:ea typeface="CMU Serif" panose="02000603000000000000" pitchFamily="2" charset="0"/>
-              <a:cs typeface="CMU Serif" panose="02000603000000000000" pitchFamily="2" charset="0"/>
-            </a:endParaRPr>
           </a:p>
         </p:txBody>
       </p:sp>
@@ -8879,7 +8852,7 @@
           <a:p>
             <a:pPr algn="ctr"/>
             <a:r>
-              <a:rPr lang="de-DE" sz="1100" i="1" dirty="0" err="1">
+              <a:rPr lang="de-DE" sz="1100" i="1" dirty="0">
                 <a:latin typeface="CMU Serif" panose="02000603000000000000" pitchFamily="2" charset="0"/>
                 <a:ea typeface="CMU Serif" panose="02000603000000000000" pitchFamily="2" charset="0"/>
                 <a:cs typeface="CMU Serif" panose="02000603000000000000" pitchFamily="2" charset="0"/>
@@ -8887,18 +8860,13 @@
               <a:t>l</a:t>
             </a:r>
             <a:r>
-              <a:rPr lang="de-DE" sz="1100" baseline="-25000" dirty="0" err="1">
+              <a:rPr lang="de-DE" sz="1100" baseline="-25000" dirty="0">
                 <a:latin typeface="CMU Serif" panose="02000603000000000000" pitchFamily="2" charset="0"/>
                 <a:ea typeface="CMU Serif" panose="02000603000000000000" pitchFamily="2" charset="0"/>
                 <a:cs typeface="CMU Serif" panose="02000603000000000000" pitchFamily="2" charset="0"/>
               </a:rPr>
               <a:t>aH</a:t>
             </a:r>
-            <a:endParaRPr lang="de-DE" sz="1100" baseline="-25000" dirty="0">
-              <a:latin typeface="CMU Serif" panose="02000603000000000000" pitchFamily="2" charset="0"/>
-              <a:ea typeface="CMU Serif" panose="02000603000000000000" pitchFamily="2" charset="0"/>
-              <a:cs typeface="CMU Serif" panose="02000603000000000000" pitchFamily="2" charset="0"/>
-            </a:endParaRPr>
           </a:p>
         </p:txBody>
       </p:sp>
@@ -9158,7 +9126,7 @@
           <a:p>
             <a:pPr algn="ctr"/>
             <a:r>
-              <a:rPr lang="de-DE" sz="1100" i="1" dirty="0" err="1">
+              <a:rPr lang="de-DE" sz="1100" i="1" dirty="0">
                 <a:latin typeface="CMU Serif" panose="02000603000000000000" pitchFamily="2" charset="0"/>
                 <a:ea typeface="CMU Serif" panose="02000603000000000000" pitchFamily="2" charset="0"/>
                 <a:cs typeface="CMU Serif" panose="02000603000000000000" pitchFamily="2" charset="0"/>
@@ -9166,18 +9134,13 @@
               <a:t>l</a:t>
             </a:r>
             <a:r>
-              <a:rPr lang="de-DE" sz="1100" baseline="-25000" dirty="0" err="1">
+              <a:rPr lang="de-DE" sz="1100" baseline="-25000" dirty="0">
                 <a:latin typeface="CMU Serif" panose="02000603000000000000" pitchFamily="2" charset="0"/>
                 <a:ea typeface="CMU Serif" panose="02000603000000000000" pitchFamily="2" charset="0"/>
                 <a:cs typeface="CMU Serif" panose="02000603000000000000" pitchFamily="2" charset="0"/>
               </a:rPr>
               <a:t>iH</a:t>
             </a:r>
-            <a:endParaRPr lang="de-DE" sz="1100" baseline="-25000" dirty="0">
-              <a:latin typeface="CMU Serif" panose="02000603000000000000" pitchFamily="2" charset="0"/>
-              <a:ea typeface="CMU Serif" panose="02000603000000000000" pitchFamily="2" charset="0"/>
-              <a:cs typeface="CMU Serif" panose="02000603000000000000" pitchFamily="2" charset="0"/>
-            </a:endParaRPr>
           </a:p>
         </p:txBody>
       </p:sp>
@@ -9655,7 +9618,7 @@
           <a:p>
             <a:pPr algn="ctr"/>
             <a:r>
-              <a:rPr lang="de-DE" sz="1100" i="1" dirty="0" err="1">
+              <a:rPr lang="de-DE" sz="1100" i="1" dirty="0">
                 <a:latin typeface="CMU Serif" panose="02000603000000000000" pitchFamily="2" charset="0"/>
                 <a:ea typeface="CMU Serif" panose="02000603000000000000" pitchFamily="2" charset="0"/>
                 <a:cs typeface="CMU Serif" panose="02000603000000000000" pitchFamily="2" charset="0"/>
@@ -9663,18 +9626,13 @@
               <a:t>s</a:t>
             </a:r>
             <a:r>
-              <a:rPr lang="de-DE" sz="1100" baseline="-25000" dirty="0" err="1">
+              <a:rPr lang="de-DE" sz="1100" baseline="-25000" dirty="0">
                 <a:latin typeface="CMU Serif" panose="02000603000000000000" pitchFamily="2" charset="0"/>
                 <a:ea typeface="CMU Serif" panose="02000603000000000000" pitchFamily="2" charset="0"/>
                 <a:cs typeface="CMU Serif" panose="02000603000000000000" pitchFamily="2" charset="0"/>
               </a:rPr>
               <a:t>Q</a:t>
             </a:r>
-            <a:endParaRPr lang="de-DE" sz="1100" baseline="-25000" dirty="0">
-              <a:latin typeface="CMU Serif" panose="02000603000000000000" pitchFamily="2" charset="0"/>
-              <a:ea typeface="CMU Serif" panose="02000603000000000000" pitchFamily="2" charset="0"/>
-              <a:cs typeface="CMU Serif" panose="02000603000000000000" pitchFamily="2" charset="0"/>
-            </a:endParaRPr>
           </a:p>
         </p:txBody>
       </p:sp>
@@ -9803,7 +9761,7 @@
           <a:lstStyle/>
           <a:p>
             <a:pPr algn="ctr"/>
-            <a:endParaRPr lang="de-DE"/>
+            <a:endParaRPr lang="de-DE" dirty="0"/>
           </a:p>
         </p:txBody>
       </p:sp>
@@ -9905,7 +9863,7 @@
           <a:lstStyle/>
           <a:p>
             <a:pPr algn="ctr"/>
-            <a:endParaRPr lang="de-DE"/>
+            <a:endParaRPr lang="de-DE" dirty="0"/>
           </a:p>
         </p:txBody>
       </p:sp>
@@ -9958,7 +9916,7 @@
           <a:lstStyle/>
           <a:p>
             <a:pPr algn="ctr"/>
-            <a:endParaRPr lang="de-DE"/>
+            <a:endParaRPr lang="de-DE" dirty="0"/>
           </a:p>
         </p:txBody>
       </p:sp>
@@ -10011,7 +9969,7 @@
           <a:lstStyle/>
           <a:p>
             <a:pPr algn="ctr"/>
-            <a:endParaRPr lang="de-DE"/>
+            <a:endParaRPr lang="de-DE" dirty="0"/>
           </a:p>
         </p:txBody>
       </p:sp>
@@ -10161,7 +10119,7 @@
           <a:lstStyle/>
           <a:p>
             <a:pPr algn="ctr"/>
-            <a:endParaRPr lang="de-DE"/>
+            <a:endParaRPr lang="de-DE" dirty="0"/>
           </a:p>
         </p:txBody>
       </p:sp>
@@ -10213,7 +10171,7 @@
           <a:lstStyle/>
           <a:p>
             <a:pPr algn="ctr"/>
-            <a:endParaRPr lang="de-DE"/>
+            <a:endParaRPr lang="de-DE" dirty="0"/>
           </a:p>
         </p:txBody>
       </p:sp>
@@ -10606,7 +10564,7 @@
           <a:p>
             <a:pPr algn="ctr"/>
             <a:r>
-              <a:rPr lang="de-DE" sz="1100" i="1" dirty="0" err="1">
+              <a:rPr lang="de-DE" sz="1100" i="1" dirty="0">
                 <a:latin typeface="CMU Serif" panose="02000603000000000000" pitchFamily="2" charset="0"/>
                 <a:ea typeface="CMU Serif" panose="02000603000000000000" pitchFamily="2" charset="0"/>
                 <a:cs typeface="CMU Serif" panose="02000603000000000000" pitchFamily="2" charset="0"/>
@@ -10614,18 +10572,13 @@
               <a:t>x</a:t>
             </a:r>
             <a:r>
-              <a:rPr lang="de-DE" sz="1100" i="1" baseline="-25000" dirty="0" err="1">
+              <a:rPr lang="de-DE" sz="1100" i="1" baseline="-25000" dirty="0">
                 <a:latin typeface="CMU Serif" panose="02000603000000000000" pitchFamily="2" charset="0"/>
                 <a:ea typeface="CMU Serif" panose="02000603000000000000" pitchFamily="2" charset="0"/>
                 <a:cs typeface="CMU Serif" panose="02000603000000000000" pitchFamily="2" charset="0"/>
               </a:rPr>
               <a:t>d</a:t>
             </a:r>
-            <a:endParaRPr lang="de-DE" sz="1100" i="1" baseline="-25000" dirty="0">
-              <a:latin typeface="CMU Serif" panose="02000603000000000000" pitchFamily="2" charset="0"/>
-              <a:ea typeface="CMU Serif" panose="02000603000000000000" pitchFamily="2" charset="0"/>
-              <a:cs typeface="CMU Serif" panose="02000603000000000000" pitchFamily="2" charset="0"/>
-            </a:endParaRPr>
           </a:p>
         </p:txBody>
       </p:sp>
@@ -10659,7 +10612,7 @@
           <a:p>
             <a:pPr algn="ctr"/>
             <a:r>
-              <a:rPr lang="de-DE" sz="1100" i="1" dirty="0" err="1">
+              <a:rPr lang="de-DE" sz="1100" i="1" dirty="0">
                 <a:latin typeface="CMU Serif" panose="02000603000000000000" pitchFamily="2" charset="0"/>
                 <a:ea typeface="CMU Serif" panose="02000603000000000000" pitchFamily="2" charset="0"/>
                 <a:cs typeface="CMU Serif" panose="02000603000000000000" pitchFamily="2" charset="0"/>
@@ -10667,18 +10620,13 @@
               <a:t>x</a:t>
             </a:r>
             <a:r>
-              <a:rPr lang="de-DE" sz="1100" i="1" baseline="-25000" dirty="0" err="1">
+              <a:rPr lang="de-DE" sz="1100" i="1" baseline="-25000" dirty="0">
                 <a:latin typeface="CMU Serif" panose="02000603000000000000" pitchFamily="2" charset="0"/>
                 <a:ea typeface="CMU Serif" panose="02000603000000000000" pitchFamily="2" charset="0"/>
                 <a:cs typeface="CMU Serif" panose="02000603000000000000" pitchFamily="2" charset="0"/>
               </a:rPr>
               <a:t>f</a:t>
             </a:r>
-            <a:endParaRPr lang="de-DE" sz="1100" i="1" baseline="-25000" dirty="0">
-              <a:latin typeface="CMU Serif" panose="02000603000000000000" pitchFamily="2" charset="0"/>
-              <a:ea typeface="CMU Serif" panose="02000603000000000000" pitchFamily="2" charset="0"/>
-              <a:cs typeface="CMU Serif" panose="02000603000000000000" pitchFamily="2" charset="0"/>
-            </a:endParaRPr>
           </a:p>
         </p:txBody>
       </p:sp>
@@ -10732,7 +10680,7 @@
           <a:lstStyle/>
           <a:p>
             <a:pPr algn="ctr"/>
-            <a:endParaRPr lang="de-DE"/>
+            <a:endParaRPr lang="de-DE" dirty="0"/>
           </a:p>
         </p:txBody>
       </p:sp>
@@ -10787,7 +10735,7 @@
           <a:lstStyle/>
           <a:p>
             <a:pPr algn="ctr"/>
-            <a:endParaRPr lang="de-DE"/>
+            <a:endParaRPr lang="de-DE" dirty="0"/>
           </a:p>
         </p:txBody>
       </p:sp>
@@ -10908,7 +10856,7 @@
           <a:lstStyle/>
           <a:p>
             <a:pPr algn="ctr"/>
-            <a:endParaRPr lang="de-DE"/>
+            <a:endParaRPr lang="de-DE" dirty="0"/>
           </a:p>
         </p:txBody>
       </p:sp>
@@ -11039,7 +10987,7 @@
           <a:lstStyle/>
           <a:p>
             <a:pPr algn="ctr"/>
-            <a:endParaRPr lang="de-DE"/>
+            <a:endParaRPr lang="de-DE" dirty="0"/>
           </a:p>
         </p:txBody>
       </p:sp>
@@ -11954,6 +11902,22 @@
               <a:gd name="csY2" fmla="*/ 892479 h 1029878"/>
               <a:gd name="csX3" fmla="*/ 980161 w 980161"/>
               <a:gd name="csY3" fmla="*/ 0 h 1029878"/>
+              <a:gd name="csX0" fmla="*/ 0 w 980161"/>
+              <a:gd name="csY0" fmla="*/ 40710 h 1029878"/>
+              <a:gd name="csX1" fmla="*/ 244257 w 980161"/>
+              <a:gd name="csY1" fmla="*/ 939452 h 1029878"/>
+              <a:gd name="csX2" fmla="*/ 604381 w 980161"/>
+              <a:gd name="csY2" fmla="*/ 892479 h 1029878"/>
+              <a:gd name="csX3" fmla="*/ 980161 w 980161"/>
+              <a:gd name="csY3" fmla="*/ 0 h 1029878"/>
+              <a:gd name="csX0" fmla="*/ 0 w 980161"/>
+              <a:gd name="csY0" fmla="*/ 40710 h 1029878"/>
+              <a:gd name="csX1" fmla="*/ 244257 w 980161"/>
+              <a:gd name="csY1" fmla="*/ 939452 h 1029878"/>
+              <a:gd name="csX2" fmla="*/ 604381 w 980161"/>
+              <a:gd name="csY2" fmla="*/ 892479 h 1029878"/>
+              <a:gd name="csX3" fmla="*/ 980161 w 980161"/>
+              <a:gd name="csY3" fmla="*/ 0 h 1029878"/>
             </a:gdLst>
             <a:ahLst/>
             <a:cxnLst>
@@ -11977,7 +11941,7 @@
                   <a:pt x="0" y="40710"/>
                 </a:moveTo>
                 <a:cubicBezTo>
-                  <a:pt x="71763" y="419100"/>
+                  <a:pt x="45093" y="416886"/>
                   <a:pt x="143527" y="797490"/>
                   <a:pt x="244257" y="939452"/>
                 </a:cubicBezTo>
@@ -11988,7 +11952,7 @@
                 </a:cubicBezTo>
                 <a:cubicBezTo>
                   <a:pt x="727032" y="735904"/>
-                  <a:pt x="853596" y="367952"/>
+                  <a:pt x="891696" y="372380"/>
                   <a:pt x="980161" y="0"/>
                 </a:cubicBezTo>
               </a:path>
@@ -12023,7 +11987,7 @@
           <a:lstStyle/>
           <a:p>
             <a:pPr algn="ctr"/>
-            <a:endParaRPr lang="de-DE"/>
+            <a:endParaRPr lang="de-DE" dirty="0"/>
           </a:p>
         </p:txBody>
       </p:sp>
@@ -12075,7 +12039,7 @@
           <a:lstStyle/>
           <a:p>
             <a:pPr algn="ctr"/>
-            <a:endParaRPr lang="de-DE"/>
+            <a:endParaRPr lang="de-DE" dirty="0"/>
           </a:p>
         </p:txBody>
       </p:sp>
@@ -12129,7 +12093,7 @@
           <a:lstStyle/>
           <a:p>
             <a:pPr algn="ctr"/>
-            <a:endParaRPr lang="de-DE"/>
+            <a:endParaRPr lang="de-DE" dirty="0"/>
           </a:p>
         </p:txBody>
       </p:sp>
@@ -12304,7 +12268,7 @@
           <a:p>
             <a:pPr algn="ctr"/>
             <a:r>
-              <a:rPr lang="de-DE" sz="1400" i="1" dirty="0" err="1">
+              <a:rPr lang="de-DE" sz="1400" i="1" dirty="0">
                 <a:solidFill>
                   <a:schemeClr val="accent2">
                     <a:lumMod val="75000"/>
@@ -12317,7 +12281,7 @@
               <a:t>v</a:t>
             </a:r>
             <a:r>
-              <a:rPr lang="de-DE" sz="1400" i="1" baseline="-25000" dirty="0" err="1">
+              <a:rPr lang="de-DE" sz="1400" i="1" baseline="-25000" dirty="0">
                 <a:solidFill>
                   <a:schemeClr val="accent2">
                     <a:lumMod val="75000"/>
@@ -12343,7 +12307,7 @@
               <a:t> </a:t>
             </a:r>
             <a:r>
-              <a:rPr lang="de-DE" sz="1400" baseline="-25000" dirty="0" err="1">
+              <a:rPr lang="de-DE" sz="1400" baseline="-25000" dirty="0">
                 <a:solidFill>
                   <a:schemeClr val="accent2">
                     <a:lumMod val="75000"/>
@@ -12355,16 +12319,6 @@
               </a:rPr>
               <a:t>max</a:t>
             </a:r>
-            <a:endParaRPr lang="de-DE" sz="1400" baseline="-25000" dirty="0">
-              <a:solidFill>
-                <a:schemeClr val="accent2">
-                  <a:lumMod val="75000"/>
-                </a:schemeClr>
-              </a:solidFill>
-              <a:latin typeface="CMU Serif" panose="02000603000000000000" pitchFamily="2" charset="0"/>
-              <a:ea typeface="CMU Serif" panose="02000603000000000000" pitchFamily="2" charset="0"/>
-              <a:cs typeface="CMU Serif" panose="02000603000000000000" pitchFamily="2" charset="0"/>
-            </a:endParaRPr>
           </a:p>
         </p:txBody>
       </p:sp>
@@ -12398,7 +12352,7 @@
           <a:p>
             <a:pPr algn="ctr"/>
             <a:r>
-              <a:rPr lang="de-DE" sz="1400" i="1" dirty="0" err="1">
+              <a:rPr lang="de-DE" sz="1400" i="1" dirty="0">
                 <a:solidFill>
                   <a:schemeClr val="accent1"/>
                 </a:solidFill>
@@ -12409,7 +12363,7 @@
               <a:t>v</a:t>
             </a:r>
             <a:r>
-              <a:rPr lang="de-DE" sz="1400" i="1" baseline="-25000" dirty="0" err="1">
+              <a:rPr lang="de-DE" sz="1400" i="1" baseline="-25000" dirty="0">
                 <a:solidFill>
                   <a:schemeClr val="accent1"/>
                 </a:solidFill>
@@ -12431,7 +12385,7 @@
               <a:t> </a:t>
             </a:r>
             <a:r>
-              <a:rPr lang="de-DE" sz="1400" baseline="-25000" dirty="0" err="1">
+              <a:rPr lang="de-DE" sz="1400" baseline="-25000" dirty="0">
                 <a:solidFill>
                   <a:schemeClr val="accent1"/>
                 </a:solidFill>
@@ -12441,14 +12395,6 @@
               </a:rPr>
               <a:t>max</a:t>
             </a:r>
-            <a:endParaRPr lang="de-DE" sz="1400" baseline="-25000" dirty="0">
-              <a:solidFill>
-                <a:schemeClr val="accent1"/>
-              </a:solidFill>
-              <a:latin typeface="CMU Serif" panose="02000603000000000000" pitchFamily="2" charset="0"/>
-              <a:ea typeface="CMU Serif" panose="02000603000000000000" pitchFamily="2" charset="0"/>
-              <a:cs typeface="CMU Serif" panose="02000603000000000000" pitchFamily="2" charset="0"/>
-            </a:endParaRPr>
           </a:p>
         </p:txBody>
       </p:sp>
@@ -12456,6 +12402,4025 @@
     <p:extLst>
       <p:ext uri="{BB962C8B-B14F-4D97-AF65-F5344CB8AC3E}">
         <p14:creationId xmlns:p14="http://schemas.microsoft.com/office/powerpoint/2010/main" val="4010601396"/>
+      </p:ext>
+    </p:extLst>
+  </p:cSld>
+  <p:clrMapOvr>
+    <a:masterClrMapping/>
+  </p:clrMapOvr>
+</p:sld>
+</file>
+
+<file path=ppt/slides/slide4.xml><?xml version="1.0" encoding="utf-8"?>
+<p:sld xmlns:a="http://schemas.openxmlformats.org/drawingml/2006/main" xmlns:r="http://schemas.openxmlformats.org/officeDocument/2006/relationships" xmlns:p="http://schemas.openxmlformats.org/presentationml/2006/main">
+  <p:cSld>
+    <p:spTree>
+      <p:nvGrpSpPr>
+        <p:cNvPr id="1" name=""/>
+        <p:cNvGrpSpPr/>
+        <p:nvPr/>
+      </p:nvGrpSpPr>
+      <p:grpSpPr>
+        <a:xfrm>
+          <a:off x="0" y="0"/>
+          <a:ext cx="0" cy="0"/>
+          <a:chOff x="0" y="0"/>
+          <a:chExt cx="0" cy="0"/>
+        </a:xfrm>
+      </p:grpSpPr>
+      <p:cxnSp>
+        <p:nvCxnSpPr>
+          <p:cNvPr id="90" name="Gerader Verbinder 89">
+            <a:extLst>
+              <a:ext uri="{FF2B5EF4-FFF2-40B4-BE49-F238E27FC236}">
+                <a16:creationId xmlns:a16="http://schemas.microsoft.com/office/drawing/2014/main" id="{EDF8C47F-9B9F-B367-5DC1-C4460D3C5F67}"/>
+              </a:ext>
+            </a:extLst>
+          </p:cNvPr>
+          <p:cNvCxnSpPr>
+            <a:cxnSpLocks/>
+          </p:cNvCxnSpPr>
+          <p:nvPr/>
+        </p:nvCxnSpPr>
+        <p:spPr>
+          <a:xfrm flipH="1">
+            <a:off x="651843" y="2480597"/>
+            <a:ext cx="574298" cy="0"/>
+          </a:xfrm>
+          <a:prstGeom prst="line">
+            <a:avLst/>
+          </a:prstGeom>
+          <a:ln w="6350" cap="rnd">
+            <a:solidFill>
+              <a:schemeClr val="tx1"/>
+            </a:solidFill>
+            <a:round/>
+            <a:headEnd type="triangle" w="sm" len="sm"/>
+            <a:tailEnd type="triangle" w="sm" len="sm"/>
+          </a:ln>
+        </p:spPr>
+        <p:style>
+          <a:lnRef idx="2">
+            <a:schemeClr val="accent1"/>
+          </a:lnRef>
+          <a:fillRef idx="0">
+            <a:schemeClr val="accent1"/>
+          </a:fillRef>
+          <a:effectRef idx="1">
+            <a:schemeClr val="accent1"/>
+          </a:effectRef>
+          <a:fontRef idx="minor">
+            <a:schemeClr val="tx1"/>
+          </a:fontRef>
+        </p:style>
+      </p:cxnSp>
+      <p:cxnSp>
+        <p:nvCxnSpPr>
+          <p:cNvPr id="100" name="Gerader Verbinder 99">
+            <a:extLst>
+              <a:ext uri="{FF2B5EF4-FFF2-40B4-BE49-F238E27FC236}">
+                <a16:creationId xmlns:a16="http://schemas.microsoft.com/office/drawing/2014/main" id="{15DC9AE8-69B3-6FDC-3261-D4006F003BF2}"/>
+              </a:ext>
+            </a:extLst>
+          </p:cNvPr>
+          <p:cNvCxnSpPr>
+            <a:cxnSpLocks/>
+          </p:cNvCxnSpPr>
+          <p:nvPr/>
+        </p:nvCxnSpPr>
+        <p:spPr>
+          <a:xfrm flipH="1">
+            <a:off x="1233089" y="2480597"/>
+            <a:ext cx="1738962" cy="0"/>
+          </a:xfrm>
+          <a:prstGeom prst="line">
+            <a:avLst/>
+          </a:prstGeom>
+          <a:ln w="6350" cap="rnd">
+            <a:solidFill>
+              <a:schemeClr val="tx1"/>
+            </a:solidFill>
+            <a:round/>
+            <a:headEnd type="triangle" w="sm" len="sm"/>
+            <a:tailEnd type="triangle" w="sm" len="sm"/>
+          </a:ln>
+        </p:spPr>
+        <p:style>
+          <a:lnRef idx="2">
+            <a:schemeClr val="accent1"/>
+          </a:lnRef>
+          <a:fillRef idx="0">
+            <a:schemeClr val="accent1"/>
+          </a:fillRef>
+          <a:effectRef idx="1">
+            <a:schemeClr val="accent1"/>
+          </a:effectRef>
+          <a:fontRef idx="minor">
+            <a:schemeClr val="tx1"/>
+          </a:fontRef>
+        </p:style>
+      </p:cxnSp>
+      <p:cxnSp>
+        <p:nvCxnSpPr>
+          <p:cNvPr id="68" name="Gerader Verbinder 67">
+            <a:extLst>
+              <a:ext uri="{FF2B5EF4-FFF2-40B4-BE49-F238E27FC236}">
+                <a16:creationId xmlns:a16="http://schemas.microsoft.com/office/drawing/2014/main" id="{F386A702-4DE4-6FB2-A979-1B4E70F9F708}"/>
+              </a:ext>
+            </a:extLst>
+          </p:cNvPr>
+          <p:cNvCxnSpPr>
+            <a:cxnSpLocks/>
+          </p:cNvCxnSpPr>
+          <p:nvPr/>
+        </p:nvCxnSpPr>
+        <p:spPr>
+          <a:xfrm flipH="1">
+            <a:off x="1233090" y="1941427"/>
+            <a:ext cx="290231" cy="0"/>
+          </a:xfrm>
+          <a:prstGeom prst="line">
+            <a:avLst/>
+          </a:prstGeom>
+          <a:ln w="6350" cap="rnd">
+            <a:solidFill>
+              <a:schemeClr val="tx1"/>
+            </a:solidFill>
+            <a:round/>
+            <a:headEnd type="triangle" w="sm" len="sm"/>
+            <a:tailEnd type="triangle" w="sm" len="sm"/>
+          </a:ln>
+        </p:spPr>
+        <p:style>
+          <a:lnRef idx="2">
+            <a:schemeClr val="accent1"/>
+          </a:lnRef>
+          <a:fillRef idx="0">
+            <a:schemeClr val="accent1"/>
+          </a:fillRef>
+          <a:effectRef idx="1">
+            <a:schemeClr val="accent1"/>
+          </a:effectRef>
+          <a:fontRef idx="minor">
+            <a:schemeClr val="tx1"/>
+          </a:fontRef>
+        </p:style>
+      </p:cxnSp>
+      <p:cxnSp>
+        <p:nvCxnSpPr>
+          <p:cNvPr id="61" name="Gerader Verbinder 60">
+            <a:extLst>
+              <a:ext uri="{FF2B5EF4-FFF2-40B4-BE49-F238E27FC236}">
+                <a16:creationId xmlns:a16="http://schemas.microsoft.com/office/drawing/2014/main" id="{405C7A3A-ECE8-6788-80B1-A1E6C0E957FD}"/>
+              </a:ext>
+            </a:extLst>
+          </p:cNvPr>
+          <p:cNvCxnSpPr>
+            <a:cxnSpLocks/>
+          </p:cNvCxnSpPr>
+          <p:nvPr/>
+        </p:nvCxnSpPr>
+        <p:spPr>
+          <a:xfrm flipH="1">
+            <a:off x="863757" y="1941427"/>
+            <a:ext cx="362384" cy="0"/>
+          </a:xfrm>
+          <a:prstGeom prst="line">
+            <a:avLst/>
+          </a:prstGeom>
+          <a:ln w="6350" cap="rnd">
+            <a:solidFill>
+              <a:schemeClr val="tx1"/>
+            </a:solidFill>
+            <a:round/>
+            <a:headEnd type="triangle" w="sm" len="sm"/>
+            <a:tailEnd type="triangle" w="sm" len="sm"/>
+          </a:ln>
+        </p:spPr>
+        <p:style>
+          <a:lnRef idx="2">
+            <a:schemeClr val="accent1"/>
+          </a:lnRef>
+          <a:fillRef idx="0">
+            <a:schemeClr val="accent1"/>
+          </a:fillRef>
+          <a:effectRef idx="1">
+            <a:schemeClr val="accent1"/>
+          </a:effectRef>
+          <a:fontRef idx="minor">
+            <a:schemeClr val="tx1"/>
+          </a:fontRef>
+        </p:style>
+      </p:cxnSp>
+      <p:cxnSp>
+        <p:nvCxnSpPr>
+          <p:cNvPr id="43" name="Gerader Verbinder 42">
+            <a:extLst>
+              <a:ext uri="{FF2B5EF4-FFF2-40B4-BE49-F238E27FC236}">
+                <a16:creationId xmlns:a16="http://schemas.microsoft.com/office/drawing/2014/main" id="{ED8BFC9F-2DC8-48CA-8C41-A51D694DCCD7}"/>
+              </a:ext>
+            </a:extLst>
+          </p:cNvPr>
+          <p:cNvCxnSpPr>
+            <a:cxnSpLocks/>
+          </p:cNvCxnSpPr>
+          <p:nvPr/>
+        </p:nvCxnSpPr>
+        <p:spPr>
+          <a:xfrm flipH="1">
+            <a:off x="863757" y="1264186"/>
+            <a:ext cx="2103554" cy="0"/>
+          </a:xfrm>
+          <a:prstGeom prst="line">
+            <a:avLst/>
+          </a:prstGeom>
+          <a:ln w="6350" cap="rnd">
+            <a:solidFill>
+              <a:schemeClr val="tx1"/>
+            </a:solidFill>
+            <a:round/>
+            <a:headEnd type="triangle" w="sm" len="sm"/>
+            <a:tailEnd type="triangle" w="sm" len="sm"/>
+          </a:ln>
+        </p:spPr>
+        <p:style>
+          <a:lnRef idx="2">
+            <a:schemeClr val="accent1"/>
+          </a:lnRef>
+          <a:fillRef idx="0">
+            <a:schemeClr val="accent1"/>
+          </a:fillRef>
+          <a:effectRef idx="1">
+            <a:schemeClr val="accent1"/>
+          </a:effectRef>
+          <a:fontRef idx="minor">
+            <a:schemeClr val="tx1"/>
+          </a:fontRef>
+        </p:style>
+      </p:cxnSp>
+      <p:grpSp>
+        <p:nvGrpSpPr>
+          <p:cNvPr id="7" name="Gruppieren 6">
+            <a:extLst>
+              <a:ext uri="{FF2B5EF4-FFF2-40B4-BE49-F238E27FC236}">
+                <a16:creationId xmlns:a16="http://schemas.microsoft.com/office/drawing/2014/main" id="{570C8645-88AC-7063-02BA-0E01AD557D13}"/>
+              </a:ext>
+            </a:extLst>
+          </p:cNvPr>
+          <p:cNvGrpSpPr/>
+          <p:nvPr/>
+        </p:nvGrpSpPr>
+        <p:grpSpPr>
+          <a:xfrm>
+            <a:off x="653748" y="1563077"/>
+            <a:ext cx="972020" cy="208859"/>
+            <a:chOff x="401400" y="1422760"/>
+            <a:chExt cx="1101645" cy="246020"/>
+          </a:xfrm>
+        </p:grpSpPr>
+        <p:sp>
+          <p:nvSpPr>
+            <p:cNvPr id="5" name="Freihandform: Form 4">
+              <a:extLst>
+                <a:ext uri="{FF2B5EF4-FFF2-40B4-BE49-F238E27FC236}">
+                  <a16:creationId xmlns:a16="http://schemas.microsoft.com/office/drawing/2014/main" id="{8DC15251-2E4D-6DC9-91E3-7164A43A5BD3}"/>
+                </a:ext>
+              </a:extLst>
+            </p:cNvPr>
+            <p:cNvSpPr/>
+            <p:nvPr/>
+          </p:nvSpPr>
+          <p:spPr>
+            <a:xfrm>
+              <a:off x="403860" y="1422760"/>
+              <a:ext cx="1099185" cy="246020"/>
+            </a:xfrm>
+            <a:custGeom>
+              <a:avLst/>
+              <a:gdLst>
+                <a:gd name="csX0" fmla="*/ 0 w 1099185"/>
+                <a:gd name="csY0" fmla="*/ 74523 h 259308"/>
+                <a:gd name="csX1" fmla="*/ 259080 w 1099185"/>
+                <a:gd name="csY1" fmla="*/ 9753 h 259308"/>
+                <a:gd name="csX2" fmla="*/ 1099185 w 1099185"/>
+                <a:gd name="csY2" fmla="*/ 259308 h 259308"/>
+                <a:gd name="csX0" fmla="*/ 0 w 1099185"/>
+                <a:gd name="csY0" fmla="*/ 76197 h 260982"/>
+                <a:gd name="csX1" fmla="*/ 226695 w 1099185"/>
+                <a:gd name="csY1" fmla="*/ 9522 h 260982"/>
+                <a:gd name="csX2" fmla="*/ 1099185 w 1099185"/>
+                <a:gd name="csY2" fmla="*/ 260982 h 260982"/>
+                <a:gd name="csX0" fmla="*/ 0 w 1099185"/>
+                <a:gd name="csY0" fmla="*/ 68602 h 253387"/>
+                <a:gd name="csX1" fmla="*/ 226695 w 1099185"/>
+                <a:gd name="csY1" fmla="*/ 1927 h 253387"/>
+                <a:gd name="csX2" fmla="*/ 1099185 w 1099185"/>
+                <a:gd name="csY2" fmla="*/ 253387 h 253387"/>
+                <a:gd name="csX0" fmla="*/ 0 w 1099185"/>
+                <a:gd name="csY0" fmla="*/ 56168 h 240953"/>
+                <a:gd name="csX1" fmla="*/ 320040 w 1099185"/>
+                <a:gd name="csY1" fmla="*/ 2828 h 240953"/>
+                <a:gd name="csX2" fmla="*/ 1099185 w 1099185"/>
+                <a:gd name="csY2" fmla="*/ 240953 h 240953"/>
+                <a:gd name="csX0" fmla="*/ 0 w 1099185"/>
+                <a:gd name="csY0" fmla="*/ 58433 h 243218"/>
+                <a:gd name="csX1" fmla="*/ 320040 w 1099185"/>
+                <a:gd name="csY1" fmla="*/ 5093 h 243218"/>
+                <a:gd name="csX2" fmla="*/ 1099185 w 1099185"/>
+                <a:gd name="csY2" fmla="*/ 243218 h 243218"/>
+                <a:gd name="csX0" fmla="*/ 0 w 1099185"/>
+                <a:gd name="csY0" fmla="*/ 56534 h 241319"/>
+                <a:gd name="csX1" fmla="*/ 320040 w 1099185"/>
+                <a:gd name="csY1" fmla="*/ 3194 h 241319"/>
+                <a:gd name="csX2" fmla="*/ 1099185 w 1099185"/>
+                <a:gd name="csY2" fmla="*/ 241319 h 241319"/>
+                <a:gd name="csX0" fmla="*/ 0 w 1099185"/>
+                <a:gd name="csY0" fmla="*/ 61235 h 246020"/>
+                <a:gd name="csX1" fmla="*/ 320040 w 1099185"/>
+                <a:gd name="csY1" fmla="*/ 7895 h 246020"/>
+                <a:gd name="csX2" fmla="*/ 1099185 w 1099185"/>
+                <a:gd name="csY2" fmla="*/ 246020 h 246020"/>
+                <a:gd name="csX0" fmla="*/ 0 w 1099185"/>
+                <a:gd name="csY0" fmla="*/ 61235 h 246020"/>
+                <a:gd name="csX1" fmla="*/ 320040 w 1099185"/>
+                <a:gd name="csY1" fmla="*/ 7895 h 246020"/>
+                <a:gd name="csX2" fmla="*/ 1099185 w 1099185"/>
+                <a:gd name="csY2" fmla="*/ 246020 h 246020"/>
+              </a:gdLst>
+              <a:ahLst/>
+              <a:cxnLst>
+                <a:cxn ang="0">
+                  <a:pos x="csX0" y="csY0"/>
+                </a:cxn>
+                <a:cxn ang="0">
+                  <a:pos x="csX1" y="csY1"/>
+                </a:cxn>
+                <a:cxn ang="0">
+                  <a:pos x="csX2" y="csY2"/>
+                </a:cxn>
+              </a:cxnLst>
+              <a:rect l="l" t="t" r="r" b="b"/>
+              <a:pathLst>
+                <a:path w="1099185" h="246020">
+                  <a:moveTo>
+                    <a:pt x="0" y="61235"/>
+                  </a:moveTo>
+                  <a:cubicBezTo>
+                    <a:pt x="11271" y="9641"/>
+                    <a:pt x="110172" y="-13378"/>
+                    <a:pt x="320040" y="7895"/>
+                  </a:cubicBezTo>
+                  <a:cubicBezTo>
+                    <a:pt x="529908" y="29168"/>
+                    <a:pt x="782161" y="111876"/>
+                    <a:pt x="1099185" y="246020"/>
+                  </a:cubicBezTo>
+                </a:path>
+              </a:pathLst>
+            </a:custGeom>
+            <a:noFill/>
+            <a:ln w="9525" cap="rnd">
+              <a:solidFill>
+                <a:schemeClr val="tx1"/>
+              </a:solidFill>
+              <a:round/>
+            </a:ln>
+          </p:spPr>
+          <p:style>
+            <a:lnRef idx="2">
+              <a:schemeClr val="accent1">
+                <a:shade val="15000"/>
+              </a:schemeClr>
+            </a:lnRef>
+            <a:fillRef idx="1">
+              <a:schemeClr val="accent1"/>
+            </a:fillRef>
+            <a:effectRef idx="0">
+              <a:schemeClr val="accent1"/>
+            </a:effectRef>
+            <a:fontRef idx="minor">
+              <a:schemeClr val="lt1"/>
+            </a:fontRef>
+          </p:style>
+          <p:txBody>
+            <a:bodyPr rtlCol="0" anchor="ctr"/>
+            <a:lstStyle/>
+            <a:p>
+              <a:pPr algn="ctr"/>
+              <a:endParaRPr lang="de-DE" sz="800" dirty="0"/>
+            </a:p>
+          </p:txBody>
+        </p:sp>
+        <p:sp>
+          <p:nvSpPr>
+            <p:cNvPr id="6" name="Freihandform: Form 5">
+              <a:extLst>
+                <a:ext uri="{FF2B5EF4-FFF2-40B4-BE49-F238E27FC236}">
+                  <a16:creationId xmlns:a16="http://schemas.microsoft.com/office/drawing/2014/main" id="{246FA57C-45C3-1559-52A6-A075FE195E38}"/>
+                </a:ext>
+              </a:extLst>
+            </p:cNvPr>
+            <p:cNvSpPr/>
+            <p:nvPr/>
+          </p:nvSpPr>
+          <p:spPr>
+            <a:xfrm>
+              <a:off x="401400" y="1482090"/>
+              <a:ext cx="1097835" cy="186690"/>
+            </a:xfrm>
+            <a:custGeom>
+              <a:avLst/>
+              <a:gdLst>
+                <a:gd name="csX0" fmla="*/ 3248 w 1092908"/>
+                <a:gd name="csY0" fmla="*/ 0 h 186690"/>
+                <a:gd name="csX1" fmla="*/ 168983 w 1092908"/>
+                <a:gd name="csY1" fmla="*/ 140970 h 186690"/>
+                <a:gd name="csX2" fmla="*/ 1092908 w 1092908"/>
+                <a:gd name="csY2" fmla="*/ 186690 h 186690"/>
+                <a:gd name="csX0" fmla="*/ 1906 w 1091566"/>
+                <a:gd name="csY0" fmla="*/ 0 h 186690"/>
+                <a:gd name="csX1" fmla="*/ 184689 w 1091566"/>
+                <a:gd name="csY1" fmla="*/ 133350 h 186690"/>
+                <a:gd name="csX2" fmla="*/ 1091566 w 1091566"/>
+                <a:gd name="csY2" fmla="*/ 186690 h 186690"/>
+                <a:gd name="csX0" fmla="*/ 1906 w 1091566"/>
+                <a:gd name="csY0" fmla="*/ 0 h 186690"/>
+                <a:gd name="csX1" fmla="*/ 184689 w 1091566"/>
+                <a:gd name="csY1" fmla="*/ 133350 h 186690"/>
+                <a:gd name="csX2" fmla="*/ 1091566 w 1091566"/>
+                <a:gd name="csY2" fmla="*/ 186690 h 186690"/>
+              </a:gdLst>
+              <a:ahLst/>
+              <a:cxnLst>
+                <a:cxn ang="0">
+                  <a:pos x="csX0" y="csY0"/>
+                </a:cxn>
+                <a:cxn ang="0">
+                  <a:pos x="csX1" y="csY1"/>
+                </a:cxn>
+                <a:cxn ang="0">
+                  <a:pos x="csX2" y="csY2"/>
+                </a:cxn>
+              </a:cxnLst>
+              <a:rect l="l" t="t" r="r" b="b"/>
+              <a:pathLst>
+                <a:path w="1091566" h="186690">
+                  <a:moveTo>
+                    <a:pt x="1906" y="0"/>
+                  </a:moveTo>
+                  <a:cubicBezTo>
+                    <a:pt x="-6032" y="54927"/>
+                    <a:pt x="3079" y="102235"/>
+                    <a:pt x="184689" y="133350"/>
+                  </a:cubicBezTo>
+                  <a:cubicBezTo>
+                    <a:pt x="366299" y="164465"/>
+                    <a:pt x="665478" y="181292"/>
+                    <a:pt x="1091566" y="186690"/>
+                  </a:cubicBezTo>
+                </a:path>
+              </a:pathLst>
+            </a:custGeom>
+            <a:noFill/>
+            <a:ln w="9525" cap="rnd">
+              <a:solidFill>
+                <a:schemeClr val="tx1"/>
+              </a:solidFill>
+              <a:round/>
+            </a:ln>
+          </p:spPr>
+          <p:style>
+            <a:lnRef idx="2">
+              <a:schemeClr val="accent1">
+                <a:shade val="15000"/>
+              </a:schemeClr>
+            </a:lnRef>
+            <a:fillRef idx="1">
+              <a:schemeClr val="accent1"/>
+            </a:fillRef>
+            <a:effectRef idx="0">
+              <a:schemeClr val="accent1"/>
+            </a:effectRef>
+            <a:fontRef idx="minor">
+              <a:schemeClr val="lt1"/>
+            </a:fontRef>
+          </p:style>
+          <p:txBody>
+            <a:bodyPr rtlCol="0" anchor="ctr"/>
+            <a:lstStyle/>
+            <a:p>
+              <a:pPr algn="ctr"/>
+              <a:endParaRPr lang="de-DE" sz="800" dirty="0"/>
+            </a:p>
+          </p:txBody>
+        </p:sp>
+      </p:grpSp>
+      <p:sp>
+        <p:nvSpPr>
+          <p:cNvPr id="8" name="Textfeld 7">
+            <a:extLst>
+              <a:ext uri="{FF2B5EF4-FFF2-40B4-BE49-F238E27FC236}">
+                <a16:creationId xmlns:a16="http://schemas.microsoft.com/office/drawing/2014/main" id="{DD11CB4C-3EC0-B6F7-DF76-4709A5C796B2}"/>
+              </a:ext>
+            </a:extLst>
+          </p:cNvPr>
+          <p:cNvSpPr txBox="1"/>
+          <p:nvPr/>
+        </p:nvSpPr>
+        <p:spPr>
+          <a:xfrm>
+            <a:off x="243305" y="1624918"/>
+            <a:ext cx="450936" cy="215444"/>
+          </a:xfrm>
+          <a:prstGeom prst="rect">
+            <a:avLst/>
+          </a:prstGeom>
+          <a:noFill/>
+        </p:spPr>
+        <p:txBody>
+          <a:bodyPr wrap="square" rtlCol="0" anchor="ctr">
+            <a:spAutoFit/>
+          </a:bodyPr>
+          <a:lstStyle/>
+          <a:p>
+            <a:pPr algn="ctr"/>
+            <a:r>
+              <a:rPr lang="de-DE" sz="800" i="1" dirty="0">
+                <a:solidFill>
+                  <a:schemeClr val="tx2">
+                    <a:lumMod val="75000"/>
+                    <a:lumOff val="25000"/>
+                  </a:schemeClr>
+                </a:solidFill>
+                <a:latin typeface="CMU Serif" panose="02000603000000000000" pitchFamily="2" charset="0"/>
+                <a:ea typeface="CMU Serif" panose="02000603000000000000" pitchFamily="2" charset="0"/>
+                <a:cs typeface="CMU Serif" panose="02000603000000000000" pitchFamily="2" charset="0"/>
+              </a:rPr>
+              <a:t>v</a:t>
+            </a:r>
+          </a:p>
+        </p:txBody>
+      </p:sp>
+      <p:cxnSp>
+        <p:nvCxnSpPr>
+          <p:cNvPr id="9" name="Gerade Verbindung mit Pfeil 8">
+            <a:extLst>
+              <a:ext uri="{FF2B5EF4-FFF2-40B4-BE49-F238E27FC236}">
+                <a16:creationId xmlns:a16="http://schemas.microsoft.com/office/drawing/2014/main" id="{38E1CFED-EFFC-5F05-2D08-82DF9A11C9D7}"/>
+              </a:ext>
+            </a:extLst>
+          </p:cNvPr>
+          <p:cNvCxnSpPr>
+            <a:cxnSpLocks/>
+          </p:cNvCxnSpPr>
+          <p:nvPr/>
+        </p:nvCxnSpPr>
+        <p:spPr>
+          <a:xfrm>
+            <a:off x="191726" y="1622681"/>
+            <a:ext cx="418761" cy="0"/>
+          </a:xfrm>
+          <a:prstGeom prst="straightConnector1">
+            <a:avLst/>
+          </a:prstGeom>
+          <a:ln w="15875" cap="rnd">
+            <a:solidFill>
+              <a:schemeClr val="tx2">
+                <a:lumMod val="75000"/>
+                <a:lumOff val="25000"/>
+              </a:schemeClr>
+            </a:solidFill>
+            <a:round/>
+            <a:headEnd type="none" w="sm" len="sm"/>
+            <a:tailEnd type="triangle" w="med" len="med"/>
+          </a:ln>
+        </p:spPr>
+        <p:style>
+          <a:lnRef idx="2">
+            <a:schemeClr val="accent1"/>
+          </a:lnRef>
+          <a:fillRef idx="0">
+            <a:schemeClr val="accent1"/>
+          </a:fillRef>
+          <a:effectRef idx="1">
+            <a:schemeClr val="accent1"/>
+          </a:effectRef>
+          <a:fontRef idx="minor">
+            <a:schemeClr val="tx1"/>
+          </a:fontRef>
+        </p:style>
+      </p:cxnSp>
+      <p:cxnSp>
+        <p:nvCxnSpPr>
+          <p:cNvPr id="12" name="Gerader Verbinder 11">
+            <a:extLst>
+              <a:ext uri="{FF2B5EF4-FFF2-40B4-BE49-F238E27FC236}">
+                <a16:creationId xmlns:a16="http://schemas.microsoft.com/office/drawing/2014/main" id="{F11B0308-50A7-143F-D433-8A0781855D71}"/>
+              </a:ext>
+            </a:extLst>
+          </p:cNvPr>
+          <p:cNvCxnSpPr>
+            <a:cxnSpLocks/>
+          </p:cNvCxnSpPr>
+          <p:nvPr/>
+        </p:nvCxnSpPr>
+        <p:spPr>
+          <a:xfrm>
+            <a:off x="197308" y="1510952"/>
+            <a:ext cx="1579378" cy="287655"/>
+          </a:xfrm>
+          <a:prstGeom prst="line">
+            <a:avLst/>
+          </a:prstGeom>
+          <a:ln w="6350" cap="rnd">
+            <a:solidFill>
+              <a:schemeClr val="tx1"/>
+            </a:solidFill>
+            <a:prstDash val="sysDash"/>
+            <a:round/>
+          </a:ln>
+        </p:spPr>
+        <p:style>
+          <a:lnRef idx="2">
+            <a:schemeClr val="accent1"/>
+          </a:lnRef>
+          <a:fillRef idx="0">
+            <a:schemeClr val="accent1"/>
+          </a:fillRef>
+          <a:effectRef idx="1">
+            <a:schemeClr val="accent1"/>
+          </a:effectRef>
+          <a:fontRef idx="minor">
+            <a:schemeClr val="tx1"/>
+          </a:fontRef>
+        </p:style>
+      </p:cxnSp>
+      <p:sp>
+        <p:nvSpPr>
+          <p:cNvPr id="17" name="Bogen 16">
+            <a:extLst>
+              <a:ext uri="{FF2B5EF4-FFF2-40B4-BE49-F238E27FC236}">
+                <a16:creationId xmlns:a16="http://schemas.microsoft.com/office/drawing/2014/main" id="{BD4AFE16-EE88-49B0-7283-2D8E21D33ED7}"/>
+              </a:ext>
+            </a:extLst>
+          </p:cNvPr>
+          <p:cNvSpPr/>
+          <p:nvPr/>
+        </p:nvSpPr>
+        <p:spPr>
+          <a:xfrm>
+            <a:off x="324113" y="1254120"/>
+            <a:ext cx="669280" cy="669278"/>
+          </a:xfrm>
+          <a:prstGeom prst="arc">
+            <a:avLst>
+              <a:gd name="adj1" fmla="val 11292003"/>
+              <a:gd name="adj2" fmla="val 12806432"/>
+            </a:avLst>
+          </a:prstGeom>
+          <a:ln w="9525" cap="rnd">
+            <a:solidFill>
+              <a:schemeClr val="tx1"/>
+            </a:solidFill>
+            <a:round/>
+            <a:headEnd type="triangle" w="sm" len="sm"/>
+            <a:tailEnd w="sm" len="sm"/>
+          </a:ln>
+        </p:spPr>
+        <p:style>
+          <a:lnRef idx="2">
+            <a:schemeClr val="accent1"/>
+          </a:lnRef>
+          <a:fillRef idx="0">
+            <a:schemeClr val="accent1"/>
+          </a:fillRef>
+          <a:effectRef idx="1">
+            <a:schemeClr val="accent1"/>
+          </a:effectRef>
+          <a:fontRef idx="minor">
+            <a:schemeClr val="tx1"/>
+          </a:fontRef>
+        </p:style>
+        <p:txBody>
+          <a:bodyPr rtlCol="0" anchor="ctr"/>
+          <a:lstStyle/>
+          <a:p>
+            <a:pPr algn="ctr"/>
+            <a:endParaRPr lang="de-DE" sz="800" dirty="0"/>
+          </a:p>
+        </p:txBody>
+      </p:sp>
+      <p:sp>
+        <p:nvSpPr>
+          <p:cNvPr id="18" name="Bogen 17">
+            <a:extLst>
+              <a:ext uri="{FF2B5EF4-FFF2-40B4-BE49-F238E27FC236}">
+                <a16:creationId xmlns:a16="http://schemas.microsoft.com/office/drawing/2014/main" id="{8ABA536B-D52F-236B-485F-F221CCDF5EDC}"/>
+              </a:ext>
+            </a:extLst>
+          </p:cNvPr>
+          <p:cNvSpPr/>
+          <p:nvPr/>
+        </p:nvSpPr>
+        <p:spPr>
+          <a:xfrm>
+            <a:off x="324113" y="1254120"/>
+            <a:ext cx="669280" cy="669278"/>
+          </a:xfrm>
+          <a:prstGeom prst="arc">
+            <a:avLst>
+              <a:gd name="adj1" fmla="val 9219348"/>
+              <a:gd name="adj2" fmla="val 10439424"/>
+            </a:avLst>
+          </a:prstGeom>
+          <a:ln w="9525" cap="rnd">
+            <a:solidFill>
+              <a:schemeClr val="tx1"/>
+            </a:solidFill>
+            <a:round/>
+            <a:headEnd type="none" w="sm" len="sm"/>
+            <a:tailEnd type="triangle" w="sm" len="sm"/>
+          </a:ln>
+        </p:spPr>
+        <p:style>
+          <a:lnRef idx="2">
+            <a:schemeClr val="accent1"/>
+          </a:lnRef>
+          <a:fillRef idx="0">
+            <a:schemeClr val="accent1"/>
+          </a:fillRef>
+          <a:effectRef idx="1">
+            <a:schemeClr val="accent1"/>
+          </a:effectRef>
+          <a:fontRef idx="minor">
+            <a:schemeClr val="tx1"/>
+          </a:fontRef>
+        </p:style>
+        <p:txBody>
+          <a:bodyPr rtlCol="0" anchor="ctr"/>
+          <a:lstStyle/>
+          <a:p>
+            <a:pPr algn="ctr"/>
+            <a:endParaRPr lang="de-DE" sz="800" dirty="0"/>
+          </a:p>
+        </p:txBody>
+      </p:sp>
+      <p:sp>
+        <p:nvSpPr>
+          <p:cNvPr id="19" name="Bogen 18">
+            <a:extLst>
+              <a:ext uri="{FF2B5EF4-FFF2-40B4-BE49-F238E27FC236}">
+                <a16:creationId xmlns:a16="http://schemas.microsoft.com/office/drawing/2014/main" id="{7C66FEAD-9F53-26D8-FEEA-3D350381C44A}"/>
+              </a:ext>
+            </a:extLst>
+          </p:cNvPr>
+          <p:cNvSpPr/>
+          <p:nvPr/>
+        </p:nvSpPr>
+        <p:spPr>
+          <a:xfrm>
+            <a:off x="324113" y="1254120"/>
+            <a:ext cx="669280" cy="669278"/>
+          </a:xfrm>
+          <a:prstGeom prst="arc">
+            <a:avLst>
+              <a:gd name="adj1" fmla="val 9980127"/>
+              <a:gd name="adj2" fmla="val 11586429"/>
+            </a:avLst>
+          </a:prstGeom>
+          <a:ln w="9525" cap="rnd">
+            <a:solidFill>
+              <a:schemeClr val="tx1"/>
+            </a:solidFill>
+            <a:round/>
+            <a:headEnd type="none" w="sm" len="sm"/>
+            <a:tailEnd w="sm" len="sm"/>
+          </a:ln>
+        </p:spPr>
+        <p:style>
+          <a:lnRef idx="2">
+            <a:schemeClr val="accent1"/>
+          </a:lnRef>
+          <a:fillRef idx="0">
+            <a:schemeClr val="accent1"/>
+          </a:fillRef>
+          <a:effectRef idx="1">
+            <a:schemeClr val="accent1"/>
+          </a:effectRef>
+          <a:fontRef idx="minor">
+            <a:schemeClr val="tx1"/>
+          </a:fontRef>
+        </p:style>
+        <p:txBody>
+          <a:bodyPr rtlCol="0" anchor="ctr"/>
+          <a:lstStyle/>
+          <a:p>
+            <a:pPr algn="ctr"/>
+            <a:endParaRPr lang="de-DE" sz="800" dirty="0"/>
+          </a:p>
+        </p:txBody>
+      </p:sp>
+      <p:sp>
+        <p:nvSpPr>
+          <p:cNvPr id="21" name="Textfeld 20">
+            <a:extLst>
+              <a:ext uri="{FF2B5EF4-FFF2-40B4-BE49-F238E27FC236}">
+                <a16:creationId xmlns:a16="http://schemas.microsoft.com/office/drawing/2014/main" id="{C7E5661A-1D70-EAFA-6474-AEB0D376F705}"/>
+              </a:ext>
+            </a:extLst>
+          </p:cNvPr>
+          <p:cNvSpPr txBox="1"/>
+          <p:nvPr/>
+        </p:nvSpPr>
+        <p:spPr>
+          <a:xfrm>
+            <a:off x="24404" y="1321553"/>
+            <a:ext cx="450936" cy="215444"/>
+          </a:xfrm>
+          <a:prstGeom prst="rect">
+            <a:avLst/>
+          </a:prstGeom>
+          <a:noFill/>
+        </p:spPr>
+        <p:txBody>
+          <a:bodyPr wrap="square" rtlCol="0" anchor="ctr">
+            <a:spAutoFit/>
+          </a:bodyPr>
+          <a:lstStyle/>
+          <a:p>
+            <a:pPr algn="ctr"/>
+            <a:r>
+              <a:rPr lang="de-DE" sz="800" i="1" dirty="0">
+                <a:latin typeface="Latin Modern Math" panose="02000503000000000000" pitchFamily="50" charset="0"/>
+                <a:ea typeface="Latin Modern Math" panose="02000503000000000000" pitchFamily="50" charset="0"/>
+                <a:cs typeface="CMU Serif" panose="02000603000000000000" pitchFamily="2" charset="0"/>
+              </a:rPr>
+              <a:t>α</a:t>
+            </a:r>
+          </a:p>
+        </p:txBody>
+      </p:sp>
+      <p:cxnSp>
+        <p:nvCxnSpPr>
+          <p:cNvPr id="23" name="Gerade Verbindung mit Pfeil 22">
+            <a:extLst>
+              <a:ext uri="{FF2B5EF4-FFF2-40B4-BE49-F238E27FC236}">
+                <a16:creationId xmlns:a16="http://schemas.microsoft.com/office/drawing/2014/main" id="{ECBF27D5-844B-1F43-E501-8A1D17226679}"/>
+              </a:ext>
+            </a:extLst>
+          </p:cNvPr>
+          <p:cNvCxnSpPr>
+            <a:cxnSpLocks/>
+          </p:cNvCxnSpPr>
+          <p:nvPr/>
+        </p:nvCxnSpPr>
+        <p:spPr>
+          <a:xfrm flipV="1">
+            <a:off x="863757" y="988982"/>
+            <a:ext cx="0" cy="632473"/>
+          </a:xfrm>
+          <a:prstGeom prst="straightConnector1">
+            <a:avLst/>
+          </a:prstGeom>
+          <a:ln w="15875" cap="rnd">
+            <a:solidFill>
+              <a:schemeClr val="accent3"/>
+            </a:solidFill>
+            <a:round/>
+            <a:headEnd type="none" w="sm" len="sm"/>
+            <a:tailEnd type="triangle" w="med" len="med"/>
+          </a:ln>
+        </p:spPr>
+        <p:style>
+          <a:lnRef idx="2">
+            <a:schemeClr val="accent1"/>
+          </a:lnRef>
+          <a:fillRef idx="0">
+            <a:schemeClr val="accent1"/>
+          </a:fillRef>
+          <a:effectRef idx="1">
+            <a:schemeClr val="accent1"/>
+          </a:effectRef>
+          <a:fontRef idx="minor">
+            <a:schemeClr val="tx1"/>
+          </a:fontRef>
+        </p:style>
+      </p:cxnSp>
+      <p:sp>
+        <p:nvSpPr>
+          <p:cNvPr id="26" name="Textfeld 25">
+            <a:extLst>
+              <a:ext uri="{FF2B5EF4-FFF2-40B4-BE49-F238E27FC236}">
+                <a16:creationId xmlns:a16="http://schemas.microsoft.com/office/drawing/2014/main" id="{1DD59D24-6641-A34B-4AB4-47CCAE8543DF}"/>
+              </a:ext>
+            </a:extLst>
+          </p:cNvPr>
+          <p:cNvSpPr txBox="1"/>
+          <p:nvPr/>
+        </p:nvSpPr>
+        <p:spPr>
+          <a:xfrm>
+            <a:off x="773702" y="908975"/>
+            <a:ext cx="450936" cy="215444"/>
+          </a:xfrm>
+          <a:prstGeom prst="rect">
+            <a:avLst/>
+          </a:prstGeom>
+          <a:noFill/>
+        </p:spPr>
+        <p:txBody>
+          <a:bodyPr wrap="square" rtlCol="0" anchor="ctr">
+            <a:spAutoFit/>
+          </a:bodyPr>
+          <a:lstStyle/>
+          <a:p>
+            <a:pPr algn="ctr"/>
+            <a:r>
+              <a:rPr lang="de-DE" sz="800" i="1" dirty="0">
+                <a:solidFill>
+                  <a:schemeClr val="accent3"/>
+                </a:solidFill>
+                <a:latin typeface="CMU Serif" panose="02000603000000000000" pitchFamily="2" charset="0"/>
+                <a:ea typeface="CMU Serif" panose="02000603000000000000" pitchFamily="2" charset="0"/>
+                <a:cs typeface="CMU Serif" panose="02000603000000000000" pitchFamily="2" charset="0"/>
+              </a:rPr>
+              <a:t>A</a:t>
+            </a:r>
+            <a:r>
+              <a:rPr lang="de-DE" sz="800" baseline="-25000" dirty="0">
+                <a:solidFill>
+                  <a:schemeClr val="accent3"/>
+                </a:solidFill>
+                <a:latin typeface="CMU Serif" panose="02000603000000000000" pitchFamily="2" charset="0"/>
+                <a:ea typeface="CMU Serif" panose="02000603000000000000" pitchFamily="2" charset="0"/>
+                <a:cs typeface="CMU Serif" panose="02000603000000000000" pitchFamily="2" charset="0"/>
+              </a:rPr>
+              <a:t>F</a:t>
+            </a:r>
+          </a:p>
+        </p:txBody>
+      </p:sp>
+      <p:grpSp>
+        <p:nvGrpSpPr>
+          <p:cNvPr id="27" name="Gruppieren 26">
+            <a:extLst>
+              <a:ext uri="{FF2B5EF4-FFF2-40B4-BE49-F238E27FC236}">
+                <a16:creationId xmlns:a16="http://schemas.microsoft.com/office/drawing/2014/main" id="{342B5DA0-B165-08EE-0B30-33BA952E86EB}"/>
+              </a:ext>
+            </a:extLst>
+          </p:cNvPr>
+          <p:cNvGrpSpPr/>
+          <p:nvPr/>
+        </p:nvGrpSpPr>
+        <p:grpSpPr>
+          <a:xfrm rot="20192606">
+            <a:off x="2821559" y="1562534"/>
+            <a:ext cx="527683" cy="117842"/>
+            <a:chOff x="401400" y="1422760"/>
+            <a:chExt cx="1101645" cy="246020"/>
+          </a:xfrm>
+        </p:grpSpPr>
+        <p:sp>
+          <p:nvSpPr>
+            <p:cNvPr id="28" name="Freihandform: Form 27">
+              <a:extLst>
+                <a:ext uri="{FF2B5EF4-FFF2-40B4-BE49-F238E27FC236}">
+                  <a16:creationId xmlns:a16="http://schemas.microsoft.com/office/drawing/2014/main" id="{490BA162-0A45-C25B-81F5-6C54DC1E4182}"/>
+                </a:ext>
+              </a:extLst>
+            </p:cNvPr>
+            <p:cNvSpPr/>
+            <p:nvPr/>
+          </p:nvSpPr>
+          <p:spPr>
+            <a:xfrm>
+              <a:off x="403860" y="1422760"/>
+              <a:ext cx="1099185" cy="246020"/>
+            </a:xfrm>
+            <a:custGeom>
+              <a:avLst/>
+              <a:gdLst>
+                <a:gd name="csX0" fmla="*/ 0 w 1099185"/>
+                <a:gd name="csY0" fmla="*/ 74523 h 259308"/>
+                <a:gd name="csX1" fmla="*/ 259080 w 1099185"/>
+                <a:gd name="csY1" fmla="*/ 9753 h 259308"/>
+                <a:gd name="csX2" fmla="*/ 1099185 w 1099185"/>
+                <a:gd name="csY2" fmla="*/ 259308 h 259308"/>
+                <a:gd name="csX0" fmla="*/ 0 w 1099185"/>
+                <a:gd name="csY0" fmla="*/ 76197 h 260982"/>
+                <a:gd name="csX1" fmla="*/ 226695 w 1099185"/>
+                <a:gd name="csY1" fmla="*/ 9522 h 260982"/>
+                <a:gd name="csX2" fmla="*/ 1099185 w 1099185"/>
+                <a:gd name="csY2" fmla="*/ 260982 h 260982"/>
+                <a:gd name="csX0" fmla="*/ 0 w 1099185"/>
+                <a:gd name="csY0" fmla="*/ 68602 h 253387"/>
+                <a:gd name="csX1" fmla="*/ 226695 w 1099185"/>
+                <a:gd name="csY1" fmla="*/ 1927 h 253387"/>
+                <a:gd name="csX2" fmla="*/ 1099185 w 1099185"/>
+                <a:gd name="csY2" fmla="*/ 253387 h 253387"/>
+                <a:gd name="csX0" fmla="*/ 0 w 1099185"/>
+                <a:gd name="csY0" fmla="*/ 56168 h 240953"/>
+                <a:gd name="csX1" fmla="*/ 320040 w 1099185"/>
+                <a:gd name="csY1" fmla="*/ 2828 h 240953"/>
+                <a:gd name="csX2" fmla="*/ 1099185 w 1099185"/>
+                <a:gd name="csY2" fmla="*/ 240953 h 240953"/>
+                <a:gd name="csX0" fmla="*/ 0 w 1099185"/>
+                <a:gd name="csY0" fmla="*/ 58433 h 243218"/>
+                <a:gd name="csX1" fmla="*/ 320040 w 1099185"/>
+                <a:gd name="csY1" fmla="*/ 5093 h 243218"/>
+                <a:gd name="csX2" fmla="*/ 1099185 w 1099185"/>
+                <a:gd name="csY2" fmla="*/ 243218 h 243218"/>
+                <a:gd name="csX0" fmla="*/ 0 w 1099185"/>
+                <a:gd name="csY0" fmla="*/ 56534 h 241319"/>
+                <a:gd name="csX1" fmla="*/ 320040 w 1099185"/>
+                <a:gd name="csY1" fmla="*/ 3194 h 241319"/>
+                <a:gd name="csX2" fmla="*/ 1099185 w 1099185"/>
+                <a:gd name="csY2" fmla="*/ 241319 h 241319"/>
+                <a:gd name="csX0" fmla="*/ 0 w 1099185"/>
+                <a:gd name="csY0" fmla="*/ 61235 h 246020"/>
+                <a:gd name="csX1" fmla="*/ 320040 w 1099185"/>
+                <a:gd name="csY1" fmla="*/ 7895 h 246020"/>
+                <a:gd name="csX2" fmla="*/ 1099185 w 1099185"/>
+                <a:gd name="csY2" fmla="*/ 246020 h 246020"/>
+                <a:gd name="csX0" fmla="*/ 0 w 1099185"/>
+                <a:gd name="csY0" fmla="*/ 61235 h 246020"/>
+                <a:gd name="csX1" fmla="*/ 320040 w 1099185"/>
+                <a:gd name="csY1" fmla="*/ 7895 h 246020"/>
+                <a:gd name="csX2" fmla="*/ 1099185 w 1099185"/>
+                <a:gd name="csY2" fmla="*/ 246020 h 246020"/>
+              </a:gdLst>
+              <a:ahLst/>
+              <a:cxnLst>
+                <a:cxn ang="0">
+                  <a:pos x="csX0" y="csY0"/>
+                </a:cxn>
+                <a:cxn ang="0">
+                  <a:pos x="csX1" y="csY1"/>
+                </a:cxn>
+                <a:cxn ang="0">
+                  <a:pos x="csX2" y="csY2"/>
+                </a:cxn>
+              </a:cxnLst>
+              <a:rect l="l" t="t" r="r" b="b"/>
+              <a:pathLst>
+                <a:path w="1099185" h="246020">
+                  <a:moveTo>
+                    <a:pt x="0" y="61235"/>
+                  </a:moveTo>
+                  <a:cubicBezTo>
+                    <a:pt x="11271" y="9641"/>
+                    <a:pt x="110172" y="-13378"/>
+                    <a:pt x="320040" y="7895"/>
+                  </a:cubicBezTo>
+                  <a:cubicBezTo>
+                    <a:pt x="529908" y="29168"/>
+                    <a:pt x="782161" y="111876"/>
+                    <a:pt x="1099185" y="246020"/>
+                  </a:cubicBezTo>
+                </a:path>
+              </a:pathLst>
+            </a:custGeom>
+            <a:noFill/>
+            <a:ln w="9525" cap="rnd">
+              <a:solidFill>
+                <a:schemeClr val="tx1"/>
+              </a:solidFill>
+              <a:round/>
+            </a:ln>
+          </p:spPr>
+          <p:style>
+            <a:lnRef idx="2">
+              <a:schemeClr val="accent1">
+                <a:shade val="15000"/>
+              </a:schemeClr>
+            </a:lnRef>
+            <a:fillRef idx="1">
+              <a:schemeClr val="accent1"/>
+            </a:fillRef>
+            <a:effectRef idx="0">
+              <a:schemeClr val="accent1"/>
+            </a:effectRef>
+            <a:fontRef idx="minor">
+              <a:schemeClr val="lt1"/>
+            </a:fontRef>
+          </p:style>
+          <p:txBody>
+            <a:bodyPr rtlCol="0" anchor="ctr"/>
+            <a:lstStyle/>
+            <a:p>
+              <a:pPr algn="ctr"/>
+              <a:endParaRPr lang="de-DE" sz="800" dirty="0"/>
+            </a:p>
+          </p:txBody>
+        </p:sp>
+        <p:sp>
+          <p:nvSpPr>
+            <p:cNvPr id="29" name="Freihandform: Form 28">
+              <a:extLst>
+                <a:ext uri="{FF2B5EF4-FFF2-40B4-BE49-F238E27FC236}">
+                  <a16:creationId xmlns:a16="http://schemas.microsoft.com/office/drawing/2014/main" id="{86FD859F-4BB5-7FFF-F929-7ED0C423CB9A}"/>
+                </a:ext>
+              </a:extLst>
+            </p:cNvPr>
+            <p:cNvSpPr/>
+            <p:nvPr/>
+          </p:nvSpPr>
+          <p:spPr>
+            <a:xfrm>
+              <a:off x="401400" y="1482090"/>
+              <a:ext cx="1097835" cy="186690"/>
+            </a:xfrm>
+            <a:custGeom>
+              <a:avLst/>
+              <a:gdLst>
+                <a:gd name="csX0" fmla="*/ 3248 w 1092908"/>
+                <a:gd name="csY0" fmla="*/ 0 h 186690"/>
+                <a:gd name="csX1" fmla="*/ 168983 w 1092908"/>
+                <a:gd name="csY1" fmla="*/ 140970 h 186690"/>
+                <a:gd name="csX2" fmla="*/ 1092908 w 1092908"/>
+                <a:gd name="csY2" fmla="*/ 186690 h 186690"/>
+                <a:gd name="csX0" fmla="*/ 1906 w 1091566"/>
+                <a:gd name="csY0" fmla="*/ 0 h 186690"/>
+                <a:gd name="csX1" fmla="*/ 184689 w 1091566"/>
+                <a:gd name="csY1" fmla="*/ 133350 h 186690"/>
+                <a:gd name="csX2" fmla="*/ 1091566 w 1091566"/>
+                <a:gd name="csY2" fmla="*/ 186690 h 186690"/>
+                <a:gd name="csX0" fmla="*/ 1906 w 1091566"/>
+                <a:gd name="csY0" fmla="*/ 0 h 186690"/>
+                <a:gd name="csX1" fmla="*/ 184689 w 1091566"/>
+                <a:gd name="csY1" fmla="*/ 133350 h 186690"/>
+                <a:gd name="csX2" fmla="*/ 1091566 w 1091566"/>
+                <a:gd name="csY2" fmla="*/ 186690 h 186690"/>
+              </a:gdLst>
+              <a:ahLst/>
+              <a:cxnLst>
+                <a:cxn ang="0">
+                  <a:pos x="csX0" y="csY0"/>
+                </a:cxn>
+                <a:cxn ang="0">
+                  <a:pos x="csX1" y="csY1"/>
+                </a:cxn>
+                <a:cxn ang="0">
+                  <a:pos x="csX2" y="csY2"/>
+                </a:cxn>
+              </a:cxnLst>
+              <a:rect l="l" t="t" r="r" b="b"/>
+              <a:pathLst>
+                <a:path w="1091566" h="186690">
+                  <a:moveTo>
+                    <a:pt x="1906" y="0"/>
+                  </a:moveTo>
+                  <a:cubicBezTo>
+                    <a:pt x="-6032" y="54927"/>
+                    <a:pt x="3079" y="102235"/>
+                    <a:pt x="184689" y="133350"/>
+                  </a:cubicBezTo>
+                  <a:cubicBezTo>
+                    <a:pt x="366299" y="164465"/>
+                    <a:pt x="665478" y="181292"/>
+                    <a:pt x="1091566" y="186690"/>
+                  </a:cubicBezTo>
+                </a:path>
+              </a:pathLst>
+            </a:custGeom>
+            <a:noFill/>
+            <a:ln w="9525" cap="rnd">
+              <a:solidFill>
+                <a:schemeClr val="tx1"/>
+              </a:solidFill>
+              <a:round/>
+            </a:ln>
+          </p:spPr>
+          <p:style>
+            <a:lnRef idx="2">
+              <a:schemeClr val="accent1">
+                <a:shade val="15000"/>
+              </a:schemeClr>
+            </a:lnRef>
+            <a:fillRef idx="1">
+              <a:schemeClr val="accent1"/>
+            </a:fillRef>
+            <a:effectRef idx="0">
+              <a:schemeClr val="accent1"/>
+            </a:effectRef>
+            <a:fontRef idx="minor">
+              <a:schemeClr val="lt1"/>
+            </a:fontRef>
+          </p:style>
+          <p:txBody>
+            <a:bodyPr rtlCol="0" anchor="ctr"/>
+            <a:lstStyle/>
+            <a:p>
+              <a:pPr algn="ctr"/>
+              <a:endParaRPr lang="de-DE" sz="800" dirty="0"/>
+            </a:p>
+          </p:txBody>
+        </p:sp>
+      </p:grpSp>
+      <p:cxnSp>
+        <p:nvCxnSpPr>
+          <p:cNvPr id="30" name="Gerader Verbinder 29">
+            <a:extLst>
+              <a:ext uri="{FF2B5EF4-FFF2-40B4-BE49-F238E27FC236}">
+                <a16:creationId xmlns:a16="http://schemas.microsoft.com/office/drawing/2014/main" id="{5C3EB844-CBFC-92C4-6CF1-0AB56FEF6C13}"/>
+              </a:ext>
+            </a:extLst>
+          </p:cNvPr>
+          <p:cNvCxnSpPr>
+            <a:cxnSpLocks/>
+          </p:cNvCxnSpPr>
+          <p:nvPr/>
+        </p:nvCxnSpPr>
+        <p:spPr>
+          <a:xfrm flipH="1">
+            <a:off x="2413887" y="1539053"/>
+            <a:ext cx="1055370" cy="271950"/>
+          </a:xfrm>
+          <a:prstGeom prst="line">
+            <a:avLst/>
+          </a:prstGeom>
+          <a:ln w="6350" cap="rnd">
+            <a:solidFill>
+              <a:schemeClr val="tx1"/>
+            </a:solidFill>
+            <a:prstDash val="sysDash"/>
+            <a:round/>
+          </a:ln>
+        </p:spPr>
+        <p:style>
+          <a:lnRef idx="2">
+            <a:schemeClr val="accent1"/>
+          </a:lnRef>
+          <a:fillRef idx="0">
+            <a:schemeClr val="accent1"/>
+          </a:fillRef>
+          <a:effectRef idx="1">
+            <a:schemeClr val="accent1"/>
+          </a:effectRef>
+          <a:fontRef idx="minor">
+            <a:schemeClr val="tx1"/>
+          </a:fontRef>
+        </p:style>
+      </p:cxnSp>
+      <p:cxnSp>
+        <p:nvCxnSpPr>
+          <p:cNvPr id="35" name="Gerader Verbinder 34">
+            <a:extLst>
+              <a:ext uri="{FF2B5EF4-FFF2-40B4-BE49-F238E27FC236}">
+                <a16:creationId xmlns:a16="http://schemas.microsoft.com/office/drawing/2014/main" id="{F35C4CC1-AF50-7238-C2CA-570D5CCADB61}"/>
+              </a:ext>
+            </a:extLst>
+          </p:cNvPr>
+          <p:cNvCxnSpPr>
+            <a:cxnSpLocks/>
+          </p:cNvCxnSpPr>
+          <p:nvPr/>
+        </p:nvCxnSpPr>
+        <p:spPr>
+          <a:xfrm flipH="1" flipV="1">
+            <a:off x="2421507" y="1565258"/>
+            <a:ext cx="550545" cy="99540"/>
+          </a:xfrm>
+          <a:prstGeom prst="line">
+            <a:avLst/>
+          </a:prstGeom>
+          <a:ln w="6350" cap="rnd">
+            <a:solidFill>
+              <a:schemeClr val="tx1"/>
+            </a:solidFill>
+            <a:prstDash val="sysDash"/>
+            <a:round/>
+          </a:ln>
+        </p:spPr>
+        <p:style>
+          <a:lnRef idx="2">
+            <a:schemeClr val="accent1"/>
+          </a:lnRef>
+          <a:fillRef idx="0">
+            <a:schemeClr val="accent1"/>
+          </a:fillRef>
+          <a:effectRef idx="1">
+            <a:schemeClr val="accent1"/>
+          </a:effectRef>
+          <a:fontRef idx="minor">
+            <a:schemeClr val="tx1"/>
+          </a:fontRef>
+        </p:style>
+      </p:cxnSp>
+      <p:cxnSp>
+        <p:nvCxnSpPr>
+          <p:cNvPr id="39" name="Gerade Verbindung mit Pfeil 38">
+            <a:extLst>
+              <a:ext uri="{FF2B5EF4-FFF2-40B4-BE49-F238E27FC236}">
+                <a16:creationId xmlns:a16="http://schemas.microsoft.com/office/drawing/2014/main" id="{C7B18244-F236-FB86-F64E-33115B88BC2D}"/>
+              </a:ext>
+            </a:extLst>
+          </p:cNvPr>
+          <p:cNvCxnSpPr>
+            <a:cxnSpLocks/>
+          </p:cNvCxnSpPr>
+          <p:nvPr/>
+        </p:nvCxnSpPr>
+        <p:spPr>
+          <a:xfrm flipV="1">
+            <a:off x="2972052" y="1126142"/>
+            <a:ext cx="0" cy="526762"/>
+          </a:xfrm>
+          <a:prstGeom prst="straightConnector1">
+            <a:avLst/>
+          </a:prstGeom>
+          <a:ln w="15875" cap="rnd">
+            <a:solidFill>
+              <a:schemeClr val="accent3"/>
+            </a:solidFill>
+            <a:round/>
+            <a:headEnd type="none" w="sm" len="sm"/>
+            <a:tailEnd type="triangle" w="med" len="med"/>
+          </a:ln>
+        </p:spPr>
+        <p:style>
+          <a:lnRef idx="2">
+            <a:schemeClr val="accent1"/>
+          </a:lnRef>
+          <a:fillRef idx="0">
+            <a:schemeClr val="accent1"/>
+          </a:fillRef>
+          <a:effectRef idx="1">
+            <a:schemeClr val="accent1"/>
+          </a:effectRef>
+          <a:fontRef idx="minor">
+            <a:schemeClr val="tx1"/>
+          </a:fontRef>
+        </p:style>
+      </p:cxnSp>
+      <p:sp>
+        <p:nvSpPr>
+          <p:cNvPr id="42" name="Textfeld 41">
+            <a:extLst>
+              <a:ext uri="{FF2B5EF4-FFF2-40B4-BE49-F238E27FC236}">
+                <a16:creationId xmlns:a16="http://schemas.microsoft.com/office/drawing/2014/main" id="{53441D75-F72E-FA97-FAF8-9CF451F1C582}"/>
+              </a:ext>
+            </a:extLst>
+          </p:cNvPr>
+          <p:cNvSpPr txBox="1"/>
+          <p:nvPr/>
+        </p:nvSpPr>
+        <p:spPr>
+          <a:xfrm>
+            <a:off x="2888757" y="1048476"/>
+            <a:ext cx="450936" cy="215444"/>
+          </a:xfrm>
+          <a:prstGeom prst="rect">
+            <a:avLst/>
+          </a:prstGeom>
+          <a:noFill/>
+        </p:spPr>
+        <p:txBody>
+          <a:bodyPr wrap="square" rtlCol="0" anchor="ctr">
+            <a:spAutoFit/>
+          </a:bodyPr>
+          <a:lstStyle/>
+          <a:p>
+            <a:pPr algn="ctr"/>
+            <a:r>
+              <a:rPr lang="de-DE" sz="800" i="1" dirty="0">
+                <a:solidFill>
+                  <a:schemeClr val="accent3"/>
+                </a:solidFill>
+                <a:latin typeface="CMU Serif" panose="02000603000000000000" pitchFamily="2" charset="0"/>
+                <a:ea typeface="CMU Serif" panose="02000603000000000000" pitchFamily="2" charset="0"/>
+                <a:cs typeface="CMU Serif" panose="02000603000000000000" pitchFamily="2" charset="0"/>
+              </a:rPr>
+              <a:t>A</a:t>
+            </a:r>
+            <a:r>
+              <a:rPr lang="de-DE" sz="800" baseline="-25000" dirty="0">
+                <a:solidFill>
+                  <a:schemeClr val="accent3"/>
+                </a:solidFill>
+                <a:latin typeface="CMU Serif" panose="02000603000000000000" pitchFamily="2" charset="0"/>
+                <a:ea typeface="CMU Serif" panose="02000603000000000000" pitchFamily="2" charset="0"/>
+                <a:cs typeface="CMU Serif" panose="02000603000000000000" pitchFamily="2" charset="0"/>
+              </a:rPr>
+              <a:t>H</a:t>
+            </a:r>
+          </a:p>
+        </p:txBody>
+      </p:sp>
+      <p:sp>
+        <p:nvSpPr>
+          <p:cNvPr id="44" name="Textfeld 43">
+            <a:extLst>
+              <a:ext uri="{FF2B5EF4-FFF2-40B4-BE49-F238E27FC236}">
+                <a16:creationId xmlns:a16="http://schemas.microsoft.com/office/drawing/2014/main" id="{53426C88-2461-FFA4-84B5-D4073970F249}"/>
+              </a:ext>
+            </a:extLst>
+          </p:cNvPr>
+          <p:cNvSpPr txBox="1"/>
+          <p:nvPr/>
+        </p:nvSpPr>
+        <p:spPr>
+          <a:xfrm>
+            <a:off x="1755094" y="1047916"/>
+            <a:ext cx="295428" cy="215444"/>
+          </a:xfrm>
+          <a:prstGeom prst="rect">
+            <a:avLst/>
+          </a:prstGeom>
+          <a:noFill/>
+        </p:spPr>
+        <p:txBody>
+          <a:bodyPr wrap="square" rtlCol="0" anchor="ctr">
+            <a:spAutoFit/>
+          </a:bodyPr>
+          <a:lstStyle/>
+          <a:p>
+            <a:pPr algn="ctr"/>
+            <a:r>
+              <a:rPr lang="de-DE" sz="800" i="1" dirty="0">
+                <a:latin typeface="CMU Serif" panose="02000603000000000000" pitchFamily="2" charset="0"/>
+                <a:ea typeface="CMU Serif" panose="02000603000000000000" pitchFamily="2" charset="0"/>
+                <a:cs typeface="CMU Serif" panose="02000603000000000000" pitchFamily="2" charset="0"/>
+              </a:rPr>
+              <a:t>r</a:t>
+            </a:r>
+            <a:r>
+              <a:rPr lang="de-DE" sz="800" baseline="-25000" dirty="0">
+                <a:latin typeface="CMU Serif" panose="02000603000000000000" pitchFamily="2" charset="0"/>
+                <a:ea typeface="CMU Serif" panose="02000603000000000000" pitchFamily="2" charset="0"/>
+                <a:cs typeface="CMU Serif" panose="02000603000000000000" pitchFamily="2" charset="0"/>
+              </a:rPr>
+              <a:t>0</a:t>
+            </a:r>
+          </a:p>
+        </p:txBody>
+      </p:sp>
+      <p:grpSp>
+        <p:nvGrpSpPr>
+          <p:cNvPr id="49" name="Gruppieren 48">
+            <a:extLst>
+              <a:ext uri="{FF2B5EF4-FFF2-40B4-BE49-F238E27FC236}">
+                <a16:creationId xmlns:a16="http://schemas.microsoft.com/office/drawing/2014/main" id="{A3300799-40B5-FB3E-4CD3-AA66A3B1FFB3}"/>
+              </a:ext>
+            </a:extLst>
+          </p:cNvPr>
+          <p:cNvGrpSpPr/>
+          <p:nvPr/>
+        </p:nvGrpSpPr>
+        <p:grpSpPr>
+          <a:xfrm>
+            <a:off x="2535935" y="1221625"/>
+            <a:ext cx="872234" cy="878938"/>
+            <a:chOff x="2376174" y="1276909"/>
+            <a:chExt cx="669281" cy="674424"/>
+          </a:xfrm>
+        </p:grpSpPr>
+        <p:sp>
+          <p:nvSpPr>
+            <p:cNvPr id="46" name="Bogen 45">
+              <a:extLst>
+                <a:ext uri="{FF2B5EF4-FFF2-40B4-BE49-F238E27FC236}">
+                  <a16:creationId xmlns:a16="http://schemas.microsoft.com/office/drawing/2014/main" id="{470D47DC-6862-0535-172F-6FB879DE7BCC}"/>
+                </a:ext>
+              </a:extLst>
+            </p:cNvPr>
+            <p:cNvSpPr/>
+            <p:nvPr/>
+          </p:nvSpPr>
+          <p:spPr>
+            <a:xfrm>
+              <a:off x="2376175" y="1276909"/>
+              <a:ext cx="669280" cy="669278"/>
+            </a:xfrm>
+            <a:prstGeom prst="arc">
+              <a:avLst>
+                <a:gd name="adj1" fmla="val 11348918"/>
+                <a:gd name="adj2" fmla="val 12298312"/>
+              </a:avLst>
+            </a:prstGeom>
+            <a:ln w="9525" cap="rnd">
+              <a:solidFill>
+                <a:schemeClr val="tx1"/>
+              </a:solidFill>
+              <a:round/>
+              <a:headEnd type="triangle" w="sm" len="sm"/>
+              <a:tailEnd w="sm" len="sm"/>
+            </a:ln>
+          </p:spPr>
+          <p:style>
+            <a:lnRef idx="2">
+              <a:schemeClr val="accent1"/>
+            </a:lnRef>
+            <a:fillRef idx="0">
+              <a:schemeClr val="accent1"/>
+            </a:fillRef>
+            <a:effectRef idx="1">
+              <a:schemeClr val="accent1"/>
+            </a:effectRef>
+            <a:fontRef idx="minor">
+              <a:schemeClr val="tx1"/>
+            </a:fontRef>
+          </p:style>
+          <p:txBody>
+            <a:bodyPr rtlCol="0" anchor="ctr"/>
+            <a:lstStyle/>
+            <a:p>
+              <a:pPr algn="ctr"/>
+              <a:endParaRPr lang="de-DE" sz="800" dirty="0"/>
+            </a:p>
+          </p:txBody>
+        </p:sp>
+        <p:sp>
+          <p:nvSpPr>
+            <p:cNvPr id="47" name="Bogen 46">
+              <a:extLst>
+                <a:ext uri="{FF2B5EF4-FFF2-40B4-BE49-F238E27FC236}">
+                  <a16:creationId xmlns:a16="http://schemas.microsoft.com/office/drawing/2014/main" id="{2F5A6F87-37BA-6DA2-C8C7-8370AE44E0B9}"/>
+                </a:ext>
+              </a:extLst>
+            </p:cNvPr>
+            <p:cNvSpPr/>
+            <p:nvPr/>
+          </p:nvSpPr>
+          <p:spPr>
+            <a:xfrm>
+              <a:off x="2376174" y="1282055"/>
+              <a:ext cx="669280" cy="669278"/>
+            </a:xfrm>
+            <a:prstGeom prst="arc">
+              <a:avLst>
+                <a:gd name="adj1" fmla="val 9071079"/>
+                <a:gd name="adj2" fmla="val 9934287"/>
+              </a:avLst>
+            </a:prstGeom>
+            <a:ln w="9525" cap="rnd">
+              <a:solidFill>
+                <a:schemeClr val="tx1"/>
+              </a:solidFill>
+              <a:round/>
+              <a:headEnd type="none" w="sm" len="sm"/>
+              <a:tailEnd type="triangle" w="sm" len="sm"/>
+            </a:ln>
+          </p:spPr>
+          <p:style>
+            <a:lnRef idx="2">
+              <a:schemeClr val="accent1"/>
+            </a:lnRef>
+            <a:fillRef idx="0">
+              <a:schemeClr val="accent1"/>
+            </a:fillRef>
+            <a:effectRef idx="1">
+              <a:schemeClr val="accent1"/>
+            </a:effectRef>
+            <a:fontRef idx="minor">
+              <a:schemeClr val="tx1"/>
+            </a:fontRef>
+          </p:style>
+          <p:txBody>
+            <a:bodyPr rtlCol="0" anchor="ctr"/>
+            <a:lstStyle/>
+            <a:p>
+              <a:pPr algn="ctr"/>
+              <a:endParaRPr lang="de-DE" sz="800" dirty="0"/>
+            </a:p>
+          </p:txBody>
+        </p:sp>
+        <p:sp>
+          <p:nvSpPr>
+            <p:cNvPr id="48" name="Bogen 47">
+              <a:extLst>
+                <a:ext uri="{FF2B5EF4-FFF2-40B4-BE49-F238E27FC236}">
+                  <a16:creationId xmlns:a16="http://schemas.microsoft.com/office/drawing/2014/main" id="{16D0B117-EE4A-2467-8C23-863FEF5F428A}"/>
+                </a:ext>
+              </a:extLst>
+            </p:cNvPr>
+            <p:cNvSpPr/>
+            <p:nvPr/>
+          </p:nvSpPr>
+          <p:spPr>
+            <a:xfrm>
+              <a:off x="2376174" y="1282055"/>
+              <a:ext cx="669280" cy="669278"/>
+            </a:xfrm>
+            <a:prstGeom prst="arc">
+              <a:avLst>
+                <a:gd name="adj1" fmla="val 9695124"/>
+                <a:gd name="adj2" fmla="val 11586429"/>
+              </a:avLst>
+            </a:prstGeom>
+            <a:ln w="9525" cap="rnd">
+              <a:solidFill>
+                <a:schemeClr val="tx1"/>
+              </a:solidFill>
+              <a:round/>
+              <a:headEnd type="none" w="sm" len="sm"/>
+              <a:tailEnd w="sm" len="sm"/>
+            </a:ln>
+          </p:spPr>
+          <p:style>
+            <a:lnRef idx="2">
+              <a:schemeClr val="accent1"/>
+            </a:lnRef>
+            <a:fillRef idx="0">
+              <a:schemeClr val="accent1"/>
+            </a:fillRef>
+            <a:effectRef idx="1">
+              <a:schemeClr val="accent1"/>
+            </a:effectRef>
+            <a:fontRef idx="minor">
+              <a:schemeClr val="tx1"/>
+            </a:fontRef>
+          </p:style>
+          <p:txBody>
+            <a:bodyPr rtlCol="0" anchor="ctr"/>
+            <a:lstStyle/>
+            <a:p>
+              <a:pPr algn="ctr"/>
+              <a:endParaRPr lang="de-DE" sz="800" dirty="0"/>
+            </a:p>
+          </p:txBody>
+        </p:sp>
+      </p:grpSp>
+      <p:sp>
+        <p:nvSpPr>
+          <p:cNvPr id="50" name="Textfeld 49">
+            <a:extLst>
+              <a:ext uri="{FF2B5EF4-FFF2-40B4-BE49-F238E27FC236}">
+                <a16:creationId xmlns:a16="http://schemas.microsoft.com/office/drawing/2014/main" id="{ECFD9FCB-AA54-FD91-EE0D-F1DF1E938D10}"/>
+              </a:ext>
+            </a:extLst>
+          </p:cNvPr>
+          <p:cNvSpPr txBox="1"/>
+          <p:nvPr/>
+        </p:nvSpPr>
+        <p:spPr>
+          <a:xfrm>
+            <a:off x="2069081" y="1590163"/>
+            <a:ext cx="498896" cy="215444"/>
+          </a:xfrm>
+          <a:prstGeom prst="rect">
+            <a:avLst/>
+          </a:prstGeom>
+          <a:noFill/>
+        </p:spPr>
+        <p:txBody>
+          <a:bodyPr wrap="square" rtlCol="0" anchor="ctr">
+            <a:spAutoFit/>
+          </a:bodyPr>
+          <a:lstStyle/>
+          <a:p>
+            <a:pPr algn="ctr"/>
+            <a:r>
+              <a:rPr lang="de-DE" sz="800" dirty="0">
+                <a:latin typeface="Latin Modern Math" panose="02000503000000000000" pitchFamily="50" charset="0"/>
+                <a:ea typeface="Latin Modern Math" panose="02000503000000000000" pitchFamily="50" charset="0"/>
+                <a:cs typeface="CMU Serif" panose="02000603000000000000" pitchFamily="2" charset="0"/>
+              </a:rPr>
+              <a:t>−</a:t>
+            </a:r>
+            <a:r>
+              <a:rPr lang="de-DE" sz="800" i="1" dirty="0">
+                <a:latin typeface="Latin Modern Math" panose="02000503000000000000" pitchFamily="50" charset="0"/>
+                <a:ea typeface="Latin Modern Math" panose="02000503000000000000" pitchFamily="50" charset="0"/>
+                <a:cs typeface="CMU Serif" panose="02000603000000000000" pitchFamily="2" charset="0"/>
+              </a:rPr>
+              <a:t>ε</a:t>
+            </a:r>
+            <a:r>
+              <a:rPr lang="de-DE" sz="800" baseline="-25000" dirty="0">
+                <a:latin typeface="CMU Serif" panose="02000603000000000000" pitchFamily="2" charset="0"/>
+                <a:ea typeface="CMU Serif" panose="02000603000000000000" pitchFamily="2" charset="0"/>
+                <a:cs typeface="CMU Serif" panose="02000603000000000000" pitchFamily="2" charset="0"/>
+              </a:rPr>
+              <a:t>H0</a:t>
+            </a:r>
+          </a:p>
+        </p:txBody>
+      </p:sp>
+      <p:cxnSp>
+        <p:nvCxnSpPr>
+          <p:cNvPr id="55" name="Gerade Verbindung mit Pfeil 54">
+            <a:extLst>
+              <a:ext uri="{FF2B5EF4-FFF2-40B4-BE49-F238E27FC236}">
+                <a16:creationId xmlns:a16="http://schemas.microsoft.com/office/drawing/2014/main" id="{CDB78DE7-D0BC-1C7F-111D-7D9AB11A8289}"/>
+              </a:ext>
+            </a:extLst>
+          </p:cNvPr>
+          <p:cNvCxnSpPr>
+            <a:cxnSpLocks/>
+          </p:cNvCxnSpPr>
+          <p:nvPr/>
+        </p:nvCxnSpPr>
+        <p:spPr>
+          <a:xfrm>
+            <a:off x="1231185" y="1711221"/>
+            <a:ext cx="0" cy="984641"/>
+          </a:xfrm>
+          <a:prstGeom prst="straightConnector1">
+            <a:avLst/>
+          </a:prstGeom>
+          <a:ln w="15875" cap="rnd">
+            <a:solidFill>
+              <a:srgbClr val="C00000"/>
+            </a:solidFill>
+            <a:round/>
+            <a:headEnd type="none" w="sm" len="sm"/>
+            <a:tailEnd type="triangle" w="med" len="med"/>
+          </a:ln>
+        </p:spPr>
+        <p:style>
+          <a:lnRef idx="2">
+            <a:schemeClr val="accent1"/>
+          </a:lnRef>
+          <a:fillRef idx="0">
+            <a:schemeClr val="accent1"/>
+          </a:fillRef>
+          <a:effectRef idx="1">
+            <a:schemeClr val="accent1"/>
+          </a:effectRef>
+          <a:fontRef idx="minor">
+            <a:schemeClr val="tx1"/>
+          </a:fontRef>
+        </p:style>
+      </p:cxnSp>
+      <p:grpSp>
+        <p:nvGrpSpPr>
+          <p:cNvPr id="54" name="Gruppieren 53">
+            <a:extLst>
+              <a:ext uri="{FF2B5EF4-FFF2-40B4-BE49-F238E27FC236}">
+                <a16:creationId xmlns:a16="http://schemas.microsoft.com/office/drawing/2014/main" id="{D61F6E76-3148-7CB0-FFB3-430E3E6AA2F6}"/>
+              </a:ext>
+            </a:extLst>
+          </p:cNvPr>
+          <p:cNvGrpSpPr/>
+          <p:nvPr/>
+        </p:nvGrpSpPr>
+        <p:grpSpPr>
+          <a:xfrm>
+            <a:off x="1195185" y="1662429"/>
+            <a:ext cx="72673" cy="72000"/>
+            <a:chOff x="1110231" y="657130"/>
+            <a:chExt cx="112469" cy="113199"/>
+          </a:xfrm>
+        </p:grpSpPr>
+        <p:sp>
+          <p:nvSpPr>
+            <p:cNvPr id="51" name="Ellipse 50">
+              <a:extLst>
+                <a:ext uri="{FF2B5EF4-FFF2-40B4-BE49-F238E27FC236}">
+                  <a16:creationId xmlns:a16="http://schemas.microsoft.com/office/drawing/2014/main" id="{8CAF7C18-8F45-2394-32A2-854C83090F22}"/>
+                </a:ext>
+              </a:extLst>
+            </p:cNvPr>
+            <p:cNvSpPr/>
+            <p:nvPr/>
+          </p:nvSpPr>
+          <p:spPr>
+            <a:xfrm>
+              <a:off x="1113103" y="659519"/>
+              <a:ext cx="106650" cy="106650"/>
+            </a:xfrm>
+            <a:prstGeom prst="ellipse">
+              <a:avLst/>
+            </a:prstGeom>
+            <a:solidFill>
+              <a:schemeClr val="bg1"/>
+            </a:solidFill>
+            <a:ln w="6350">
+              <a:solidFill>
+                <a:schemeClr val="tx1"/>
+              </a:solidFill>
+            </a:ln>
+          </p:spPr>
+          <p:style>
+            <a:lnRef idx="2">
+              <a:schemeClr val="accent1">
+                <a:shade val="15000"/>
+              </a:schemeClr>
+            </a:lnRef>
+            <a:fillRef idx="1">
+              <a:schemeClr val="accent1"/>
+            </a:fillRef>
+            <a:effectRef idx="0">
+              <a:schemeClr val="accent1"/>
+            </a:effectRef>
+            <a:fontRef idx="minor">
+              <a:schemeClr val="lt1"/>
+            </a:fontRef>
+          </p:style>
+          <p:txBody>
+            <a:bodyPr rtlCol="0" anchor="ctr"/>
+            <a:lstStyle/>
+            <a:p>
+              <a:pPr algn="ctr"/>
+              <a:endParaRPr lang="de-DE" sz="800" dirty="0"/>
+            </a:p>
+          </p:txBody>
+        </p:sp>
+        <p:sp>
+          <p:nvSpPr>
+            <p:cNvPr id="52" name="Bogen 51">
+              <a:extLst>
+                <a:ext uri="{FF2B5EF4-FFF2-40B4-BE49-F238E27FC236}">
+                  <a16:creationId xmlns:a16="http://schemas.microsoft.com/office/drawing/2014/main" id="{5A37D944-FD62-08E8-D9B6-9B74D8FD11E5}"/>
+                </a:ext>
+              </a:extLst>
+            </p:cNvPr>
+            <p:cNvSpPr/>
+            <p:nvPr/>
+          </p:nvSpPr>
+          <p:spPr>
+            <a:xfrm>
+              <a:off x="1110231" y="658901"/>
+              <a:ext cx="111428" cy="111428"/>
+            </a:xfrm>
+            <a:prstGeom prst="arc">
+              <a:avLst/>
+            </a:prstGeom>
+            <a:solidFill>
+              <a:schemeClr val="tx1"/>
+            </a:solidFill>
+            <a:ln>
+              <a:noFill/>
+            </a:ln>
+          </p:spPr>
+          <p:style>
+            <a:lnRef idx="2">
+              <a:schemeClr val="accent1"/>
+            </a:lnRef>
+            <a:fillRef idx="0">
+              <a:schemeClr val="accent1"/>
+            </a:fillRef>
+            <a:effectRef idx="1">
+              <a:schemeClr val="accent1"/>
+            </a:effectRef>
+            <a:fontRef idx="minor">
+              <a:schemeClr val="tx1"/>
+            </a:fontRef>
+          </p:style>
+          <p:txBody>
+            <a:bodyPr rtlCol="0" anchor="ctr"/>
+            <a:lstStyle/>
+            <a:p>
+              <a:pPr algn="ctr"/>
+              <a:endParaRPr lang="de-DE" sz="800" dirty="0"/>
+            </a:p>
+          </p:txBody>
+        </p:sp>
+        <p:sp>
+          <p:nvSpPr>
+            <p:cNvPr id="53" name="Bogen 52">
+              <a:extLst>
+                <a:ext uri="{FF2B5EF4-FFF2-40B4-BE49-F238E27FC236}">
+                  <a16:creationId xmlns:a16="http://schemas.microsoft.com/office/drawing/2014/main" id="{4D64363E-8B5D-0E5A-EC8E-E64EF0FD24A9}"/>
+                </a:ext>
+              </a:extLst>
+            </p:cNvPr>
+            <p:cNvSpPr/>
+            <p:nvPr/>
+          </p:nvSpPr>
+          <p:spPr>
+            <a:xfrm rot="10800000">
+              <a:off x="1115084" y="657130"/>
+              <a:ext cx="107616" cy="111427"/>
+            </a:xfrm>
+            <a:prstGeom prst="arc">
+              <a:avLst/>
+            </a:prstGeom>
+            <a:solidFill>
+              <a:schemeClr val="tx1"/>
+            </a:solidFill>
+            <a:ln>
+              <a:noFill/>
+            </a:ln>
+          </p:spPr>
+          <p:style>
+            <a:lnRef idx="2">
+              <a:schemeClr val="accent1"/>
+            </a:lnRef>
+            <a:fillRef idx="0">
+              <a:schemeClr val="accent1"/>
+            </a:fillRef>
+            <a:effectRef idx="1">
+              <a:schemeClr val="accent1"/>
+            </a:effectRef>
+            <a:fontRef idx="minor">
+              <a:schemeClr val="tx1"/>
+            </a:fontRef>
+          </p:style>
+          <p:txBody>
+            <a:bodyPr rtlCol="0" anchor="ctr"/>
+            <a:lstStyle/>
+            <a:p>
+              <a:pPr algn="ctr"/>
+              <a:endParaRPr lang="de-DE" sz="800" dirty="0"/>
+            </a:p>
+          </p:txBody>
+        </p:sp>
+      </p:grpSp>
+      <p:sp>
+        <p:nvSpPr>
+          <p:cNvPr id="57" name="Textfeld 56">
+            <a:extLst>
+              <a:ext uri="{FF2B5EF4-FFF2-40B4-BE49-F238E27FC236}">
+                <a16:creationId xmlns:a16="http://schemas.microsoft.com/office/drawing/2014/main" id="{0EF93118-1EDA-BC68-7D65-77A08A2C3A2D}"/>
+              </a:ext>
+            </a:extLst>
+          </p:cNvPr>
+          <p:cNvSpPr txBox="1"/>
+          <p:nvPr/>
+        </p:nvSpPr>
+        <p:spPr>
+          <a:xfrm>
+            <a:off x="1138077" y="2545188"/>
+            <a:ext cx="450936" cy="215444"/>
+          </a:xfrm>
+          <a:prstGeom prst="rect">
+            <a:avLst/>
+          </a:prstGeom>
+          <a:noFill/>
+        </p:spPr>
+        <p:txBody>
+          <a:bodyPr wrap="square" rtlCol="0" anchor="ctr">
+            <a:spAutoFit/>
+          </a:bodyPr>
+          <a:lstStyle/>
+          <a:p>
+            <a:pPr algn="ctr"/>
+            <a:r>
+              <a:rPr lang="de-DE" sz="800" i="1" dirty="0">
+                <a:solidFill>
+                  <a:srgbClr val="C00000"/>
+                </a:solidFill>
+                <a:latin typeface="CMU Serif" panose="02000603000000000000" pitchFamily="2" charset="0"/>
+                <a:ea typeface="CMU Serif" panose="02000603000000000000" pitchFamily="2" charset="0"/>
+                <a:cs typeface="CMU Serif" panose="02000603000000000000" pitchFamily="2" charset="0"/>
+              </a:rPr>
+              <a:t>G</a:t>
+            </a:r>
+            <a:endParaRPr lang="de-DE" sz="800" baseline="-25000" dirty="0">
+              <a:solidFill>
+                <a:srgbClr val="C00000"/>
+              </a:solidFill>
+              <a:latin typeface="CMU Serif" panose="02000603000000000000" pitchFamily="2" charset="0"/>
+              <a:ea typeface="CMU Serif" panose="02000603000000000000" pitchFamily="2" charset="0"/>
+              <a:cs typeface="CMU Serif" panose="02000603000000000000" pitchFamily="2" charset="0"/>
+            </a:endParaRPr>
+          </a:p>
+        </p:txBody>
+      </p:sp>
+      <p:cxnSp>
+        <p:nvCxnSpPr>
+          <p:cNvPr id="58" name="Gerader Verbinder 57">
+            <a:extLst>
+              <a:ext uri="{FF2B5EF4-FFF2-40B4-BE49-F238E27FC236}">
+                <a16:creationId xmlns:a16="http://schemas.microsoft.com/office/drawing/2014/main" id="{55F0F71C-CC31-7EC8-0186-AFBAD0981419}"/>
+              </a:ext>
+            </a:extLst>
+          </p:cNvPr>
+          <p:cNvCxnSpPr>
+            <a:cxnSpLocks/>
+          </p:cNvCxnSpPr>
+          <p:nvPr/>
+        </p:nvCxnSpPr>
+        <p:spPr>
+          <a:xfrm>
+            <a:off x="861539" y="1647189"/>
+            <a:ext cx="0" cy="524798"/>
+          </a:xfrm>
+          <a:prstGeom prst="line">
+            <a:avLst/>
+          </a:prstGeom>
+          <a:ln w="6350" cap="rnd">
+            <a:solidFill>
+              <a:schemeClr val="tx1"/>
+            </a:solidFill>
+            <a:round/>
+          </a:ln>
+        </p:spPr>
+        <p:style>
+          <a:lnRef idx="2">
+            <a:schemeClr val="accent1"/>
+          </a:lnRef>
+          <a:fillRef idx="0">
+            <a:schemeClr val="accent1"/>
+          </a:fillRef>
+          <a:effectRef idx="1">
+            <a:schemeClr val="accent1"/>
+          </a:effectRef>
+          <a:fontRef idx="minor">
+            <a:schemeClr val="tx1"/>
+          </a:fontRef>
+        </p:style>
+      </p:cxnSp>
+      <p:cxnSp>
+        <p:nvCxnSpPr>
+          <p:cNvPr id="63" name="Gerader Verbinder 62">
+            <a:extLst>
+              <a:ext uri="{FF2B5EF4-FFF2-40B4-BE49-F238E27FC236}">
+                <a16:creationId xmlns:a16="http://schemas.microsoft.com/office/drawing/2014/main" id="{DEC643A3-AFEB-F63F-D6DE-39A5470E76F7}"/>
+              </a:ext>
+            </a:extLst>
+          </p:cNvPr>
+          <p:cNvCxnSpPr>
+            <a:cxnSpLocks/>
+          </p:cNvCxnSpPr>
+          <p:nvPr/>
+        </p:nvCxnSpPr>
+        <p:spPr>
+          <a:xfrm flipH="1">
+            <a:off x="861539" y="2121411"/>
+            <a:ext cx="663687" cy="0"/>
+          </a:xfrm>
+          <a:prstGeom prst="line">
+            <a:avLst/>
+          </a:prstGeom>
+          <a:ln w="6350" cap="rnd">
+            <a:solidFill>
+              <a:schemeClr val="tx1"/>
+            </a:solidFill>
+            <a:round/>
+            <a:headEnd type="triangle" w="sm" len="sm"/>
+            <a:tailEnd type="triangle" w="sm" len="sm"/>
+          </a:ln>
+        </p:spPr>
+        <p:style>
+          <a:lnRef idx="2">
+            <a:schemeClr val="accent1"/>
+          </a:lnRef>
+          <a:fillRef idx="0">
+            <a:schemeClr val="accent1"/>
+          </a:fillRef>
+          <a:effectRef idx="1">
+            <a:schemeClr val="accent1"/>
+          </a:effectRef>
+          <a:fontRef idx="minor">
+            <a:schemeClr val="tx1"/>
+          </a:fontRef>
+        </p:style>
+      </p:cxnSp>
+      <p:cxnSp>
+        <p:nvCxnSpPr>
+          <p:cNvPr id="65" name="Gerader Verbinder 64">
+            <a:extLst>
+              <a:ext uri="{FF2B5EF4-FFF2-40B4-BE49-F238E27FC236}">
+                <a16:creationId xmlns:a16="http://schemas.microsoft.com/office/drawing/2014/main" id="{4547791A-1926-9590-0984-5248E1907F4A}"/>
+              </a:ext>
+            </a:extLst>
+          </p:cNvPr>
+          <p:cNvCxnSpPr>
+            <a:cxnSpLocks/>
+          </p:cNvCxnSpPr>
+          <p:nvPr/>
+        </p:nvCxnSpPr>
+        <p:spPr>
+          <a:xfrm>
+            <a:off x="1523792" y="1749442"/>
+            <a:ext cx="0" cy="601615"/>
+          </a:xfrm>
+          <a:prstGeom prst="line">
+            <a:avLst/>
+          </a:prstGeom>
+          <a:ln w="6350" cap="rnd">
+            <a:solidFill>
+              <a:schemeClr val="tx1"/>
+            </a:solidFill>
+            <a:round/>
+          </a:ln>
+        </p:spPr>
+        <p:style>
+          <a:lnRef idx="2">
+            <a:schemeClr val="accent1"/>
+          </a:lnRef>
+          <a:fillRef idx="0">
+            <a:schemeClr val="accent1"/>
+          </a:fillRef>
+          <a:effectRef idx="1">
+            <a:schemeClr val="accent1"/>
+          </a:effectRef>
+          <a:fontRef idx="minor">
+            <a:schemeClr val="tx1"/>
+          </a:fontRef>
+        </p:style>
+      </p:cxnSp>
+      <p:cxnSp>
+        <p:nvCxnSpPr>
+          <p:cNvPr id="71" name="Gerader Verbinder 70">
+            <a:extLst>
+              <a:ext uri="{FF2B5EF4-FFF2-40B4-BE49-F238E27FC236}">
+                <a16:creationId xmlns:a16="http://schemas.microsoft.com/office/drawing/2014/main" id="{50BB11E3-7C49-E08E-C889-E6AB2FD5BBE3}"/>
+              </a:ext>
+            </a:extLst>
+          </p:cNvPr>
+          <p:cNvCxnSpPr>
+            <a:cxnSpLocks/>
+          </p:cNvCxnSpPr>
+          <p:nvPr/>
+        </p:nvCxnSpPr>
+        <p:spPr>
+          <a:xfrm>
+            <a:off x="651843" y="1612899"/>
+            <a:ext cx="0" cy="919039"/>
+          </a:xfrm>
+          <a:prstGeom prst="line">
+            <a:avLst/>
+          </a:prstGeom>
+          <a:ln w="6350" cap="rnd">
+            <a:solidFill>
+              <a:schemeClr val="tx1"/>
+            </a:solidFill>
+            <a:round/>
+          </a:ln>
+        </p:spPr>
+        <p:style>
+          <a:lnRef idx="2">
+            <a:schemeClr val="accent1"/>
+          </a:lnRef>
+          <a:fillRef idx="0">
+            <a:schemeClr val="accent1"/>
+          </a:fillRef>
+          <a:effectRef idx="1">
+            <a:schemeClr val="accent1"/>
+          </a:effectRef>
+          <a:fontRef idx="minor">
+            <a:schemeClr val="tx1"/>
+          </a:fontRef>
+        </p:style>
+      </p:cxnSp>
+      <p:cxnSp>
+        <p:nvCxnSpPr>
+          <p:cNvPr id="75" name="Gerader Verbinder 74">
+            <a:extLst>
+              <a:ext uri="{FF2B5EF4-FFF2-40B4-BE49-F238E27FC236}">
+                <a16:creationId xmlns:a16="http://schemas.microsoft.com/office/drawing/2014/main" id="{1B0CCD80-2800-C6B4-D28B-DBE8180FE821}"/>
+              </a:ext>
+            </a:extLst>
+          </p:cNvPr>
+          <p:cNvCxnSpPr>
+            <a:cxnSpLocks/>
+          </p:cNvCxnSpPr>
+          <p:nvPr/>
+        </p:nvCxnSpPr>
+        <p:spPr>
+          <a:xfrm flipH="1">
+            <a:off x="651843" y="2298576"/>
+            <a:ext cx="871478" cy="0"/>
+          </a:xfrm>
+          <a:prstGeom prst="line">
+            <a:avLst/>
+          </a:prstGeom>
+          <a:ln w="6350" cap="rnd">
+            <a:solidFill>
+              <a:schemeClr val="tx1"/>
+            </a:solidFill>
+            <a:round/>
+            <a:headEnd type="triangle" w="sm" len="sm"/>
+            <a:tailEnd type="triangle" w="sm" len="sm"/>
+          </a:ln>
+        </p:spPr>
+        <p:style>
+          <a:lnRef idx="2">
+            <a:schemeClr val="accent1"/>
+          </a:lnRef>
+          <a:fillRef idx="0">
+            <a:schemeClr val="accent1"/>
+          </a:fillRef>
+          <a:effectRef idx="1">
+            <a:schemeClr val="accent1"/>
+          </a:effectRef>
+          <a:fontRef idx="minor">
+            <a:schemeClr val="tx1"/>
+          </a:fontRef>
+        </p:style>
+      </p:cxnSp>
+      <p:cxnSp>
+        <p:nvCxnSpPr>
+          <p:cNvPr id="77" name="Gerader Verbinder 76">
+            <a:extLst>
+              <a:ext uri="{FF2B5EF4-FFF2-40B4-BE49-F238E27FC236}">
+                <a16:creationId xmlns:a16="http://schemas.microsoft.com/office/drawing/2014/main" id="{A40AE3FE-3779-3DCA-FB40-008C4C4AE3A1}"/>
+              </a:ext>
+            </a:extLst>
+          </p:cNvPr>
+          <p:cNvCxnSpPr>
+            <a:cxnSpLocks/>
+          </p:cNvCxnSpPr>
+          <p:nvPr/>
+        </p:nvCxnSpPr>
+        <p:spPr>
+          <a:xfrm flipH="1">
+            <a:off x="651843" y="2121411"/>
+            <a:ext cx="209696" cy="0"/>
+          </a:xfrm>
+          <a:prstGeom prst="line">
+            <a:avLst/>
+          </a:prstGeom>
+          <a:ln w="6350" cap="rnd">
+            <a:solidFill>
+              <a:schemeClr val="tx1"/>
+            </a:solidFill>
+            <a:round/>
+            <a:headEnd type="triangle" w="sm" len="sm"/>
+            <a:tailEnd type="triangle" w="sm" len="sm"/>
+          </a:ln>
+        </p:spPr>
+        <p:style>
+          <a:lnRef idx="2">
+            <a:schemeClr val="accent1"/>
+          </a:lnRef>
+          <a:fillRef idx="0">
+            <a:schemeClr val="accent1"/>
+          </a:fillRef>
+          <a:effectRef idx="1">
+            <a:schemeClr val="accent1"/>
+          </a:effectRef>
+          <a:fontRef idx="minor">
+            <a:schemeClr val="tx1"/>
+          </a:fontRef>
+        </p:style>
+      </p:cxnSp>
+      <p:sp>
+        <p:nvSpPr>
+          <p:cNvPr id="79" name="Textfeld 78">
+            <a:extLst>
+              <a:ext uri="{FF2B5EF4-FFF2-40B4-BE49-F238E27FC236}">
+                <a16:creationId xmlns:a16="http://schemas.microsoft.com/office/drawing/2014/main" id="{41765BE6-5AEE-B7E3-C15A-259D8BF625F7}"/>
+              </a:ext>
+            </a:extLst>
+          </p:cNvPr>
+          <p:cNvSpPr txBox="1"/>
+          <p:nvPr/>
+        </p:nvSpPr>
+        <p:spPr>
+          <a:xfrm>
+            <a:off x="832669" y="1744498"/>
+            <a:ext cx="435125" cy="215444"/>
+          </a:xfrm>
+          <a:prstGeom prst="rect">
+            <a:avLst/>
+          </a:prstGeom>
+          <a:noFill/>
+        </p:spPr>
+        <p:txBody>
+          <a:bodyPr wrap="square" rtlCol="0" anchor="ctr">
+            <a:spAutoFit/>
+          </a:bodyPr>
+          <a:lstStyle/>
+          <a:p>
+            <a:pPr algn="ctr"/>
+            <a:r>
+              <a:rPr lang="de-DE" sz="800" dirty="0">
+                <a:latin typeface="CMU Serif" panose="02000603000000000000" pitchFamily="2" charset="0"/>
+                <a:ea typeface="CMU Serif" panose="02000603000000000000" pitchFamily="2" charset="0"/>
+                <a:cs typeface="CMU Serif" panose="02000603000000000000" pitchFamily="2" charset="0"/>
+              </a:rPr>
+              <a:t>Δ</a:t>
+            </a:r>
+            <a:r>
+              <a:rPr lang="de-DE" sz="800" i="1" dirty="0">
+                <a:latin typeface="CMU Serif" panose="02000603000000000000" pitchFamily="2" charset="0"/>
+                <a:ea typeface="CMU Serif" panose="02000603000000000000" pitchFamily="2" charset="0"/>
+                <a:cs typeface="CMU Serif" panose="02000603000000000000" pitchFamily="2" charset="0"/>
+              </a:rPr>
+              <a:t>x</a:t>
+            </a:r>
+            <a:r>
+              <a:rPr lang="de-DE" sz="200" i="1" dirty="0">
+                <a:latin typeface="CMU Serif" panose="02000603000000000000" pitchFamily="2" charset="0"/>
+                <a:ea typeface="CMU Serif" panose="02000603000000000000" pitchFamily="2" charset="0"/>
+                <a:cs typeface="CMU Serif" panose="02000603000000000000" pitchFamily="2" charset="0"/>
+              </a:rPr>
+              <a:t> </a:t>
+            </a:r>
+            <a:r>
+              <a:rPr lang="de-DE" sz="800" baseline="-25000" dirty="0">
+                <a:latin typeface="CMU Serif" panose="02000603000000000000" pitchFamily="2" charset="0"/>
+                <a:ea typeface="CMU Serif" panose="02000603000000000000" pitchFamily="2" charset="0"/>
+                <a:cs typeface="CMU Serif" panose="02000603000000000000" pitchFamily="2" charset="0"/>
+              </a:rPr>
+              <a:t>s</a:t>
+            </a:r>
+          </a:p>
+        </p:txBody>
+      </p:sp>
+      <p:sp>
+        <p:nvSpPr>
+          <p:cNvPr id="80" name="Textfeld 79">
+            <a:extLst>
+              <a:ext uri="{FF2B5EF4-FFF2-40B4-BE49-F238E27FC236}">
+                <a16:creationId xmlns:a16="http://schemas.microsoft.com/office/drawing/2014/main" id="{CFA6E799-30CE-4A70-8A3B-229115201928}"/>
+              </a:ext>
+            </a:extLst>
+          </p:cNvPr>
+          <p:cNvSpPr txBox="1"/>
+          <p:nvPr/>
+        </p:nvSpPr>
+        <p:spPr>
+          <a:xfrm>
+            <a:off x="1158736" y="1748453"/>
+            <a:ext cx="435125" cy="215444"/>
+          </a:xfrm>
+          <a:prstGeom prst="rect">
+            <a:avLst/>
+          </a:prstGeom>
+          <a:noFill/>
+        </p:spPr>
+        <p:txBody>
+          <a:bodyPr wrap="square" rtlCol="0" anchor="ctr">
+            <a:spAutoFit/>
+          </a:bodyPr>
+          <a:lstStyle/>
+          <a:p>
+            <a:pPr algn="ctr"/>
+            <a:r>
+              <a:rPr lang="de-DE" sz="800" dirty="0">
+                <a:latin typeface="CMU Serif" panose="02000603000000000000" pitchFamily="2" charset="0"/>
+                <a:ea typeface="CMU Serif" panose="02000603000000000000" pitchFamily="2" charset="0"/>
+                <a:cs typeface="CMU Serif" panose="02000603000000000000" pitchFamily="2" charset="0"/>
+              </a:rPr>
+              <a:t>Δ</a:t>
+            </a:r>
+            <a:r>
+              <a:rPr lang="de-DE" sz="800" i="1" dirty="0">
+                <a:latin typeface="CMU Serif" panose="02000603000000000000" pitchFamily="2" charset="0"/>
+                <a:ea typeface="CMU Serif" panose="02000603000000000000" pitchFamily="2" charset="0"/>
+                <a:cs typeface="CMU Serif" panose="02000603000000000000" pitchFamily="2" charset="0"/>
+              </a:rPr>
+              <a:t>x</a:t>
+            </a:r>
+            <a:r>
+              <a:rPr lang="de-DE" sz="200" i="1" dirty="0">
+                <a:latin typeface="CMU Serif" panose="02000603000000000000" pitchFamily="2" charset="0"/>
+                <a:ea typeface="CMU Serif" panose="02000603000000000000" pitchFamily="2" charset="0"/>
+                <a:cs typeface="CMU Serif" panose="02000603000000000000" pitchFamily="2" charset="0"/>
+              </a:rPr>
+              <a:t> </a:t>
+            </a:r>
+            <a:r>
+              <a:rPr lang="de-DE" sz="800" baseline="-25000" dirty="0">
+                <a:latin typeface="CMU Serif" panose="02000603000000000000" pitchFamily="2" charset="0"/>
+                <a:ea typeface="CMU Serif" panose="02000603000000000000" pitchFamily="2" charset="0"/>
+                <a:cs typeface="CMU Serif" panose="02000603000000000000" pitchFamily="2" charset="0"/>
+              </a:rPr>
+              <a:t>St</a:t>
+            </a:r>
+          </a:p>
+        </p:txBody>
+      </p:sp>
+      <p:sp>
+        <p:nvSpPr>
+          <p:cNvPr id="81" name="Textfeld 80">
+            <a:extLst>
+              <a:ext uri="{FF2B5EF4-FFF2-40B4-BE49-F238E27FC236}">
+                <a16:creationId xmlns:a16="http://schemas.microsoft.com/office/drawing/2014/main" id="{B02FB151-EC95-41EA-D1D2-73EB54AC2957}"/>
+              </a:ext>
+            </a:extLst>
+          </p:cNvPr>
+          <p:cNvSpPr txBox="1"/>
+          <p:nvPr/>
+        </p:nvSpPr>
+        <p:spPr>
+          <a:xfrm>
+            <a:off x="823156" y="1929555"/>
+            <a:ext cx="435125" cy="215444"/>
+          </a:xfrm>
+          <a:prstGeom prst="rect">
+            <a:avLst/>
+          </a:prstGeom>
+          <a:noFill/>
+        </p:spPr>
+        <p:txBody>
+          <a:bodyPr wrap="square" rtlCol="0" anchor="ctr">
+            <a:spAutoFit/>
+          </a:bodyPr>
+          <a:lstStyle/>
+          <a:p>
+            <a:pPr algn="ctr"/>
+            <a:r>
+              <a:rPr lang="de-DE" sz="800" dirty="0">
+                <a:latin typeface="CMU Serif" panose="02000603000000000000" pitchFamily="2" charset="0"/>
+                <a:ea typeface="CMU Serif" panose="02000603000000000000" pitchFamily="2" charset="0"/>
+                <a:cs typeface="CMU Serif" panose="02000603000000000000" pitchFamily="2" charset="0"/>
+              </a:rPr>
+              <a:t>Δ</a:t>
+            </a:r>
+            <a:r>
+              <a:rPr lang="de-DE" sz="800" i="1" dirty="0">
+                <a:latin typeface="CMU Serif" panose="02000603000000000000" pitchFamily="2" charset="0"/>
+                <a:ea typeface="CMU Serif" panose="02000603000000000000" pitchFamily="2" charset="0"/>
+                <a:cs typeface="CMU Serif" panose="02000603000000000000" pitchFamily="2" charset="0"/>
+              </a:rPr>
+              <a:t>x</a:t>
+            </a:r>
+            <a:r>
+              <a:rPr lang="de-DE" sz="200" i="1" dirty="0">
+                <a:latin typeface="CMU Serif" panose="02000603000000000000" pitchFamily="2" charset="0"/>
+                <a:ea typeface="CMU Serif" panose="02000603000000000000" pitchFamily="2" charset="0"/>
+                <a:cs typeface="CMU Serif" panose="02000603000000000000" pitchFamily="2" charset="0"/>
+              </a:rPr>
+              <a:t> </a:t>
+            </a:r>
+            <a:r>
+              <a:rPr lang="de-DE" sz="800" baseline="-25000" dirty="0">
+                <a:latin typeface="CMU Serif" panose="02000603000000000000" pitchFamily="2" charset="0"/>
+                <a:ea typeface="CMU Serif" panose="02000603000000000000" pitchFamily="2" charset="0"/>
+                <a:cs typeface="CMU Serif" panose="02000603000000000000" pitchFamily="2" charset="0"/>
+              </a:rPr>
+              <a:t>N</a:t>
+            </a:r>
+          </a:p>
+        </p:txBody>
+      </p:sp>
+      <p:cxnSp>
+        <p:nvCxnSpPr>
+          <p:cNvPr id="93" name="Gerader Verbinder 92">
+            <a:extLst>
+              <a:ext uri="{FF2B5EF4-FFF2-40B4-BE49-F238E27FC236}">
+                <a16:creationId xmlns:a16="http://schemas.microsoft.com/office/drawing/2014/main" id="{0D6AAA25-AE51-00BF-8930-442F5FCD1285}"/>
+              </a:ext>
+            </a:extLst>
+          </p:cNvPr>
+          <p:cNvCxnSpPr>
+            <a:cxnSpLocks/>
+          </p:cNvCxnSpPr>
+          <p:nvPr/>
+        </p:nvCxnSpPr>
+        <p:spPr>
+          <a:xfrm>
+            <a:off x="2972052" y="1664798"/>
+            <a:ext cx="0" cy="867140"/>
+          </a:xfrm>
+          <a:prstGeom prst="line">
+            <a:avLst/>
+          </a:prstGeom>
+          <a:ln w="6350" cap="rnd">
+            <a:solidFill>
+              <a:schemeClr val="tx1"/>
+            </a:solidFill>
+            <a:round/>
+          </a:ln>
+        </p:spPr>
+        <p:style>
+          <a:lnRef idx="2">
+            <a:schemeClr val="accent1"/>
+          </a:lnRef>
+          <a:fillRef idx="0">
+            <a:schemeClr val="accent1"/>
+          </a:fillRef>
+          <a:effectRef idx="1">
+            <a:schemeClr val="accent1"/>
+          </a:effectRef>
+          <a:fontRef idx="minor">
+            <a:schemeClr val="tx1"/>
+          </a:fontRef>
+        </p:style>
+      </p:cxnSp>
+      <p:sp>
+        <p:nvSpPr>
+          <p:cNvPr id="95" name="Textfeld 94">
+            <a:extLst>
+              <a:ext uri="{FF2B5EF4-FFF2-40B4-BE49-F238E27FC236}">
+                <a16:creationId xmlns:a16="http://schemas.microsoft.com/office/drawing/2014/main" id="{E538A534-9B42-0F94-C67F-A5ABBCF88EEE}"/>
+              </a:ext>
+            </a:extLst>
+          </p:cNvPr>
+          <p:cNvSpPr txBox="1"/>
+          <p:nvPr/>
+        </p:nvSpPr>
+        <p:spPr>
+          <a:xfrm>
+            <a:off x="544505" y="1921662"/>
+            <a:ext cx="435125" cy="215444"/>
+          </a:xfrm>
+          <a:prstGeom prst="rect">
+            <a:avLst/>
+          </a:prstGeom>
+          <a:noFill/>
+        </p:spPr>
+        <p:txBody>
+          <a:bodyPr wrap="square" rtlCol="0" anchor="ctr">
+            <a:spAutoFit/>
+          </a:bodyPr>
+          <a:lstStyle/>
+          <a:p>
+            <a:pPr algn="ctr"/>
+            <a:r>
+              <a:rPr lang="de-DE" sz="800" i="1" dirty="0">
+                <a:latin typeface="CMU Serif" panose="02000603000000000000" pitchFamily="2" charset="0"/>
+                <a:ea typeface="CMU Serif" panose="02000603000000000000" pitchFamily="2" charset="0"/>
+                <a:cs typeface="CMU Serif" panose="02000603000000000000" pitchFamily="2" charset="0"/>
+              </a:rPr>
+              <a:t>x</a:t>
+            </a:r>
+            <a:r>
+              <a:rPr lang="de-DE" sz="200" i="1" dirty="0">
+                <a:latin typeface="CMU Serif" panose="02000603000000000000" pitchFamily="2" charset="0"/>
+                <a:ea typeface="CMU Serif" panose="02000603000000000000" pitchFamily="2" charset="0"/>
+                <a:cs typeface="CMU Serif" panose="02000603000000000000" pitchFamily="2" charset="0"/>
+              </a:rPr>
+              <a:t> </a:t>
+            </a:r>
+            <a:r>
+              <a:rPr lang="de-DE" sz="800" baseline="-25000" dirty="0">
+                <a:latin typeface="CMU Serif" panose="02000603000000000000" pitchFamily="2" charset="0"/>
+                <a:ea typeface="CMU Serif" panose="02000603000000000000" pitchFamily="2" charset="0"/>
+                <a:cs typeface="CMU Serif" panose="02000603000000000000" pitchFamily="2" charset="0"/>
+              </a:rPr>
+              <a:t>NF</a:t>
+            </a:r>
+          </a:p>
+        </p:txBody>
+      </p:sp>
+      <p:sp>
+        <p:nvSpPr>
+          <p:cNvPr id="96" name="Textfeld 95">
+            <a:extLst>
+              <a:ext uri="{FF2B5EF4-FFF2-40B4-BE49-F238E27FC236}">
+                <a16:creationId xmlns:a16="http://schemas.microsoft.com/office/drawing/2014/main" id="{1C68E2FC-2FDF-6B58-1FF8-779CCB0DB2C2}"/>
+              </a:ext>
+            </a:extLst>
+          </p:cNvPr>
+          <p:cNvSpPr txBox="1"/>
+          <p:nvPr/>
+        </p:nvSpPr>
+        <p:spPr>
+          <a:xfrm>
+            <a:off x="870634" y="2111818"/>
+            <a:ext cx="435125" cy="215444"/>
+          </a:xfrm>
+          <a:prstGeom prst="rect">
+            <a:avLst/>
+          </a:prstGeom>
+          <a:noFill/>
+        </p:spPr>
+        <p:txBody>
+          <a:bodyPr wrap="square" rtlCol="0" anchor="ctr">
+            <a:spAutoFit/>
+          </a:bodyPr>
+          <a:lstStyle/>
+          <a:p>
+            <a:pPr algn="ctr"/>
+            <a:r>
+              <a:rPr lang="de-DE" sz="800" i="1" dirty="0">
+                <a:latin typeface="CMU Serif" panose="02000603000000000000" pitchFamily="2" charset="0"/>
+                <a:ea typeface="CMU Serif" panose="02000603000000000000" pitchFamily="2" charset="0"/>
+                <a:cs typeface="CMU Serif" panose="02000603000000000000" pitchFamily="2" charset="0"/>
+              </a:rPr>
+              <a:t>x</a:t>
+            </a:r>
+            <a:r>
+              <a:rPr lang="de-DE" sz="200" i="1" dirty="0">
+                <a:latin typeface="CMU Serif" panose="02000603000000000000" pitchFamily="2" charset="0"/>
+                <a:ea typeface="CMU Serif" panose="02000603000000000000" pitchFamily="2" charset="0"/>
+                <a:cs typeface="CMU Serif" panose="02000603000000000000" pitchFamily="2" charset="0"/>
+              </a:rPr>
+              <a:t> </a:t>
+            </a:r>
+            <a:r>
+              <a:rPr lang="de-DE" sz="800" baseline="-25000" dirty="0">
+                <a:latin typeface="CMU Serif" panose="02000603000000000000" pitchFamily="2" charset="0"/>
+                <a:ea typeface="CMU Serif" panose="02000603000000000000" pitchFamily="2" charset="0"/>
+                <a:cs typeface="CMU Serif" panose="02000603000000000000" pitchFamily="2" charset="0"/>
+              </a:rPr>
+              <a:t>N</a:t>
+            </a:r>
+          </a:p>
+        </p:txBody>
+      </p:sp>
+      <p:sp>
+        <p:nvSpPr>
+          <p:cNvPr id="97" name="Textfeld 96">
+            <a:extLst>
+              <a:ext uri="{FF2B5EF4-FFF2-40B4-BE49-F238E27FC236}">
+                <a16:creationId xmlns:a16="http://schemas.microsoft.com/office/drawing/2014/main" id="{FBA5A073-E8E2-669B-6FE7-68BA3D66033B}"/>
+              </a:ext>
+            </a:extLst>
+          </p:cNvPr>
+          <p:cNvSpPr txBox="1"/>
+          <p:nvPr/>
+        </p:nvSpPr>
+        <p:spPr>
+          <a:xfrm>
+            <a:off x="786623" y="2287283"/>
+            <a:ext cx="320152" cy="215444"/>
+          </a:xfrm>
+          <a:prstGeom prst="rect">
+            <a:avLst/>
+          </a:prstGeom>
+          <a:noFill/>
+        </p:spPr>
+        <p:txBody>
+          <a:bodyPr wrap="square" rtlCol="0" anchor="ctr">
+            <a:spAutoFit/>
+          </a:bodyPr>
+          <a:lstStyle/>
+          <a:p>
+            <a:pPr algn="ctr"/>
+            <a:r>
+              <a:rPr lang="de-DE" sz="800" i="1" dirty="0">
+                <a:latin typeface="CMU Serif" panose="02000603000000000000" pitchFamily="2" charset="0"/>
+                <a:ea typeface="CMU Serif" panose="02000603000000000000" pitchFamily="2" charset="0"/>
+                <a:cs typeface="CMU Serif" panose="02000603000000000000" pitchFamily="2" charset="0"/>
+              </a:rPr>
+              <a:t>x</a:t>
+            </a:r>
+            <a:r>
+              <a:rPr lang="de-DE" sz="200" i="1" dirty="0">
+                <a:latin typeface="CMU Serif" panose="02000603000000000000" pitchFamily="2" charset="0"/>
+                <a:ea typeface="CMU Serif" panose="02000603000000000000" pitchFamily="2" charset="0"/>
+                <a:cs typeface="CMU Serif" panose="02000603000000000000" pitchFamily="2" charset="0"/>
+              </a:rPr>
+              <a:t> </a:t>
+            </a:r>
+            <a:r>
+              <a:rPr lang="de-DE" sz="800" baseline="-25000" dirty="0">
+                <a:latin typeface="CMU Serif" panose="02000603000000000000" pitchFamily="2" charset="0"/>
+                <a:ea typeface="CMU Serif" panose="02000603000000000000" pitchFamily="2" charset="0"/>
+                <a:cs typeface="CMU Serif" panose="02000603000000000000" pitchFamily="2" charset="0"/>
+              </a:rPr>
+              <a:t>S</a:t>
+            </a:r>
+          </a:p>
+        </p:txBody>
+      </p:sp>
+      <p:sp>
+        <p:nvSpPr>
+          <p:cNvPr id="103" name="Textfeld 102">
+            <a:extLst>
+              <a:ext uri="{FF2B5EF4-FFF2-40B4-BE49-F238E27FC236}">
+                <a16:creationId xmlns:a16="http://schemas.microsoft.com/office/drawing/2014/main" id="{23FB7ABF-CB56-2B6B-E294-F9CD8D09282E}"/>
+              </a:ext>
+            </a:extLst>
+          </p:cNvPr>
+          <p:cNvSpPr txBox="1"/>
+          <p:nvPr/>
+        </p:nvSpPr>
+        <p:spPr>
+          <a:xfrm>
+            <a:off x="1936498" y="2286081"/>
+            <a:ext cx="320152" cy="215444"/>
+          </a:xfrm>
+          <a:prstGeom prst="rect">
+            <a:avLst/>
+          </a:prstGeom>
+          <a:noFill/>
+        </p:spPr>
+        <p:txBody>
+          <a:bodyPr wrap="square" rtlCol="0" anchor="ctr">
+            <a:spAutoFit/>
+          </a:bodyPr>
+          <a:lstStyle/>
+          <a:p>
+            <a:pPr algn="ctr"/>
+            <a:r>
+              <a:rPr lang="de-DE" sz="800" i="1" dirty="0">
+                <a:latin typeface="CMU Serif" panose="02000603000000000000" pitchFamily="2" charset="0"/>
+                <a:ea typeface="CMU Serif" panose="02000603000000000000" pitchFamily="2" charset="0"/>
+                <a:cs typeface="CMU Serif" panose="02000603000000000000" pitchFamily="2" charset="0"/>
+              </a:rPr>
+              <a:t>r</a:t>
+            </a:r>
+            <a:r>
+              <a:rPr lang="de-DE" sz="200" i="1" dirty="0">
+                <a:latin typeface="CMU Serif" panose="02000603000000000000" pitchFamily="2" charset="0"/>
+                <a:ea typeface="CMU Serif" panose="02000603000000000000" pitchFamily="2" charset="0"/>
+                <a:cs typeface="CMU Serif" panose="02000603000000000000" pitchFamily="2" charset="0"/>
+              </a:rPr>
+              <a:t> </a:t>
+            </a:r>
+            <a:r>
+              <a:rPr lang="de-DE" sz="800" baseline="-25000" dirty="0">
+                <a:latin typeface="CMU Serif" panose="02000603000000000000" pitchFamily="2" charset="0"/>
+                <a:ea typeface="CMU Serif" panose="02000603000000000000" pitchFamily="2" charset="0"/>
+                <a:cs typeface="CMU Serif" panose="02000603000000000000" pitchFamily="2" charset="0"/>
+              </a:rPr>
+              <a:t>H</a:t>
+            </a:r>
+          </a:p>
+        </p:txBody>
+      </p:sp>
+      <p:cxnSp>
+        <p:nvCxnSpPr>
+          <p:cNvPr id="104" name="Gerade Verbindung mit Pfeil 103">
+            <a:extLst>
+              <a:ext uri="{FF2B5EF4-FFF2-40B4-BE49-F238E27FC236}">
+                <a16:creationId xmlns:a16="http://schemas.microsoft.com/office/drawing/2014/main" id="{1F565099-27E5-7192-F8F7-CC1CC39CAD4B}"/>
+              </a:ext>
+            </a:extLst>
+          </p:cNvPr>
+          <p:cNvCxnSpPr>
+            <a:cxnSpLocks/>
+          </p:cNvCxnSpPr>
+          <p:nvPr/>
+        </p:nvCxnSpPr>
+        <p:spPr>
+          <a:xfrm>
+            <a:off x="876463" y="1634429"/>
+            <a:ext cx="241093" cy="0"/>
+          </a:xfrm>
+          <a:prstGeom prst="straightConnector1">
+            <a:avLst/>
+          </a:prstGeom>
+          <a:ln w="15875" cap="rnd">
+            <a:solidFill>
+              <a:schemeClr val="accent2">
+                <a:lumMod val="75000"/>
+              </a:schemeClr>
+            </a:solidFill>
+            <a:round/>
+            <a:headEnd type="none" w="sm" len="sm"/>
+            <a:tailEnd type="triangle" w="med" len="med"/>
+          </a:ln>
+        </p:spPr>
+        <p:style>
+          <a:lnRef idx="2">
+            <a:schemeClr val="accent1"/>
+          </a:lnRef>
+          <a:fillRef idx="0">
+            <a:schemeClr val="accent1"/>
+          </a:fillRef>
+          <a:effectRef idx="1">
+            <a:schemeClr val="accent1"/>
+          </a:effectRef>
+          <a:fontRef idx="minor">
+            <a:schemeClr val="tx1"/>
+          </a:fontRef>
+        </p:style>
+      </p:cxnSp>
+      <p:sp>
+        <p:nvSpPr>
+          <p:cNvPr id="22" name="Ellipse 21">
+            <a:extLst>
+              <a:ext uri="{FF2B5EF4-FFF2-40B4-BE49-F238E27FC236}">
+                <a16:creationId xmlns:a16="http://schemas.microsoft.com/office/drawing/2014/main" id="{C1071813-055E-C3A7-3684-9A4CECCC441E}"/>
+              </a:ext>
+            </a:extLst>
+          </p:cNvPr>
+          <p:cNvSpPr/>
+          <p:nvPr/>
+        </p:nvSpPr>
+        <p:spPr>
+          <a:xfrm>
+            <a:off x="840898" y="1611930"/>
+            <a:ext cx="45719" cy="45719"/>
+          </a:xfrm>
+          <a:prstGeom prst="ellipse">
+            <a:avLst/>
+          </a:prstGeom>
+          <a:solidFill>
+            <a:schemeClr val="tx1"/>
+          </a:solidFill>
+          <a:ln>
+            <a:noFill/>
+          </a:ln>
+        </p:spPr>
+        <p:style>
+          <a:lnRef idx="2">
+            <a:schemeClr val="accent1">
+              <a:shade val="15000"/>
+            </a:schemeClr>
+          </a:lnRef>
+          <a:fillRef idx="1">
+            <a:schemeClr val="accent1"/>
+          </a:fillRef>
+          <a:effectRef idx="0">
+            <a:schemeClr val="accent1"/>
+          </a:effectRef>
+          <a:fontRef idx="minor">
+            <a:schemeClr val="lt1"/>
+          </a:fontRef>
+        </p:style>
+        <p:txBody>
+          <a:bodyPr rtlCol="0" anchor="ctr"/>
+          <a:lstStyle/>
+          <a:p>
+            <a:pPr algn="ctr"/>
+            <a:endParaRPr lang="de-DE" sz="800" dirty="0"/>
+          </a:p>
+        </p:txBody>
+      </p:sp>
+      <p:sp>
+        <p:nvSpPr>
+          <p:cNvPr id="107" name="Textfeld 106">
+            <a:extLst>
+              <a:ext uri="{FF2B5EF4-FFF2-40B4-BE49-F238E27FC236}">
+                <a16:creationId xmlns:a16="http://schemas.microsoft.com/office/drawing/2014/main" id="{B7341C8D-A09B-03B9-29A0-EAC2A730BC75}"/>
+              </a:ext>
+            </a:extLst>
+          </p:cNvPr>
+          <p:cNvSpPr txBox="1"/>
+          <p:nvPr/>
+        </p:nvSpPr>
+        <p:spPr>
+          <a:xfrm>
+            <a:off x="963486" y="1445597"/>
+            <a:ext cx="450936" cy="215444"/>
+          </a:xfrm>
+          <a:prstGeom prst="rect">
+            <a:avLst/>
+          </a:prstGeom>
+          <a:noFill/>
+        </p:spPr>
+        <p:txBody>
+          <a:bodyPr wrap="square" rtlCol="0" anchor="ctr">
+            <a:spAutoFit/>
+          </a:bodyPr>
+          <a:lstStyle/>
+          <a:p>
+            <a:pPr algn="ctr"/>
+            <a:r>
+              <a:rPr lang="de-DE" sz="800" i="1" dirty="0">
+                <a:solidFill>
+                  <a:schemeClr val="accent2">
+                    <a:lumMod val="75000"/>
+                  </a:schemeClr>
+                </a:solidFill>
+                <a:latin typeface="CMU Serif" panose="02000603000000000000" pitchFamily="2" charset="0"/>
+                <a:ea typeface="CMU Serif" panose="02000603000000000000" pitchFamily="2" charset="0"/>
+                <a:cs typeface="CMU Serif" panose="02000603000000000000" pitchFamily="2" charset="0"/>
+              </a:rPr>
+              <a:t>W</a:t>
+            </a:r>
+            <a:endParaRPr lang="de-DE" sz="800" baseline="-25000" dirty="0">
+              <a:solidFill>
+                <a:schemeClr val="accent2">
+                  <a:lumMod val="75000"/>
+                </a:schemeClr>
+              </a:solidFill>
+              <a:latin typeface="CMU Serif" panose="02000603000000000000" pitchFamily="2" charset="0"/>
+              <a:ea typeface="CMU Serif" panose="02000603000000000000" pitchFamily="2" charset="0"/>
+              <a:cs typeface="CMU Serif" panose="02000603000000000000" pitchFamily="2" charset="0"/>
+            </a:endParaRPr>
+          </a:p>
+        </p:txBody>
+      </p:sp>
+      <p:cxnSp>
+        <p:nvCxnSpPr>
+          <p:cNvPr id="108" name="Gerade Verbindung mit Pfeil 107">
+            <a:extLst>
+              <a:ext uri="{FF2B5EF4-FFF2-40B4-BE49-F238E27FC236}">
+                <a16:creationId xmlns:a16="http://schemas.microsoft.com/office/drawing/2014/main" id="{5FC4A5B0-F661-2F48-C4EB-9D3C34CBD917}"/>
+              </a:ext>
+            </a:extLst>
+          </p:cNvPr>
+          <p:cNvCxnSpPr>
+            <a:cxnSpLocks/>
+          </p:cNvCxnSpPr>
+          <p:nvPr/>
+        </p:nvCxnSpPr>
+        <p:spPr>
+          <a:xfrm flipH="1" flipV="1">
+            <a:off x="1692474" y="1667162"/>
+            <a:ext cx="358214" cy="65274"/>
+          </a:xfrm>
+          <a:prstGeom prst="straightConnector1">
+            <a:avLst/>
+          </a:prstGeom>
+          <a:ln w="15875" cap="rnd">
+            <a:solidFill>
+              <a:schemeClr val="accent5">
+                <a:lumMod val="75000"/>
+              </a:schemeClr>
+            </a:solidFill>
+            <a:round/>
+            <a:headEnd type="none" w="sm" len="sm"/>
+            <a:tailEnd type="triangle" w="med" len="med"/>
+          </a:ln>
+        </p:spPr>
+        <p:style>
+          <a:lnRef idx="2">
+            <a:schemeClr val="accent1"/>
+          </a:lnRef>
+          <a:fillRef idx="0">
+            <a:schemeClr val="accent1"/>
+          </a:fillRef>
+          <a:effectRef idx="1">
+            <a:schemeClr val="accent1"/>
+          </a:effectRef>
+          <a:fontRef idx="minor">
+            <a:schemeClr val="tx1"/>
+          </a:fontRef>
+        </p:style>
+      </p:cxnSp>
+      <p:sp>
+        <p:nvSpPr>
+          <p:cNvPr id="110" name="Textfeld 109">
+            <a:extLst>
+              <a:ext uri="{FF2B5EF4-FFF2-40B4-BE49-F238E27FC236}">
+                <a16:creationId xmlns:a16="http://schemas.microsoft.com/office/drawing/2014/main" id="{8DB82D20-5AD9-D66A-0A77-C81563F15471}"/>
+              </a:ext>
+            </a:extLst>
+          </p:cNvPr>
+          <p:cNvSpPr txBox="1"/>
+          <p:nvPr/>
+        </p:nvSpPr>
+        <p:spPr>
+          <a:xfrm>
+            <a:off x="1684201" y="1520381"/>
+            <a:ext cx="450936" cy="215444"/>
+          </a:xfrm>
+          <a:prstGeom prst="rect">
+            <a:avLst/>
+          </a:prstGeom>
+          <a:noFill/>
+        </p:spPr>
+        <p:txBody>
+          <a:bodyPr wrap="square" rtlCol="0" anchor="ctr">
+            <a:spAutoFit/>
+          </a:bodyPr>
+          <a:lstStyle/>
+          <a:p>
+            <a:pPr algn="ctr"/>
+            <a:r>
+              <a:rPr lang="de-DE" sz="800" i="1" dirty="0">
+                <a:solidFill>
+                  <a:schemeClr val="accent5">
+                    <a:lumMod val="75000"/>
+                  </a:schemeClr>
+                </a:solidFill>
+                <a:latin typeface="CMU Serif" panose="02000603000000000000" pitchFamily="2" charset="0"/>
+                <a:ea typeface="CMU Serif" panose="02000603000000000000" pitchFamily="2" charset="0"/>
+                <a:cs typeface="CMU Serif" panose="02000603000000000000" pitchFamily="2" charset="0"/>
+              </a:rPr>
+              <a:t>F</a:t>
+            </a:r>
+            <a:endParaRPr lang="de-DE" sz="800" baseline="-25000" dirty="0">
+              <a:solidFill>
+                <a:schemeClr val="accent5">
+                  <a:lumMod val="75000"/>
+                </a:schemeClr>
+              </a:solidFill>
+              <a:latin typeface="CMU Serif" panose="02000603000000000000" pitchFamily="2" charset="0"/>
+              <a:ea typeface="CMU Serif" panose="02000603000000000000" pitchFamily="2" charset="0"/>
+              <a:cs typeface="CMU Serif" panose="02000603000000000000" pitchFamily="2" charset="0"/>
+            </a:endParaRPr>
+          </a:p>
+        </p:txBody>
+      </p:sp>
+      <p:sp>
+        <p:nvSpPr>
+          <p:cNvPr id="114" name="Ellipse 113">
+            <a:extLst>
+              <a:ext uri="{FF2B5EF4-FFF2-40B4-BE49-F238E27FC236}">
+                <a16:creationId xmlns:a16="http://schemas.microsoft.com/office/drawing/2014/main" id="{A01E66ED-1D64-50B9-4981-E46E619EF643}"/>
+              </a:ext>
+            </a:extLst>
+          </p:cNvPr>
+          <p:cNvSpPr/>
+          <p:nvPr/>
+        </p:nvSpPr>
+        <p:spPr>
+          <a:xfrm>
+            <a:off x="1503746" y="1734429"/>
+            <a:ext cx="36000" cy="36000"/>
+          </a:xfrm>
+          <a:prstGeom prst="ellipse">
+            <a:avLst/>
+          </a:prstGeom>
+          <a:solidFill>
+            <a:schemeClr val="bg1"/>
+          </a:solidFill>
+          <a:ln w="6350">
+            <a:solidFill>
+              <a:schemeClr val="tx1"/>
+            </a:solidFill>
+          </a:ln>
+        </p:spPr>
+        <p:style>
+          <a:lnRef idx="2">
+            <a:schemeClr val="accent1">
+              <a:shade val="15000"/>
+            </a:schemeClr>
+          </a:lnRef>
+          <a:fillRef idx="1">
+            <a:schemeClr val="accent1"/>
+          </a:fillRef>
+          <a:effectRef idx="0">
+            <a:schemeClr val="accent1"/>
+          </a:effectRef>
+          <a:fontRef idx="minor">
+            <a:schemeClr val="lt1"/>
+          </a:fontRef>
+        </p:style>
+        <p:txBody>
+          <a:bodyPr rtlCol="0" anchor="ctr"/>
+          <a:lstStyle/>
+          <a:p>
+            <a:pPr algn="ctr"/>
+            <a:endParaRPr lang="de-DE" sz="800" dirty="0"/>
+          </a:p>
+        </p:txBody>
+      </p:sp>
+      <p:cxnSp>
+        <p:nvCxnSpPr>
+          <p:cNvPr id="117" name="Gerader Verbinder 116">
+            <a:extLst>
+              <a:ext uri="{FF2B5EF4-FFF2-40B4-BE49-F238E27FC236}">
+                <a16:creationId xmlns:a16="http://schemas.microsoft.com/office/drawing/2014/main" id="{2199D088-B4C5-3AC6-731A-F2E992FACC13}"/>
+              </a:ext>
+            </a:extLst>
+          </p:cNvPr>
+          <p:cNvCxnSpPr>
+            <a:cxnSpLocks/>
+          </p:cNvCxnSpPr>
+          <p:nvPr/>
+        </p:nvCxnSpPr>
+        <p:spPr>
+          <a:xfrm>
+            <a:off x="1463204" y="1460320"/>
+            <a:ext cx="52441" cy="243028"/>
+          </a:xfrm>
+          <a:prstGeom prst="line">
+            <a:avLst/>
+          </a:prstGeom>
+          <a:ln w="6350" cap="rnd">
+            <a:solidFill>
+              <a:schemeClr val="tx1"/>
+            </a:solidFill>
+            <a:round/>
+          </a:ln>
+        </p:spPr>
+        <p:style>
+          <a:lnRef idx="2">
+            <a:schemeClr val="accent1"/>
+          </a:lnRef>
+          <a:fillRef idx="0">
+            <a:schemeClr val="accent1"/>
+          </a:fillRef>
+          <a:effectRef idx="1">
+            <a:schemeClr val="accent1"/>
+          </a:effectRef>
+          <a:fontRef idx="minor">
+            <a:schemeClr val="tx1"/>
+          </a:fontRef>
+        </p:style>
+      </p:cxnSp>
+      <p:sp>
+        <p:nvSpPr>
+          <p:cNvPr id="120" name="Textfeld 119">
+            <a:extLst>
+              <a:ext uri="{FF2B5EF4-FFF2-40B4-BE49-F238E27FC236}">
+                <a16:creationId xmlns:a16="http://schemas.microsoft.com/office/drawing/2014/main" id="{4C17432C-3174-67BB-F5B8-6AB4C8ABE838}"/>
+              </a:ext>
+            </a:extLst>
+          </p:cNvPr>
+          <p:cNvSpPr txBox="1"/>
+          <p:nvPr/>
+        </p:nvSpPr>
+        <p:spPr>
+          <a:xfrm>
+            <a:off x="1174574" y="1300233"/>
+            <a:ext cx="857220" cy="200055"/>
+          </a:xfrm>
+          <a:prstGeom prst="rect">
+            <a:avLst/>
+          </a:prstGeom>
+          <a:noFill/>
+        </p:spPr>
+        <p:txBody>
+          <a:bodyPr wrap="square" rtlCol="0" anchor="ctr">
+            <a:spAutoFit/>
+          </a:bodyPr>
+          <a:lstStyle/>
+          <a:p>
+            <a:pPr algn="ctr"/>
+            <a:r>
+              <a:rPr lang="de-DE" sz="700" dirty="0">
+                <a:latin typeface="CMU Serif" panose="02000603000000000000" pitchFamily="2" charset="0"/>
+                <a:ea typeface="CMU Serif" panose="02000603000000000000" pitchFamily="2" charset="0"/>
+                <a:cs typeface="CMU Serif" panose="02000603000000000000" pitchFamily="2" charset="0"/>
+              </a:rPr>
+              <a:t>Neutralpunkt</a:t>
+            </a:r>
+            <a:endParaRPr lang="de-DE" sz="700" baseline="-25000" dirty="0">
+              <a:latin typeface="CMU Serif" panose="02000603000000000000" pitchFamily="2" charset="0"/>
+              <a:ea typeface="CMU Serif" panose="02000603000000000000" pitchFamily="2" charset="0"/>
+              <a:cs typeface="CMU Serif" panose="02000603000000000000" pitchFamily="2" charset="0"/>
+            </a:endParaRPr>
+          </a:p>
+        </p:txBody>
+      </p:sp>
+      <p:cxnSp>
+        <p:nvCxnSpPr>
+          <p:cNvPr id="123" name="Gerader Verbinder 122">
+            <a:extLst>
+              <a:ext uri="{FF2B5EF4-FFF2-40B4-BE49-F238E27FC236}">
+                <a16:creationId xmlns:a16="http://schemas.microsoft.com/office/drawing/2014/main" id="{B060041A-DC74-A80F-436C-314675744BFB}"/>
+              </a:ext>
+            </a:extLst>
+          </p:cNvPr>
+          <p:cNvCxnSpPr>
+            <a:cxnSpLocks/>
+          </p:cNvCxnSpPr>
+          <p:nvPr/>
+        </p:nvCxnSpPr>
+        <p:spPr>
+          <a:xfrm>
+            <a:off x="521291" y="1295415"/>
+            <a:ext cx="80010" cy="261257"/>
+          </a:xfrm>
+          <a:prstGeom prst="line">
+            <a:avLst/>
+          </a:prstGeom>
+          <a:ln w="6350" cap="rnd">
+            <a:solidFill>
+              <a:schemeClr val="tx1"/>
+            </a:solidFill>
+            <a:round/>
+          </a:ln>
+        </p:spPr>
+        <p:style>
+          <a:lnRef idx="2">
+            <a:schemeClr val="accent1"/>
+          </a:lnRef>
+          <a:fillRef idx="0">
+            <a:schemeClr val="accent1"/>
+          </a:fillRef>
+          <a:effectRef idx="1">
+            <a:schemeClr val="accent1"/>
+          </a:effectRef>
+          <a:fontRef idx="minor">
+            <a:schemeClr val="tx1"/>
+          </a:fontRef>
+        </p:style>
+      </p:cxnSp>
+      <p:sp>
+        <p:nvSpPr>
+          <p:cNvPr id="124" name="Textfeld 123">
+            <a:extLst>
+              <a:ext uri="{FF2B5EF4-FFF2-40B4-BE49-F238E27FC236}">
+                <a16:creationId xmlns:a16="http://schemas.microsoft.com/office/drawing/2014/main" id="{A75D698C-F27A-2934-83A2-9074947097A0}"/>
+              </a:ext>
+            </a:extLst>
+          </p:cNvPr>
+          <p:cNvSpPr txBox="1"/>
+          <p:nvPr/>
+        </p:nvSpPr>
+        <p:spPr>
+          <a:xfrm>
+            <a:off x="68514" y="956681"/>
+            <a:ext cx="729802" cy="369332"/>
+          </a:xfrm>
+          <a:prstGeom prst="rect">
+            <a:avLst/>
+          </a:prstGeom>
+          <a:noFill/>
+        </p:spPr>
+        <p:txBody>
+          <a:bodyPr wrap="square" rtlCol="0" anchor="ctr">
+            <a:spAutoFit/>
+          </a:bodyPr>
+          <a:lstStyle/>
+          <a:p>
+            <a:pPr algn="ctr"/>
+            <a:r>
+              <a:rPr lang="de-DE" sz="600" dirty="0">
+                <a:latin typeface="CMU Serif" panose="02000603000000000000" pitchFamily="2" charset="0"/>
+                <a:ea typeface="CMU Serif" panose="02000603000000000000" pitchFamily="2" charset="0"/>
+                <a:cs typeface="CMU Serif" panose="02000603000000000000" pitchFamily="2" charset="0"/>
+              </a:rPr>
+              <a:t>Nullauftriebs-Richtung des Flügels</a:t>
+            </a:r>
+            <a:endParaRPr lang="de-DE" sz="600" baseline="-25000" dirty="0">
+              <a:latin typeface="CMU Serif" panose="02000603000000000000" pitchFamily="2" charset="0"/>
+              <a:ea typeface="CMU Serif" panose="02000603000000000000" pitchFamily="2" charset="0"/>
+              <a:cs typeface="CMU Serif" panose="02000603000000000000" pitchFamily="2" charset="0"/>
+            </a:endParaRPr>
+          </a:p>
+        </p:txBody>
+      </p:sp>
+      <p:sp>
+        <p:nvSpPr>
+          <p:cNvPr id="134" name="Bogen 133">
+            <a:extLst>
+              <a:ext uri="{FF2B5EF4-FFF2-40B4-BE49-F238E27FC236}">
+                <a16:creationId xmlns:a16="http://schemas.microsoft.com/office/drawing/2014/main" id="{BE9F03B0-0704-9B5E-9ABF-8923C8E965A3}"/>
+              </a:ext>
+            </a:extLst>
+          </p:cNvPr>
+          <p:cNvSpPr/>
+          <p:nvPr/>
+        </p:nvSpPr>
+        <p:spPr>
+          <a:xfrm>
+            <a:off x="758863" y="1522705"/>
+            <a:ext cx="212764" cy="212764"/>
+          </a:xfrm>
+          <a:prstGeom prst="arc">
+            <a:avLst>
+              <a:gd name="adj1" fmla="val 2589229"/>
+              <a:gd name="adj2" fmla="val 21020068"/>
+            </a:avLst>
+          </a:prstGeom>
+          <a:ln w="15875" cap="rnd">
+            <a:solidFill>
+              <a:schemeClr val="accent6"/>
+            </a:solidFill>
+            <a:round/>
+            <a:headEnd type="none"/>
+            <a:tailEnd type="triangle"/>
+          </a:ln>
+        </p:spPr>
+        <p:style>
+          <a:lnRef idx="2">
+            <a:schemeClr val="accent1"/>
+          </a:lnRef>
+          <a:fillRef idx="0">
+            <a:schemeClr val="accent1"/>
+          </a:fillRef>
+          <a:effectRef idx="1">
+            <a:schemeClr val="accent1"/>
+          </a:effectRef>
+          <a:fontRef idx="minor">
+            <a:schemeClr val="tx1"/>
+          </a:fontRef>
+        </p:style>
+        <p:txBody>
+          <a:bodyPr rtlCol="0" anchor="ctr"/>
+          <a:lstStyle/>
+          <a:p>
+            <a:pPr algn="ctr"/>
+            <a:endParaRPr lang="de-DE" sz="800"/>
+          </a:p>
+        </p:txBody>
+      </p:sp>
+      <p:sp>
+        <p:nvSpPr>
+          <p:cNvPr id="135" name="Textfeld 134">
+            <a:extLst>
+              <a:ext uri="{FF2B5EF4-FFF2-40B4-BE49-F238E27FC236}">
+                <a16:creationId xmlns:a16="http://schemas.microsoft.com/office/drawing/2014/main" id="{CF99DE8E-DF97-1670-097E-2146FE95E0C2}"/>
+              </a:ext>
+            </a:extLst>
+          </p:cNvPr>
+          <p:cNvSpPr txBox="1"/>
+          <p:nvPr/>
+        </p:nvSpPr>
+        <p:spPr>
+          <a:xfrm>
+            <a:off x="752032" y="1329418"/>
+            <a:ext cx="450936" cy="215444"/>
+          </a:xfrm>
+          <a:prstGeom prst="rect">
+            <a:avLst/>
+          </a:prstGeom>
+          <a:noFill/>
+        </p:spPr>
+        <p:txBody>
+          <a:bodyPr wrap="square" rtlCol="0" anchor="ctr">
+            <a:spAutoFit/>
+          </a:bodyPr>
+          <a:lstStyle/>
+          <a:p>
+            <a:pPr algn="ctr"/>
+            <a:r>
+              <a:rPr lang="de-DE" sz="800" i="1" dirty="0" err="1">
+                <a:solidFill>
+                  <a:schemeClr val="accent6"/>
+                </a:solidFill>
+                <a:latin typeface="CMU Serif" panose="02000603000000000000" pitchFamily="2" charset="0"/>
+                <a:ea typeface="CMU Serif" panose="02000603000000000000" pitchFamily="2" charset="0"/>
+                <a:cs typeface="CMU Serif" panose="02000603000000000000" pitchFamily="2" charset="0"/>
+              </a:rPr>
+              <a:t>M</a:t>
+            </a:r>
+            <a:r>
+              <a:rPr lang="de-DE" sz="800" baseline="-25000" dirty="0" err="1">
+                <a:solidFill>
+                  <a:schemeClr val="accent6"/>
+                </a:solidFill>
+                <a:latin typeface="CMU Serif" panose="02000603000000000000" pitchFamily="2" charset="0"/>
+                <a:ea typeface="CMU Serif" panose="02000603000000000000" pitchFamily="2" charset="0"/>
+                <a:cs typeface="CMU Serif" panose="02000603000000000000" pitchFamily="2" charset="0"/>
+              </a:rPr>
+              <a:t>oF</a:t>
+            </a:r>
+            <a:endParaRPr lang="de-DE" sz="800" baseline="-25000" dirty="0">
+              <a:solidFill>
+                <a:schemeClr val="accent6"/>
+              </a:solidFill>
+              <a:latin typeface="CMU Serif" panose="02000603000000000000" pitchFamily="2" charset="0"/>
+              <a:ea typeface="CMU Serif" panose="02000603000000000000" pitchFamily="2" charset="0"/>
+              <a:cs typeface="CMU Serif" panose="02000603000000000000" pitchFamily="2" charset="0"/>
+            </a:endParaRPr>
+          </a:p>
+        </p:txBody>
+      </p:sp>
+      <p:sp>
+        <p:nvSpPr>
+          <p:cNvPr id="138" name="Bogen 137">
+            <a:extLst>
+              <a:ext uri="{FF2B5EF4-FFF2-40B4-BE49-F238E27FC236}">
+                <a16:creationId xmlns:a16="http://schemas.microsoft.com/office/drawing/2014/main" id="{DCF576A8-9905-70C9-A622-45A180DEB3FC}"/>
+              </a:ext>
+            </a:extLst>
+          </p:cNvPr>
+          <p:cNvSpPr/>
+          <p:nvPr/>
+        </p:nvSpPr>
+        <p:spPr>
+          <a:xfrm>
+            <a:off x="1658012" y="1882967"/>
+            <a:ext cx="265230" cy="265230"/>
+          </a:xfrm>
+          <a:prstGeom prst="arc">
+            <a:avLst>
+              <a:gd name="adj1" fmla="val 7249083"/>
+              <a:gd name="adj2" fmla="val 4437620"/>
+            </a:avLst>
+          </a:prstGeom>
+          <a:ln w="15875" cap="rnd">
+            <a:solidFill>
+              <a:schemeClr val="accent6"/>
+            </a:solidFill>
+            <a:round/>
+            <a:headEnd type="none"/>
+            <a:tailEnd type="triangle"/>
+          </a:ln>
+        </p:spPr>
+        <p:style>
+          <a:lnRef idx="2">
+            <a:schemeClr val="accent1"/>
+          </a:lnRef>
+          <a:fillRef idx="0">
+            <a:schemeClr val="accent1"/>
+          </a:fillRef>
+          <a:effectRef idx="1">
+            <a:schemeClr val="accent1"/>
+          </a:effectRef>
+          <a:fontRef idx="minor">
+            <a:schemeClr val="tx1"/>
+          </a:fontRef>
+        </p:style>
+        <p:txBody>
+          <a:bodyPr rtlCol="0" anchor="ctr"/>
+          <a:lstStyle/>
+          <a:p>
+            <a:pPr algn="ctr"/>
+            <a:endParaRPr lang="de-DE" sz="800"/>
+          </a:p>
+        </p:txBody>
+      </p:sp>
+      <p:sp>
+        <p:nvSpPr>
+          <p:cNvPr id="139" name="Textfeld 138">
+            <a:extLst>
+              <a:ext uri="{FF2B5EF4-FFF2-40B4-BE49-F238E27FC236}">
+                <a16:creationId xmlns:a16="http://schemas.microsoft.com/office/drawing/2014/main" id="{8E9B8731-BF11-964C-13EF-28DD7DE1E228}"/>
+              </a:ext>
+            </a:extLst>
+          </p:cNvPr>
+          <p:cNvSpPr txBox="1"/>
+          <p:nvPr/>
+        </p:nvSpPr>
+        <p:spPr>
+          <a:xfrm>
+            <a:off x="1619274" y="1898339"/>
+            <a:ext cx="340562" cy="215444"/>
+          </a:xfrm>
+          <a:prstGeom prst="rect">
+            <a:avLst/>
+          </a:prstGeom>
+          <a:noFill/>
+        </p:spPr>
+        <p:txBody>
+          <a:bodyPr wrap="square" rtlCol="0" anchor="ctr">
+            <a:spAutoFit/>
+          </a:bodyPr>
+          <a:lstStyle/>
+          <a:p>
+            <a:pPr algn="ctr"/>
+            <a:r>
+              <a:rPr lang="de-DE" sz="800" i="1" dirty="0">
+                <a:solidFill>
+                  <a:schemeClr val="accent6"/>
+                </a:solidFill>
+                <a:latin typeface="CMU Serif" panose="02000603000000000000" pitchFamily="2" charset="0"/>
+                <a:ea typeface="CMU Serif" panose="02000603000000000000" pitchFamily="2" charset="0"/>
+                <a:cs typeface="CMU Serif" panose="02000603000000000000" pitchFamily="2" charset="0"/>
+              </a:rPr>
+              <a:t>M</a:t>
+            </a:r>
+            <a:r>
+              <a:rPr lang="de-DE" sz="800" baseline="-25000" dirty="0">
+                <a:solidFill>
+                  <a:schemeClr val="accent6"/>
+                </a:solidFill>
+                <a:latin typeface="CMU Serif" panose="02000603000000000000" pitchFamily="2" charset="0"/>
+                <a:ea typeface="CMU Serif" panose="02000603000000000000" pitchFamily="2" charset="0"/>
+                <a:cs typeface="CMU Serif" panose="02000603000000000000" pitchFamily="2" charset="0"/>
+              </a:rPr>
+              <a:t>R</a:t>
+            </a:r>
+          </a:p>
+        </p:txBody>
+      </p:sp>
+      <p:sp>
+        <p:nvSpPr>
+          <p:cNvPr id="140" name="Bogen 139">
+            <a:extLst>
+              <a:ext uri="{FF2B5EF4-FFF2-40B4-BE49-F238E27FC236}">
+                <a16:creationId xmlns:a16="http://schemas.microsoft.com/office/drawing/2014/main" id="{ABBC84AB-DFFC-B64F-DE3F-625D8DD1C149}"/>
+              </a:ext>
+            </a:extLst>
+          </p:cNvPr>
+          <p:cNvSpPr/>
+          <p:nvPr/>
+        </p:nvSpPr>
+        <p:spPr>
+          <a:xfrm>
+            <a:off x="2867203" y="1559191"/>
+            <a:ext cx="212764" cy="212764"/>
+          </a:xfrm>
+          <a:prstGeom prst="arc">
+            <a:avLst>
+              <a:gd name="adj1" fmla="val 2112536"/>
+              <a:gd name="adj2" fmla="val 20406014"/>
+            </a:avLst>
+          </a:prstGeom>
+          <a:ln w="15875" cap="rnd">
+            <a:solidFill>
+              <a:schemeClr val="accent6"/>
+            </a:solidFill>
+            <a:round/>
+            <a:headEnd type="none"/>
+            <a:tailEnd type="triangle"/>
+          </a:ln>
+        </p:spPr>
+        <p:style>
+          <a:lnRef idx="2">
+            <a:schemeClr val="accent1"/>
+          </a:lnRef>
+          <a:fillRef idx="0">
+            <a:schemeClr val="accent1"/>
+          </a:fillRef>
+          <a:effectRef idx="1">
+            <a:schemeClr val="accent1"/>
+          </a:effectRef>
+          <a:fontRef idx="minor">
+            <a:schemeClr val="tx1"/>
+          </a:fontRef>
+        </p:style>
+        <p:txBody>
+          <a:bodyPr rtlCol="0" anchor="ctr"/>
+          <a:lstStyle/>
+          <a:p>
+            <a:pPr algn="ctr"/>
+            <a:endParaRPr lang="de-DE" sz="800"/>
+          </a:p>
+        </p:txBody>
+      </p:sp>
+      <p:sp>
+        <p:nvSpPr>
+          <p:cNvPr id="141" name="Textfeld 140">
+            <a:extLst>
+              <a:ext uri="{FF2B5EF4-FFF2-40B4-BE49-F238E27FC236}">
+                <a16:creationId xmlns:a16="http://schemas.microsoft.com/office/drawing/2014/main" id="{AFA254EE-5F0E-7AC5-AD20-8E96D818CFA2}"/>
+              </a:ext>
+            </a:extLst>
+          </p:cNvPr>
+          <p:cNvSpPr txBox="1"/>
+          <p:nvPr/>
+        </p:nvSpPr>
+        <p:spPr>
+          <a:xfrm>
+            <a:off x="2898283" y="1381454"/>
+            <a:ext cx="450936" cy="215444"/>
+          </a:xfrm>
+          <a:prstGeom prst="rect">
+            <a:avLst/>
+          </a:prstGeom>
+          <a:noFill/>
+        </p:spPr>
+        <p:txBody>
+          <a:bodyPr wrap="square" rtlCol="0" anchor="ctr">
+            <a:spAutoFit/>
+          </a:bodyPr>
+          <a:lstStyle/>
+          <a:p>
+            <a:pPr algn="ctr"/>
+            <a:r>
+              <a:rPr lang="de-DE" sz="800" i="1" dirty="0" err="1">
+                <a:solidFill>
+                  <a:schemeClr val="accent6"/>
+                </a:solidFill>
+                <a:latin typeface="CMU Serif" panose="02000603000000000000" pitchFamily="2" charset="0"/>
+                <a:ea typeface="CMU Serif" panose="02000603000000000000" pitchFamily="2" charset="0"/>
+                <a:cs typeface="CMU Serif" panose="02000603000000000000" pitchFamily="2" charset="0"/>
+              </a:rPr>
+              <a:t>M</a:t>
+            </a:r>
+            <a:r>
+              <a:rPr lang="de-DE" sz="800" baseline="-25000" dirty="0" err="1">
+                <a:solidFill>
+                  <a:schemeClr val="accent6"/>
+                </a:solidFill>
+                <a:latin typeface="CMU Serif" panose="02000603000000000000" pitchFamily="2" charset="0"/>
+                <a:ea typeface="CMU Serif" panose="02000603000000000000" pitchFamily="2" charset="0"/>
+                <a:cs typeface="CMU Serif" panose="02000603000000000000" pitchFamily="2" charset="0"/>
+              </a:rPr>
+              <a:t>oH</a:t>
+            </a:r>
+            <a:endParaRPr lang="de-DE" sz="800" baseline="-25000" dirty="0">
+              <a:solidFill>
+                <a:schemeClr val="accent6"/>
+              </a:solidFill>
+              <a:latin typeface="CMU Serif" panose="02000603000000000000" pitchFamily="2" charset="0"/>
+              <a:ea typeface="CMU Serif" panose="02000603000000000000" pitchFamily="2" charset="0"/>
+              <a:cs typeface="CMU Serif" panose="02000603000000000000" pitchFamily="2" charset="0"/>
+            </a:endParaRPr>
+          </a:p>
+        </p:txBody>
+      </p:sp>
+      <p:cxnSp>
+        <p:nvCxnSpPr>
+          <p:cNvPr id="142" name="Gerade Verbindung mit Pfeil 141">
+            <a:extLst>
+              <a:ext uri="{FF2B5EF4-FFF2-40B4-BE49-F238E27FC236}">
+                <a16:creationId xmlns:a16="http://schemas.microsoft.com/office/drawing/2014/main" id="{13745FE0-FDA7-B7A1-D318-B66EE522ED08}"/>
+              </a:ext>
+            </a:extLst>
+          </p:cNvPr>
+          <p:cNvCxnSpPr>
+            <a:cxnSpLocks/>
+          </p:cNvCxnSpPr>
+          <p:nvPr/>
+        </p:nvCxnSpPr>
+        <p:spPr>
+          <a:xfrm>
+            <a:off x="2982975" y="1667492"/>
+            <a:ext cx="241093" cy="0"/>
+          </a:xfrm>
+          <a:prstGeom prst="straightConnector1">
+            <a:avLst/>
+          </a:prstGeom>
+          <a:ln w="15875" cap="rnd">
+            <a:solidFill>
+              <a:schemeClr val="accent2">
+                <a:lumMod val="75000"/>
+              </a:schemeClr>
+            </a:solidFill>
+            <a:round/>
+            <a:headEnd type="none" w="sm" len="sm"/>
+            <a:tailEnd type="triangle" w="med" len="med"/>
+          </a:ln>
+        </p:spPr>
+        <p:style>
+          <a:lnRef idx="2">
+            <a:schemeClr val="accent1"/>
+          </a:lnRef>
+          <a:fillRef idx="0">
+            <a:schemeClr val="accent1"/>
+          </a:fillRef>
+          <a:effectRef idx="1">
+            <a:schemeClr val="accent1"/>
+          </a:effectRef>
+          <a:fontRef idx="minor">
+            <a:schemeClr val="tx1"/>
+          </a:fontRef>
+        </p:style>
+      </p:cxnSp>
+      <p:sp>
+        <p:nvSpPr>
+          <p:cNvPr id="143" name="Textfeld 142">
+            <a:extLst>
+              <a:ext uri="{FF2B5EF4-FFF2-40B4-BE49-F238E27FC236}">
+                <a16:creationId xmlns:a16="http://schemas.microsoft.com/office/drawing/2014/main" id="{A7E9AF6F-E2E0-62F8-8E0D-76AB8E020745}"/>
+              </a:ext>
+            </a:extLst>
+          </p:cNvPr>
+          <p:cNvSpPr txBox="1"/>
+          <p:nvPr/>
+        </p:nvSpPr>
+        <p:spPr>
+          <a:xfrm>
+            <a:off x="3025941" y="1658278"/>
+            <a:ext cx="450936" cy="215444"/>
+          </a:xfrm>
+          <a:prstGeom prst="rect">
+            <a:avLst/>
+          </a:prstGeom>
+          <a:noFill/>
+        </p:spPr>
+        <p:txBody>
+          <a:bodyPr wrap="square" rtlCol="0" anchor="ctr">
+            <a:spAutoFit/>
+          </a:bodyPr>
+          <a:lstStyle/>
+          <a:p>
+            <a:pPr algn="ctr"/>
+            <a:r>
+              <a:rPr lang="de-DE" sz="800" i="1" dirty="0">
+                <a:solidFill>
+                  <a:schemeClr val="accent2">
+                    <a:lumMod val="75000"/>
+                  </a:schemeClr>
+                </a:solidFill>
+                <a:latin typeface="CMU Serif" panose="02000603000000000000" pitchFamily="2" charset="0"/>
+                <a:ea typeface="CMU Serif" panose="02000603000000000000" pitchFamily="2" charset="0"/>
+                <a:cs typeface="CMU Serif" panose="02000603000000000000" pitchFamily="2" charset="0"/>
+              </a:rPr>
+              <a:t>W</a:t>
+            </a:r>
+            <a:r>
+              <a:rPr lang="de-DE" sz="800" baseline="-25000" dirty="0">
+                <a:solidFill>
+                  <a:schemeClr val="accent2">
+                    <a:lumMod val="75000"/>
+                  </a:schemeClr>
+                </a:solidFill>
+                <a:latin typeface="CMU Serif" panose="02000603000000000000" pitchFamily="2" charset="0"/>
+                <a:ea typeface="CMU Serif" panose="02000603000000000000" pitchFamily="2" charset="0"/>
+                <a:cs typeface="CMU Serif" panose="02000603000000000000" pitchFamily="2" charset="0"/>
+              </a:rPr>
+              <a:t>H</a:t>
+            </a:r>
+          </a:p>
+        </p:txBody>
+      </p:sp>
+      <p:sp>
+        <p:nvSpPr>
+          <p:cNvPr id="38" name="Ellipse 37">
+            <a:extLst>
+              <a:ext uri="{FF2B5EF4-FFF2-40B4-BE49-F238E27FC236}">
+                <a16:creationId xmlns:a16="http://schemas.microsoft.com/office/drawing/2014/main" id="{613861E4-B950-47CC-E1BE-283841B586BB}"/>
+              </a:ext>
+            </a:extLst>
+          </p:cNvPr>
+          <p:cNvSpPr/>
+          <p:nvPr/>
+        </p:nvSpPr>
+        <p:spPr>
+          <a:xfrm>
+            <a:off x="2954907" y="1649094"/>
+            <a:ext cx="36000" cy="36000"/>
+          </a:xfrm>
+          <a:prstGeom prst="ellipse">
+            <a:avLst/>
+          </a:prstGeom>
+          <a:solidFill>
+            <a:schemeClr val="tx1"/>
+          </a:solidFill>
+          <a:ln>
+            <a:noFill/>
+          </a:ln>
+        </p:spPr>
+        <p:style>
+          <a:lnRef idx="2">
+            <a:schemeClr val="accent1">
+              <a:shade val="15000"/>
+            </a:schemeClr>
+          </a:lnRef>
+          <a:fillRef idx="1">
+            <a:schemeClr val="accent1"/>
+          </a:fillRef>
+          <a:effectRef idx="0">
+            <a:schemeClr val="accent1"/>
+          </a:effectRef>
+          <a:fontRef idx="minor">
+            <a:schemeClr val="lt1"/>
+          </a:fontRef>
+        </p:style>
+        <p:txBody>
+          <a:bodyPr rtlCol="0" anchor="ctr"/>
+          <a:lstStyle/>
+          <a:p>
+            <a:pPr algn="ctr"/>
+            <a:endParaRPr lang="de-DE" sz="800" dirty="0"/>
+          </a:p>
+        </p:txBody>
+      </p:sp>
+      <p:sp>
+        <p:nvSpPr>
+          <p:cNvPr id="145" name="Textfeld 144">
+            <a:extLst>
+              <a:ext uri="{FF2B5EF4-FFF2-40B4-BE49-F238E27FC236}">
+                <a16:creationId xmlns:a16="http://schemas.microsoft.com/office/drawing/2014/main" id="{E5D7AFCC-EB1F-EEB4-C5F3-A1F41F0F98E3}"/>
+              </a:ext>
+            </a:extLst>
+          </p:cNvPr>
+          <p:cNvSpPr txBox="1"/>
+          <p:nvPr/>
+        </p:nvSpPr>
+        <p:spPr>
+          <a:xfrm>
+            <a:off x="2059427" y="1955777"/>
+            <a:ext cx="771646" cy="369332"/>
+          </a:xfrm>
+          <a:prstGeom prst="rect">
+            <a:avLst/>
+          </a:prstGeom>
+          <a:noFill/>
+        </p:spPr>
+        <p:txBody>
+          <a:bodyPr wrap="square" rtlCol="0" anchor="ctr">
+            <a:spAutoFit/>
+          </a:bodyPr>
+          <a:lstStyle/>
+          <a:p>
+            <a:pPr algn="ctr"/>
+            <a:r>
+              <a:rPr lang="de-DE" sz="600" dirty="0">
+                <a:latin typeface="CMU Serif" panose="02000603000000000000" pitchFamily="2" charset="0"/>
+                <a:ea typeface="CMU Serif" panose="02000603000000000000" pitchFamily="2" charset="0"/>
+                <a:cs typeface="CMU Serif" panose="02000603000000000000" pitchFamily="2" charset="0"/>
+              </a:rPr>
+              <a:t>Nullauftriebs-Richtung des Flügels</a:t>
+            </a:r>
+            <a:endParaRPr lang="de-DE" sz="600" baseline="-25000" dirty="0">
+              <a:latin typeface="CMU Serif" panose="02000603000000000000" pitchFamily="2" charset="0"/>
+              <a:ea typeface="CMU Serif" panose="02000603000000000000" pitchFamily="2" charset="0"/>
+              <a:cs typeface="CMU Serif" panose="02000603000000000000" pitchFamily="2" charset="0"/>
+            </a:endParaRPr>
+          </a:p>
+        </p:txBody>
+      </p:sp>
+      <p:cxnSp>
+        <p:nvCxnSpPr>
+          <p:cNvPr id="148" name="Gerader Verbinder 147">
+            <a:extLst>
+              <a:ext uri="{FF2B5EF4-FFF2-40B4-BE49-F238E27FC236}">
+                <a16:creationId xmlns:a16="http://schemas.microsoft.com/office/drawing/2014/main" id="{710A2D93-ED39-7364-E9E6-2973F3B7668D}"/>
+              </a:ext>
+            </a:extLst>
+          </p:cNvPr>
+          <p:cNvCxnSpPr>
+            <a:cxnSpLocks/>
+          </p:cNvCxnSpPr>
+          <p:nvPr/>
+        </p:nvCxnSpPr>
+        <p:spPr>
+          <a:xfrm flipH="1">
+            <a:off x="2622538" y="1641568"/>
+            <a:ext cx="100576" cy="339606"/>
+          </a:xfrm>
+          <a:prstGeom prst="line">
+            <a:avLst/>
+          </a:prstGeom>
+          <a:ln w="6350" cap="rnd">
+            <a:solidFill>
+              <a:schemeClr val="tx1"/>
+            </a:solidFill>
+            <a:round/>
+          </a:ln>
+        </p:spPr>
+        <p:style>
+          <a:lnRef idx="2">
+            <a:schemeClr val="accent1"/>
+          </a:lnRef>
+          <a:fillRef idx="0">
+            <a:schemeClr val="accent1"/>
+          </a:fillRef>
+          <a:effectRef idx="1">
+            <a:schemeClr val="accent1"/>
+          </a:effectRef>
+          <a:fontRef idx="minor">
+            <a:schemeClr val="tx1"/>
+          </a:fontRef>
+        </p:style>
+      </p:cxnSp>
+      <p:cxnSp>
+        <p:nvCxnSpPr>
+          <p:cNvPr id="153" name="Gerader Verbinder 152">
+            <a:extLst>
+              <a:ext uri="{FF2B5EF4-FFF2-40B4-BE49-F238E27FC236}">
+                <a16:creationId xmlns:a16="http://schemas.microsoft.com/office/drawing/2014/main" id="{69953BBA-FCB5-46F4-B5F1-4CB7E8CE2312}"/>
+              </a:ext>
+            </a:extLst>
+          </p:cNvPr>
+          <p:cNvCxnSpPr>
+            <a:cxnSpLocks/>
+          </p:cNvCxnSpPr>
+          <p:nvPr/>
+        </p:nvCxnSpPr>
+        <p:spPr>
+          <a:xfrm>
+            <a:off x="2829315" y="1692690"/>
+            <a:ext cx="0" cy="658367"/>
+          </a:xfrm>
+          <a:prstGeom prst="line">
+            <a:avLst/>
+          </a:prstGeom>
+          <a:ln w="6350" cap="rnd">
+            <a:solidFill>
+              <a:schemeClr val="tx1"/>
+            </a:solidFill>
+            <a:round/>
+          </a:ln>
+        </p:spPr>
+        <p:style>
+          <a:lnRef idx="2">
+            <a:schemeClr val="accent1"/>
+          </a:lnRef>
+          <a:fillRef idx="0">
+            <a:schemeClr val="accent1"/>
+          </a:fillRef>
+          <a:effectRef idx="1">
+            <a:schemeClr val="accent1"/>
+          </a:effectRef>
+          <a:fontRef idx="minor">
+            <a:schemeClr val="tx1"/>
+          </a:fontRef>
+        </p:style>
+      </p:cxnSp>
+      <p:cxnSp>
+        <p:nvCxnSpPr>
+          <p:cNvPr id="155" name="Gerader Verbinder 154">
+            <a:extLst>
+              <a:ext uri="{FF2B5EF4-FFF2-40B4-BE49-F238E27FC236}">
+                <a16:creationId xmlns:a16="http://schemas.microsoft.com/office/drawing/2014/main" id="{67FCF6A5-923B-F28E-0260-D1B296CEE23C}"/>
+              </a:ext>
+            </a:extLst>
+          </p:cNvPr>
+          <p:cNvCxnSpPr>
+            <a:cxnSpLocks/>
+          </p:cNvCxnSpPr>
+          <p:nvPr/>
+        </p:nvCxnSpPr>
+        <p:spPr>
+          <a:xfrm flipH="1">
+            <a:off x="2973325" y="2298576"/>
+            <a:ext cx="274274" cy="0"/>
+          </a:xfrm>
+          <a:prstGeom prst="line">
+            <a:avLst/>
+          </a:prstGeom>
+          <a:ln w="6350" cap="rnd">
+            <a:solidFill>
+              <a:schemeClr val="tx1"/>
+            </a:solidFill>
+            <a:round/>
+            <a:headEnd type="none" w="sm" len="sm"/>
+            <a:tailEnd type="triangle" w="sm" len="sm"/>
+          </a:ln>
+        </p:spPr>
+        <p:style>
+          <a:lnRef idx="2">
+            <a:schemeClr val="accent1"/>
+          </a:lnRef>
+          <a:fillRef idx="0">
+            <a:schemeClr val="accent1"/>
+          </a:fillRef>
+          <a:effectRef idx="1">
+            <a:schemeClr val="accent1"/>
+          </a:effectRef>
+          <a:fontRef idx="minor">
+            <a:schemeClr val="tx1"/>
+          </a:fontRef>
+        </p:style>
+      </p:cxnSp>
+      <p:cxnSp>
+        <p:nvCxnSpPr>
+          <p:cNvPr id="158" name="Gerader Verbinder 157">
+            <a:extLst>
+              <a:ext uri="{FF2B5EF4-FFF2-40B4-BE49-F238E27FC236}">
+                <a16:creationId xmlns:a16="http://schemas.microsoft.com/office/drawing/2014/main" id="{14B59B77-2D7E-BB41-6961-5CC7A9D15F4B}"/>
+              </a:ext>
+            </a:extLst>
+          </p:cNvPr>
+          <p:cNvCxnSpPr>
+            <a:cxnSpLocks/>
+          </p:cNvCxnSpPr>
+          <p:nvPr/>
+        </p:nvCxnSpPr>
+        <p:spPr>
+          <a:xfrm>
+            <a:off x="2725721" y="2298576"/>
+            <a:ext cx="103594" cy="0"/>
+          </a:xfrm>
+          <a:prstGeom prst="line">
+            <a:avLst/>
+          </a:prstGeom>
+          <a:ln w="6350" cap="rnd">
+            <a:solidFill>
+              <a:schemeClr val="tx1"/>
+            </a:solidFill>
+            <a:round/>
+            <a:headEnd type="none" w="sm" len="sm"/>
+            <a:tailEnd type="triangle" w="sm" len="sm"/>
+          </a:ln>
+        </p:spPr>
+        <p:style>
+          <a:lnRef idx="2">
+            <a:schemeClr val="accent1"/>
+          </a:lnRef>
+          <a:fillRef idx="0">
+            <a:schemeClr val="accent1"/>
+          </a:fillRef>
+          <a:effectRef idx="1">
+            <a:schemeClr val="accent1"/>
+          </a:effectRef>
+          <a:fontRef idx="minor">
+            <a:schemeClr val="tx1"/>
+          </a:fontRef>
+        </p:style>
+      </p:cxnSp>
+      <p:cxnSp>
+        <p:nvCxnSpPr>
+          <p:cNvPr id="160" name="Gerader Verbinder 159">
+            <a:extLst>
+              <a:ext uri="{FF2B5EF4-FFF2-40B4-BE49-F238E27FC236}">
+                <a16:creationId xmlns:a16="http://schemas.microsoft.com/office/drawing/2014/main" id="{E8CBAB2C-F766-8D2B-DF44-CFA7A073126A}"/>
+              </a:ext>
+            </a:extLst>
+          </p:cNvPr>
+          <p:cNvCxnSpPr>
+            <a:cxnSpLocks/>
+          </p:cNvCxnSpPr>
+          <p:nvPr/>
+        </p:nvCxnSpPr>
+        <p:spPr>
+          <a:xfrm flipH="1">
+            <a:off x="2804160" y="2299722"/>
+            <a:ext cx="205740" cy="0"/>
+          </a:xfrm>
+          <a:prstGeom prst="line">
+            <a:avLst/>
+          </a:prstGeom>
+          <a:ln w="6350" cap="rnd">
+            <a:solidFill>
+              <a:schemeClr val="tx1"/>
+            </a:solidFill>
+            <a:round/>
+            <a:headEnd type="none" w="sm" len="sm"/>
+            <a:tailEnd type="none" w="sm" len="sm"/>
+          </a:ln>
+        </p:spPr>
+        <p:style>
+          <a:lnRef idx="2">
+            <a:schemeClr val="accent1"/>
+          </a:lnRef>
+          <a:fillRef idx="0">
+            <a:schemeClr val="accent1"/>
+          </a:fillRef>
+          <a:effectRef idx="1">
+            <a:schemeClr val="accent1"/>
+          </a:effectRef>
+          <a:fontRef idx="minor">
+            <a:schemeClr val="tx1"/>
+          </a:fontRef>
+        </p:style>
+      </p:cxnSp>
+      <p:sp>
+        <p:nvSpPr>
+          <p:cNvPr id="164" name="Textfeld 163">
+            <a:extLst>
+              <a:ext uri="{FF2B5EF4-FFF2-40B4-BE49-F238E27FC236}">
+                <a16:creationId xmlns:a16="http://schemas.microsoft.com/office/drawing/2014/main" id="{3D3947FF-4367-4B6D-F0A1-21B783CDAC4B}"/>
+              </a:ext>
+            </a:extLst>
+          </p:cNvPr>
+          <p:cNvSpPr txBox="1"/>
+          <p:nvPr/>
+        </p:nvSpPr>
+        <p:spPr>
+          <a:xfrm>
+            <a:off x="2925523" y="2107356"/>
+            <a:ext cx="435125" cy="215444"/>
+          </a:xfrm>
+          <a:prstGeom prst="rect">
+            <a:avLst/>
+          </a:prstGeom>
+          <a:noFill/>
+        </p:spPr>
+        <p:txBody>
+          <a:bodyPr wrap="square" rtlCol="0" anchor="ctr">
+            <a:spAutoFit/>
+          </a:bodyPr>
+          <a:lstStyle/>
+          <a:p>
+            <a:pPr algn="ctr"/>
+            <a:r>
+              <a:rPr lang="de-DE" sz="800" i="1" dirty="0">
+                <a:latin typeface="CMU Serif" panose="02000603000000000000" pitchFamily="2" charset="0"/>
+                <a:ea typeface="CMU Serif" panose="02000603000000000000" pitchFamily="2" charset="0"/>
+                <a:cs typeface="CMU Serif" panose="02000603000000000000" pitchFamily="2" charset="0"/>
+              </a:rPr>
+              <a:t>x</a:t>
+            </a:r>
+            <a:r>
+              <a:rPr lang="de-DE" sz="200" i="1" dirty="0">
+                <a:latin typeface="CMU Serif" panose="02000603000000000000" pitchFamily="2" charset="0"/>
+                <a:ea typeface="CMU Serif" panose="02000603000000000000" pitchFamily="2" charset="0"/>
+                <a:cs typeface="CMU Serif" panose="02000603000000000000" pitchFamily="2" charset="0"/>
+              </a:rPr>
+              <a:t> </a:t>
+            </a:r>
+            <a:r>
+              <a:rPr lang="de-DE" sz="800" baseline="-25000" dirty="0">
+                <a:latin typeface="CMU Serif" panose="02000603000000000000" pitchFamily="2" charset="0"/>
+                <a:ea typeface="CMU Serif" panose="02000603000000000000" pitchFamily="2" charset="0"/>
+                <a:cs typeface="CMU Serif" panose="02000603000000000000" pitchFamily="2" charset="0"/>
+              </a:rPr>
+              <a:t>NH</a:t>
+            </a:r>
+          </a:p>
+        </p:txBody>
+      </p:sp>
+    </p:spTree>
+    <p:extLst>
+      <p:ext uri="{BB962C8B-B14F-4D97-AF65-F5344CB8AC3E}">
+        <p14:creationId xmlns:p14="http://schemas.microsoft.com/office/powerpoint/2010/main" val="3299783584"/>
       </p:ext>
     </p:extLst>
   </p:cSld>

--- a/B.Sc. LRT/Luftfahrttechnik/images/LFT-Images.pptx
+++ b/B.Sc. LRT/Luftfahrttechnik/images/LFT-Images.pptx
@@ -5,13 +5,14 @@
     <p:sldMasterId id="2147483660" r:id="rId1"/>
   </p:sldMasterIdLst>
   <p:notesMasterIdLst>
-    <p:notesMasterId r:id="rId6"/>
+    <p:notesMasterId r:id="rId7"/>
   </p:notesMasterIdLst>
   <p:sldIdLst>
     <p:sldId id="256" r:id="rId2"/>
     <p:sldId id="257" r:id="rId3"/>
     <p:sldId id="258" r:id="rId4"/>
     <p:sldId id="259" r:id="rId5"/>
+    <p:sldId id="260" r:id="rId6"/>
   </p:sldIdLst>
   <p:sldSz cx="3600450" cy="3600450"/>
   <p:notesSz cx="6858000" cy="9144000"/>
@@ -200,7 +201,7 @@
           <a:p>
             <a:fld id="{0C596C2D-C72C-406E-B79E-9BAC142DD20E}" type="datetimeFigureOut">
               <a:rPr lang="de-DE" smtClean="0"/>
-              <a:t>05.02.2026</a:t>
+              <a:t>09.02.2026</a:t>
             </a:fld>
             <a:endParaRPr lang="de-DE" dirty="0"/>
           </a:p>
@@ -598,7 +599,7 @@
           <a:p>
             <a:fld id="{6EAE28AA-0912-4DA0-8B30-7F3CA3FE6671}" type="datetimeFigureOut">
               <a:rPr lang="de-DE" smtClean="0"/>
-              <a:t>05.02.2026</a:t>
+              <a:t>09.02.2026</a:t>
             </a:fld>
             <a:endParaRPr lang="de-DE" dirty="0"/>
           </a:p>
@@ -768,7 +769,7 @@
           <a:p>
             <a:fld id="{6EAE28AA-0912-4DA0-8B30-7F3CA3FE6671}" type="datetimeFigureOut">
               <a:rPr lang="de-DE" smtClean="0"/>
-              <a:t>05.02.2026</a:t>
+              <a:t>09.02.2026</a:t>
             </a:fld>
             <a:endParaRPr lang="de-DE" dirty="0"/>
           </a:p>
@@ -948,7 +949,7 @@
           <a:p>
             <a:fld id="{6EAE28AA-0912-4DA0-8B30-7F3CA3FE6671}" type="datetimeFigureOut">
               <a:rPr lang="de-DE" smtClean="0"/>
-              <a:t>05.02.2026</a:t>
+              <a:t>09.02.2026</a:t>
             </a:fld>
             <a:endParaRPr lang="de-DE" dirty="0"/>
           </a:p>
@@ -1118,7 +1119,7 @@
           <a:p>
             <a:fld id="{6EAE28AA-0912-4DA0-8B30-7F3CA3FE6671}" type="datetimeFigureOut">
               <a:rPr lang="de-DE" smtClean="0"/>
-              <a:t>05.02.2026</a:t>
+              <a:t>09.02.2026</a:t>
             </a:fld>
             <a:endParaRPr lang="de-DE" dirty="0"/>
           </a:p>
@@ -1364,7 +1365,7 @@
           <a:p>
             <a:fld id="{6EAE28AA-0912-4DA0-8B30-7F3CA3FE6671}" type="datetimeFigureOut">
               <a:rPr lang="de-DE" smtClean="0"/>
-              <a:t>05.02.2026</a:t>
+              <a:t>09.02.2026</a:t>
             </a:fld>
             <a:endParaRPr lang="de-DE" dirty="0"/>
           </a:p>
@@ -1596,7 +1597,7 @@
           <a:p>
             <a:fld id="{6EAE28AA-0912-4DA0-8B30-7F3CA3FE6671}" type="datetimeFigureOut">
               <a:rPr lang="de-DE" smtClean="0"/>
-              <a:t>05.02.2026</a:t>
+              <a:t>09.02.2026</a:t>
             </a:fld>
             <a:endParaRPr lang="de-DE" dirty="0"/>
           </a:p>
@@ -1963,7 +1964,7 @@
           <a:p>
             <a:fld id="{6EAE28AA-0912-4DA0-8B30-7F3CA3FE6671}" type="datetimeFigureOut">
               <a:rPr lang="de-DE" smtClean="0"/>
-              <a:t>05.02.2026</a:t>
+              <a:t>09.02.2026</a:t>
             </a:fld>
             <a:endParaRPr lang="de-DE" dirty="0"/>
           </a:p>
@@ -2081,7 +2082,7 @@
           <a:p>
             <a:fld id="{6EAE28AA-0912-4DA0-8B30-7F3CA3FE6671}" type="datetimeFigureOut">
               <a:rPr lang="de-DE" smtClean="0"/>
-              <a:t>05.02.2026</a:t>
+              <a:t>09.02.2026</a:t>
             </a:fld>
             <a:endParaRPr lang="de-DE" dirty="0"/>
           </a:p>
@@ -2176,7 +2177,7 @@
           <a:p>
             <a:fld id="{6EAE28AA-0912-4DA0-8B30-7F3CA3FE6671}" type="datetimeFigureOut">
               <a:rPr lang="de-DE" smtClean="0"/>
-              <a:t>05.02.2026</a:t>
+              <a:t>09.02.2026</a:t>
             </a:fld>
             <a:endParaRPr lang="de-DE" dirty="0"/>
           </a:p>
@@ -2453,7 +2454,7 @@
           <a:p>
             <a:fld id="{6EAE28AA-0912-4DA0-8B30-7F3CA3FE6671}" type="datetimeFigureOut">
               <a:rPr lang="de-DE" smtClean="0"/>
-              <a:t>05.02.2026</a:t>
+              <a:t>09.02.2026</a:t>
             </a:fld>
             <a:endParaRPr lang="de-DE" dirty="0"/>
           </a:p>
@@ -2710,7 +2711,7 @@
           <a:p>
             <a:fld id="{6EAE28AA-0912-4DA0-8B30-7F3CA3FE6671}" type="datetimeFigureOut">
               <a:rPr lang="de-DE" smtClean="0"/>
-              <a:t>05.02.2026</a:t>
+              <a:t>09.02.2026</a:t>
             </a:fld>
             <a:endParaRPr lang="de-DE" dirty="0"/>
           </a:p>
@@ -2923,7 +2924,7 @@
           <a:p>
             <a:fld id="{6EAE28AA-0912-4DA0-8B30-7F3CA3FE6671}" type="datetimeFigureOut">
               <a:rPr lang="de-DE" smtClean="0"/>
-              <a:t>05.02.2026</a:t>
+              <a:t>09.02.2026</a:t>
             </a:fld>
             <a:endParaRPr lang="de-DE" dirty="0"/>
           </a:p>
@@ -16430,6 +16431,2651 @@
 </p:sld>
 </file>
 
+<file path=ppt/slides/slide5.xml><?xml version="1.0" encoding="utf-8"?>
+<p:sld xmlns:a="http://schemas.openxmlformats.org/drawingml/2006/main" xmlns:r="http://schemas.openxmlformats.org/officeDocument/2006/relationships" xmlns:p="http://schemas.openxmlformats.org/presentationml/2006/main">
+  <p:cSld>
+    <p:spTree>
+      <p:nvGrpSpPr>
+        <p:cNvPr id="1" name=""/>
+        <p:cNvGrpSpPr/>
+        <p:nvPr/>
+      </p:nvGrpSpPr>
+      <p:grpSpPr>
+        <a:xfrm>
+          <a:off x="0" y="0"/>
+          <a:ext cx="0" cy="0"/>
+          <a:chOff x="0" y="0"/>
+          <a:chExt cx="0" cy="0"/>
+        </a:xfrm>
+      </p:grpSpPr>
+      <p:grpSp>
+        <p:nvGrpSpPr>
+          <p:cNvPr id="49" name="Gruppieren 48">
+            <a:extLst>
+              <a:ext uri="{FF2B5EF4-FFF2-40B4-BE49-F238E27FC236}">
+                <a16:creationId xmlns:a16="http://schemas.microsoft.com/office/drawing/2014/main" id="{E32F85D3-A54D-969B-1CD9-2E346EF21701}"/>
+              </a:ext>
+            </a:extLst>
+          </p:cNvPr>
+          <p:cNvGrpSpPr/>
+          <p:nvPr/>
+        </p:nvGrpSpPr>
+        <p:grpSpPr>
+          <a:xfrm>
+            <a:off x="275999" y="503649"/>
+            <a:ext cx="2980688" cy="2704628"/>
+            <a:chOff x="181105" y="541227"/>
+            <a:chExt cx="2980688" cy="2704628"/>
+          </a:xfrm>
+        </p:grpSpPr>
+        <p:grpSp>
+          <p:nvGrpSpPr>
+            <p:cNvPr id="22" name="Gruppieren 21">
+              <a:extLst>
+                <a:ext uri="{FF2B5EF4-FFF2-40B4-BE49-F238E27FC236}">
+                  <a16:creationId xmlns:a16="http://schemas.microsoft.com/office/drawing/2014/main" id="{D92B1F24-5A92-3590-663A-9579EBCFF870}"/>
+                </a:ext>
+              </a:extLst>
+            </p:cNvPr>
+            <p:cNvGrpSpPr/>
+            <p:nvPr/>
+          </p:nvGrpSpPr>
+          <p:grpSpPr>
+            <a:xfrm>
+              <a:off x="550545" y="650668"/>
+              <a:ext cx="2434955" cy="2368757"/>
+              <a:chOff x="550545" y="650668"/>
+              <a:chExt cx="2434955" cy="2368757"/>
+            </a:xfrm>
+          </p:grpSpPr>
+          <p:cxnSp>
+            <p:nvCxnSpPr>
+              <p:cNvPr id="6" name="Gerader Verbinder 5">
+                <a:extLst>
+                  <a:ext uri="{FF2B5EF4-FFF2-40B4-BE49-F238E27FC236}">
+                    <a16:creationId xmlns:a16="http://schemas.microsoft.com/office/drawing/2014/main" id="{81A82260-3DA2-11ED-4556-1EDDA066CECB}"/>
+                  </a:ext>
+                </a:extLst>
+              </p:cNvPr>
+              <p:cNvCxnSpPr>
+                <a:cxnSpLocks/>
+              </p:cNvCxnSpPr>
+              <p:nvPr/>
+            </p:nvCxnSpPr>
+            <p:spPr>
+              <a:xfrm>
+                <a:off x="1089060" y="650798"/>
+                <a:ext cx="0" cy="2298853"/>
+              </a:xfrm>
+              <a:prstGeom prst="line">
+                <a:avLst/>
+              </a:prstGeom>
+              <a:ln w="12700" cap="rnd">
+                <a:solidFill>
+                  <a:schemeClr val="bg1">
+                    <a:lumMod val="65000"/>
+                  </a:schemeClr>
+                </a:solidFill>
+                <a:round/>
+              </a:ln>
+            </p:spPr>
+            <p:style>
+              <a:lnRef idx="2">
+                <a:schemeClr val="accent1"/>
+              </a:lnRef>
+              <a:fillRef idx="0">
+                <a:schemeClr val="accent1"/>
+              </a:fillRef>
+              <a:effectRef idx="1">
+                <a:schemeClr val="accent1"/>
+              </a:effectRef>
+              <a:fontRef idx="minor">
+                <a:schemeClr val="tx1"/>
+              </a:fontRef>
+            </p:style>
+          </p:cxnSp>
+          <p:cxnSp>
+            <p:nvCxnSpPr>
+              <p:cNvPr id="7" name="Gerader Verbinder 6">
+                <a:extLst>
+                  <a:ext uri="{FF2B5EF4-FFF2-40B4-BE49-F238E27FC236}">
+                    <a16:creationId xmlns:a16="http://schemas.microsoft.com/office/drawing/2014/main" id="{135734E5-F363-0E41-CFDF-C3E70C925F40}"/>
+                  </a:ext>
+                </a:extLst>
+              </p:cNvPr>
+              <p:cNvCxnSpPr>
+                <a:cxnSpLocks/>
+              </p:cNvCxnSpPr>
+              <p:nvPr/>
+            </p:nvCxnSpPr>
+            <p:spPr>
+              <a:xfrm>
+                <a:off x="1563171" y="650798"/>
+                <a:ext cx="0" cy="2298853"/>
+              </a:xfrm>
+              <a:prstGeom prst="line">
+                <a:avLst/>
+              </a:prstGeom>
+              <a:ln w="12700" cap="rnd">
+                <a:solidFill>
+                  <a:schemeClr val="bg1">
+                    <a:lumMod val="65000"/>
+                  </a:schemeClr>
+                </a:solidFill>
+                <a:round/>
+              </a:ln>
+            </p:spPr>
+            <p:style>
+              <a:lnRef idx="2">
+                <a:schemeClr val="accent1"/>
+              </a:lnRef>
+              <a:fillRef idx="0">
+                <a:schemeClr val="accent1"/>
+              </a:fillRef>
+              <a:effectRef idx="1">
+                <a:schemeClr val="accent1"/>
+              </a:effectRef>
+              <a:fontRef idx="minor">
+                <a:schemeClr val="tx1"/>
+              </a:fontRef>
+            </p:style>
+          </p:cxnSp>
+          <p:cxnSp>
+            <p:nvCxnSpPr>
+              <p:cNvPr id="8" name="Gerader Verbinder 7">
+                <a:extLst>
+                  <a:ext uri="{FF2B5EF4-FFF2-40B4-BE49-F238E27FC236}">
+                    <a16:creationId xmlns:a16="http://schemas.microsoft.com/office/drawing/2014/main" id="{CC13891C-10AF-5437-83F8-A4D0ECA72A30}"/>
+                  </a:ext>
+                </a:extLst>
+              </p:cNvPr>
+              <p:cNvCxnSpPr>
+                <a:cxnSpLocks/>
+              </p:cNvCxnSpPr>
+              <p:nvPr/>
+            </p:nvCxnSpPr>
+            <p:spPr>
+              <a:xfrm>
+                <a:off x="2037281" y="650798"/>
+                <a:ext cx="0" cy="2298853"/>
+              </a:xfrm>
+              <a:prstGeom prst="line">
+                <a:avLst/>
+              </a:prstGeom>
+              <a:ln w="12700" cap="rnd">
+                <a:solidFill>
+                  <a:schemeClr val="bg1">
+                    <a:lumMod val="65000"/>
+                  </a:schemeClr>
+                </a:solidFill>
+                <a:round/>
+              </a:ln>
+            </p:spPr>
+            <p:style>
+              <a:lnRef idx="2">
+                <a:schemeClr val="accent1"/>
+              </a:lnRef>
+              <a:fillRef idx="0">
+                <a:schemeClr val="accent1"/>
+              </a:fillRef>
+              <a:effectRef idx="1">
+                <a:schemeClr val="accent1"/>
+              </a:effectRef>
+              <a:fontRef idx="minor">
+                <a:schemeClr val="tx1"/>
+              </a:fontRef>
+            </p:style>
+          </p:cxnSp>
+          <p:cxnSp>
+            <p:nvCxnSpPr>
+              <p:cNvPr id="9" name="Gerader Verbinder 8">
+                <a:extLst>
+                  <a:ext uri="{FF2B5EF4-FFF2-40B4-BE49-F238E27FC236}">
+                    <a16:creationId xmlns:a16="http://schemas.microsoft.com/office/drawing/2014/main" id="{BB913743-D1B7-5E2F-8BF4-F1C83F7EF6D5}"/>
+                  </a:ext>
+                </a:extLst>
+              </p:cNvPr>
+              <p:cNvCxnSpPr>
+                <a:cxnSpLocks/>
+              </p:cNvCxnSpPr>
+              <p:nvPr/>
+            </p:nvCxnSpPr>
+            <p:spPr>
+              <a:xfrm>
+                <a:off x="2511392" y="650798"/>
+                <a:ext cx="0" cy="2298853"/>
+              </a:xfrm>
+              <a:prstGeom prst="line">
+                <a:avLst/>
+              </a:prstGeom>
+              <a:ln w="12700" cap="rnd">
+                <a:solidFill>
+                  <a:schemeClr val="bg1">
+                    <a:lumMod val="65000"/>
+                  </a:schemeClr>
+                </a:solidFill>
+                <a:round/>
+              </a:ln>
+            </p:spPr>
+            <p:style>
+              <a:lnRef idx="2">
+                <a:schemeClr val="accent1"/>
+              </a:lnRef>
+              <a:fillRef idx="0">
+                <a:schemeClr val="accent1"/>
+              </a:fillRef>
+              <a:effectRef idx="1">
+                <a:schemeClr val="accent1"/>
+              </a:effectRef>
+              <a:fontRef idx="minor">
+                <a:schemeClr val="tx1"/>
+              </a:fontRef>
+            </p:style>
+          </p:cxnSp>
+          <p:cxnSp>
+            <p:nvCxnSpPr>
+              <p:cNvPr id="10" name="Gerader Verbinder 9">
+                <a:extLst>
+                  <a:ext uri="{FF2B5EF4-FFF2-40B4-BE49-F238E27FC236}">
+                    <a16:creationId xmlns:a16="http://schemas.microsoft.com/office/drawing/2014/main" id="{2A9C0E40-FBCA-18BE-FC80-0C25F13CEA89}"/>
+                  </a:ext>
+                </a:extLst>
+              </p:cNvPr>
+              <p:cNvCxnSpPr>
+                <a:cxnSpLocks/>
+              </p:cNvCxnSpPr>
+              <p:nvPr/>
+            </p:nvCxnSpPr>
+            <p:spPr>
+              <a:xfrm>
+                <a:off x="2985500" y="650798"/>
+                <a:ext cx="0" cy="2298853"/>
+              </a:xfrm>
+              <a:prstGeom prst="line">
+                <a:avLst/>
+              </a:prstGeom>
+              <a:ln w="12700" cap="rnd">
+                <a:solidFill>
+                  <a:schemeClr val="bg1">
+                    <a:lumMod val="65000"/>
+                  </a:schemeClr>
+                </a:solidFill>
+                <a:round/>
+              </a:ln>
+            </p:spPr>
+            <p:style>
+              <a:lnRef idx="2">
+                <a:schemeClr val="accent1"/>
+              </a:lnRef>
+              <a:fillRef idx="0">
+                <a:schemeClr val="accent1"/>
+              </a:fillRef>
+              <a:effectRef idx="1">
+                <a:schemeClr val="accent1"/>
+              </a:effectRef>
+              <a:fontRef idx="minor">
+                <a:schemeClr val="tx1"/>
+              </a:fontRef>
+            </p:style>
+          </p:cxnSp>
+          <p:grpSp>
+            <p:nvGrpSpPr>
+              <p:cNvPr id="20" name="Gruppieren 19">
+                <a:extLst>
+                  <a:ext uri="{FF2B5EF4-FFF2-40B4-BE49-F238E27FC236}">
+                    <a16:creationId xmlns:a16="http://schemas.microsoft.com/office/drawing/2014/main" id="{4167EEB5-7764-643A-F45F-3C678C44B523}"/>
+                  </a:ext>
+                </a:extLst>
+              </p:cNvPr>
+              <p:cNvGrpSpPr/>
+              <p:nvPr/>
+            </p:nvGrpSpPr>
+            <p:grpSpPr>
+              <a:xfrm>
+                <a:off x="550545" y="650668"/>
+                <a:ext cx="2434955" cy="2301985"/>
+                <a:chOff x="550545" y="650668"/>
+                <a:chExt cx="2434955" cy="2301985"/>
+              </a:xfrm>
+            </p:grpSpPr>
+            <p:cxnSp>
+              <p:nvCxnSpPr>
+                <p:cNvPr id="12" name="Gerader Verbinder 11">
+                  <a:extLst>
+                    <a:ext uri="{FF2B5EF4-FFF2-40B4-BE49-F238E27FC236}">
+                      <a16:creationId xmlns:a16="http://schemas.microsoft.com/office/drawing/2014/main" id="{A810AFF0-6EDB-93E1-E1DF-F7C7BB033A8F}"/>
+                    </a:ext>
+                  </a:extLst>
+                </p:cNvPr>
+                <p:cNvCxnSpPr>
+                  <a:cxnSpLocks/>
+                </p:cNvCxnSpPr>
+                <p:nvPr/>
+              </p:nvCxnSpPr>
+              <p:spPr>
+                <a:xfrm>
+                  <a:off x="614950" y="650668"/>
+                  <a:ext cx="2370550" cy="0"/>
+                </a:xfrm>
+                <a:prstGeom prst="line">
+                  <a:avLst/>
+                </a:prstGeom>
+                <a:ln w="12700" cap="rnd">
+                  <a:solidFill>
+                    <a:schemeClr val="bg1">
+                      <a:lumMod val="65000"/>
+                    </a:schemeClr>
+                  </a:solidFill>
+                  <a:round/>
+                </a:ln>
+              </p:spPr>
+              <p:style>
+                <a:lnRef idx="2">
+                  <a:schemeClr val="accent1"/>
+                </a:lnRef>
+                <a:fillRef idx="0">
+                  <a:schemeClr val="accent1"/>
+                </a:fillRef>
+                <a:effectRef idx="1">
+                  <a:schemeClr val="accent1"/>
+                </a:effectRef>
+                <a:fontRef idx="minor">
+                  <a:schemeClr val="tx1"/>
+                </a:fontRef>
+              </p:style>
+            </p:cxnSp>
+            <p:cxnSp>
+              <p:nvCxnSpPr>
+                <p:cNvPr id="15" name="Gerader Verbinder 14">
+                  <a:extLst>
+                    <a:ext uri="{FF2B5EF4-FFF2-40B4-BE49-F238E27FC236}">
+                      <a16:creationId xmlns:a16="http://schemas.microsoft.com/office/drawing/2014/main" id="{FC635500-1844-B8AB-24E8-9B42D56DFEE6}"/>
+                    </a:ext>
+                  </a:extLst>
+                </p:cNvPr>
+                <p:cNvCxnSpPr>
+                  <a:cxnSpLocks/>
+                </p:cNvCxnSpPr>
+                <p:nvPr/>
+              </p:nvCxnSpPr>
+              <p:spPr>
+                <a:xfrm>
+                  <a:off x="614950" y="1226164"/>
+                  <a:ext cx="2370550" cy="0"/>
+                </a:xfrm>
+                <a:prstGeom prst="line">
+                  <a:avLst/>
+                </a:prstGeom>
+                <a:ln w="12700" cap="rnd">
+                  <a:solidFill>
+                    <a:schemeClr val="bg1">
+                      <a:lumMod val="65000"/>
+                    </a:schemeClr>
+                  </a:solidFill>
+                  <a:round/>
+                </a:ln>
+              </p:spPr>
+              <p:style>
+                <a:lnRef idx="2">
+                  <a:schemeClr val="accent1"/>
+                </a:lnRef>
+                <a:fillRef idx="0">
+                  <a:schemeClr val="accent1"/>
+                </a:fillRef>
+                <a:effectRef idx="1">
+                  <a:schemeClr val="accent1"/>
+                </a:effectRef>
+                <a:fontRef idx="minor">
+                  <a:schemeClr val="tx1"/>
+                </a:fontRef>
+              </p:style>
+            </p:cxnSp>
+            <p:cxnSp>
+              <p:nvCxnSpPr>
+                <p:cNvPr id="16" name="Gerader Verbinder 15">
+                  <a:extLst>
+                    <a:ext uri="{FF2B5EF4-FFF2-40B4-BE49-F238E27FC236}">
+                      <a16:creationId xmlns:a16="http://schemas.microsoft.com/office/drawing/2014/main" id="{35629FED-E994-F10E-2F2C-57A5D1E0B7DB}"/>
+                    </a:ext>
+                  </a:extLst>
+                </p:cNvPr>
+                <p:cNvCxnSpPr>
+                  <a:cxnSpLocks/>
+                </p:cNvCxnSpPr>
+                <p:nvPr/>
+              </p:nvCxnSpPr>
+              <p:spPr>
+                <a:xfrm>
+                  <a:off x="614950" y="1801660"/>
+                  <a:ext cx="2370550" cy="0"/>
+                </a:xfrm>
+                <a:prstGeom prst="line">
+                  <a:avLst/>
+                </a:prstGeom>
+                <a:ln w="12700" cap="rnd">
+                  <a:solidFill>
+                    <a:schemeClr val="bg1">
+                      <a:lumMod val="65000"/>
+                    </a:schemeClr>
+                  </a:solidFill>
+                  <a:round/>
+                </a:ln>
+              </p:spPr>
+              <p:style>
+                <a:lnRef idx="2">
+                  <a:schemeClr val="accent1"/>
+                </a:lnRef>
+                <a:fillRef idx="0">
+                  <a:schemeClr val="accent1"/>
+                </a:fillRef>
+                <a:effectRef idx="1">
+                  <a:schemeClr val="accent1"/>
+                </a:effectRef>
+                <a:fontRef idx="minor">
+                  <a:schemeClr val="tx1"/>
+                </a:fontRef>
+              </p:style>
+            </p:cxnSp>
+            <p:cxnSp>
+              <p:nvCxnSpPr>
+                <p:cNvPr id="19" name="Gerader Verbinder 18">
+                  <a:extLst>
+                    <a:ext uri="{FF2B5EF4-FFF2-40B4-BE49-F238E27FC236}">
+                      <a16:creationId xmlns:a16="http://schemas.microsoft.com/office/drawing/2014/main" id="{0E0A5A03-F348-599A-8F55-54C725842CC5}"/>
+                    </a:ext>
+                  </a:extLst>
+                </p:cNvPr>
+                <p:cNvCxnSpPr>
+                  <a:cxnSpLocks/>
+                </p:cNvCxnSpPr>
+                <p:nvPr/>
+              </p:nvCxnSpPr>
+              <p:spPr>
+                <a:xfrm>
+                  <a:off x="614950" y="2377156"/>
+                  <a:ext cx="2370550" cy="0"/>
+                </a:xfrm>
+                <a:prstGeom prst="line">
+                  <a:avLst/>
+                </a:prstGeom>
+                <a:ln w="12700" cap="rnd">
+                  <a:solidFill>
+                    <a:schemeClr val="bg1">
+                      <a:lumMod val="65000"/>
+                    </a:schemeClr>
+                  </a:solidFill>
+                  <a:round/>
+                </a:ln>
+              </p:spPr>
+              <p:style>
+                <a:lnRef idx="2">
+                  <a:schemeClr val="accent1"/>
+                </a:lnRef>
+                <a:fillRef idx="0">
+                  <a:schemeClr val="accent1"/>
+                </a:fillRef>
+                <a:effectRef idx="1">
+                  <a:schemeClr val="accent1"/>
+                </a:effectRef>
+                <a:fontRef idx="minor">
+                  <a:schemeClr val="tx1"/>
+                </a:fontRef>
+              </p:style>
+            </p:cxnSp>
+            <p:cxnSp>
+              <p:nvCxnSpPr>
+                <p:cNvPr id="17" name="Gerader Verbinder 16">
+                  <a:extLst>
+                    <a:ext uri="{FF2B5EF4-FFF2-40B4-BE49-F238E27FC236}">
+                      <a16:creationId xmlns:a16="http://schemas.microsoft.com/office/drawing/2014/main" id="{36E897C2-513E-7F0A-D487-E83D94F8068F}"/>
+                    </a:ext>
+                  </a:extLst>
+                </p:cNvPr>
+                <p:cNvCxnSpPr>
+                  <a:cxnSpLocks/>
+                </p:cNvCxnSpPr>
+                <p:nvPr/>
+              </p:nvCxnSpPr>
+              <p:spPr>
+                <a:xfrm>
+                  <a:off x="550545" y="2952653"/>
+                  <a:ext cx="2434955" cy="0"/>
+                </a:xfrm>
+                <a:prstGeom prst="line">
+                  <a:avLst/>
+                </a:prstGeom>
+                <a:ln w="12700" cap="rnd">
+                  <a:solidFill>
+                    <a:schemeClr val="tx1"/>
+                  </a:solidFill>
+                  <a:round/>
+                </a:ln>
+              </p:spPr>
+              <p:style>
+                <a:lnRef idx="2">
+                  <a:schemeClr val="accent1"/>
+                </a:lnRef>
+                <a:fillRef idx="0">
+                  <a:schemeClr val="accent1"/>
+                </a:fillRef>
+                <a:effectRef idx="1">
+                  <a:schemeClr val="accent1"/>
+                </a:effectRef>
+                <a:fontRef idx="minor">
+                  <a:schemeClr val="tx1"/>
+                </a:fontRef>
+              </p:style>
+            </p:cxnSp>
+          </p:grpSp>
+          <p:cxnSp>
+            <p:nvCxnSpPr>
+              <p:cNvPr id="5" name="Gerader Verbinder 4">
+                <a:extLst>
+                  <a:ext uri="{FF2B5EF4-FFF2-40B4-BE49-F238E27FC236}">
+                    <a16:creationId xmlns:a16="http://schemas.microsoft.com/office/drawing/2014/main" id="{7F2EA998-EED8-69AE-31A6-E7674B8801ED}"/>
+                  </a:ext>
+                </a:extLst>
+              </p:cNvPr>
+              <p:cNvCxnSpPr>
+                <a:cxnSpLocks/>
+              </p:cNvCxnSpPr>
+              <p:nvPr/>
+            </p:nvCxnSpPr>
+            <p:spPr>
+              <a:xfrm>
+                <a:off x="614950" y="650798"/>
+                <a:ext cx="0" cy="2368627"/>
+              </a:xfrm>
+              <a:prstGeom prst="line">
+                <a:avLst/>
+              </a:prstGeom>
+              <a:ln w="12700" cap="rnd">
+                <a:solidFill>
+                  <a:schemeClr val="tx1"/>
+                </a:solidFill>
+                <a:round/>
+              </a:ln>
+            </p:spPr>
+            <p:style>
+              <a:lnRef idx="2">
+                <a:schemeClr val="accent1"/>
+              </a:lnRef>
+              <a:fillRef idx="0">
+                <a:schemeClr val="accent1"/>
+              </a:fillRef>
+              <a:effectRef idx="1">
+                <a:schemeClr val="accent1"/>
+              </a:effectRef>
+              <a:fontRef idx="minor">
+                <a:schemeClr val="tx1"/>
+              </a:fontRef>
+            </p:style>
+          </p:cxnSp>
+        </p:grpSp>
+        <p:cxnSp>
+          <p:nvCxnSpPr>
+            <p:cNvPr id="25" name="Gerader Verbinder 24">
+              <a:extLst>
+                <a:ext uri="{FF2B5EF4-FFF2-40B4-BE49-F238E27FC236}">
+                  <a16:creationId xmlns:a16="http://schemas.microsoft.com/office/drawing/2014/main" id="{3B0F5731-70A9-C364-89CD-3ACBB970AC19}"/>
+                </a:ext>
+              </a:extLst>
+            </p:cNvPr>
+            <p:cNvCxnSpPr>
+              <a:cxnSpLocks/>
+            </p:cNvCxnSpPr>
+            <p:nvPr/>
+          </p:nvCxnSpPr>
+          <p:spPr>
+            <a:xfrm>
+              <a:off x="1089060" y="2954655"/>
+              <a:ext cx="0" cy="64770"/>
+            </a:xfrm>
+            <a:prstGeom prst="line">
+              <a:avLst/>
+            </a:prstGeom>
+            <a:ln w="12700" cap="rnd">
+              <a:solidFill>
+                <a:schemeClr val="tx1"/>
+              </a:solidFill>
+              <a:round/>
+            </a:ln>
+          </p:spPr>
+          <p:style>
+            <a:lnRef idx="2">
+              <a:schemeClr val="accent1"/>
+            </a:lnRef>
+            <a:fillRef idx="0">
+              <a:schemeClr val="accent1"/>
+            </a:fillRef>
+            <a:effectRef idx="1">
+              <a:schemeClr val="accent1"/>
+            </a:effectRef>
+            <a:fontRef idx="minor">
+              <a:schemeClr val="tx1"/>
+            </a:fontRef>
+          </p:style>
+        </p:cxnSp>
+        <p:cxnSp>
+          <p:nvCxnSpPr>
+            <p:cNvPr id="28" name="Gerader Verbinder 27">
+              <a:extLst>
+                <a:ext uri="{FF2B5EF4-FFF2-40B4-BE49-F238E27FC236}">
+                  <a16:creationId xmlns:a16="http://schemas.microsoft.com/office/drawing/2014/main" id="{8C7AF1F6-630D-8CB2-BB42-4366006F7EEF}"/>
+                </a:ext>
+              </a:extLst>
+            </p:cNvPr>
+            <p:cNvCxnSpPr>
+              <a:cxnSpLocks/>
+            </p:cNvCxnSpPr>
+            <p:nvPr/>
+          </p:nvCxnSpPr>
+          <p:spPr>
+            <a:xfrm>
+              <a:off x="1563171" y="2954655"/>
+              <a:ext cx="0" cy="64770"/>
+            </a:xfrm>
+            <a:prstGeom prst="line">
+              <a:avLst/>
+            </a:prstGeom>
+            <a:ln w="12700" cap="rnd">
+              <a:solidFill>
+                <a:schemeClr val="tx1"/>
+              </a:solidFill>
+              <a:round/>
+            </a:ln>
+          </p:spPr>
+          <p:style>
+            <a:lnRef idx="2">
+              <a:schemeClr val="accent1"/>
+            </a:lnRef>
+            <a:fillRef idx="0">
+              <a:schemeClr val="accent1"/>
+            </a:fillRef>
+            <a:effectRef idx="1">
+              <a:schemeClr val="accent1"/>
+            </a:effectRef>
+            <a:fontRef idx="minor">
+              <a:schemeClr val="tx1"/>
+            </a:fontRef>
+          </p:style>
+        </p:cxnSp>
+        <p:cxnSp>
+          <p:nvCxnSpPr>
+            <p:cNvPr id="29" name="Gerader Verbinder 28">
+              <a:extLst>
+                <a:ext uri="{FF2B5EF4-FFF2-40B4-BE49-F238E27FC236}">
+                  <a16:creationId xmlns:a16="http://schemas.microsoft.com/office/drawing/2014/main" id="{C2BDAF8E-C458-60CF-196E-F79BAB327871}"/>
+                </a:ext>
+              </a:extLst>
+            </p:cNvPr>
+            <p:cNvCxnSpPr>
+              <a:cxnSpLocks/>
+            </p:cNvCxnSpPr>
+            <p:nvPr/>
+          </p:nvCxnSpPr>
+          <p:spPr>
+            <a:xfrm>
+              <a:off x="2037281" y="2954655"/>
+              <a:ext cx="0" cy="64770"/>
+            </a:xfrm>
+            <a:prstGeom prst="line">
+              <a:avLst/>
+            </a:prstGeom>
+            <a:ln w="12700" cap="rnd">
+              <a:solidFill>
+                <a:schemeClr val="tx1"/>
+              </a:solidFill>
+              <a:round/>
+            </a:ln>
+          </p:spPr>
+          <p:style>
+            <a:lnRef idx="2">
+              <a:schemeClr val="accent1"/>
+            </a:lnRef>
+            <a:fillRef idx="0">
+              <a:schemeClr val="accent1"/>
+            </a:fillRef>
+            <a:effectRef idx="1">
+              <a:schemeClr val="accent1"/>
+            </a:effectRef>
+            <a:fontRef idx="minor">
+              <a:schemeClr val="tx1"/>
+            </a:fontRef>
+          </p:style>
+        </p:cxnSp>
+        <p:cxnSp>
+          <p:nvCxnSpPr>
+            <p:cNvPr id="30" name="Gerader Verbinder 29">
+              <a:extLst>
+                <a:ext uri="{FF2B5EF4-FFF2-40B4-BE49-F238E27FC236}">
+                  <a16:creationId xmlns:a16="http://schemas.microsoft.com/office/drawing/2014/main" id="{31BECC8C-19F3-ADD7-0090-8A06C1771488}"/>
+                </a:ext>
+              </a:extLst>
+            </p:cNvPr>
+            <p:cNvCxnSpPr>
+              <a:cxnSpLocks/>
+            </p:cNvCxnSpPr>
+            <p:nvPr/>
+          </p:nvCxnSpPr>
+          <p:spPr>
+            <a:xfrm>
+              <a:off x="2511392" y="2954655"/>
+              <a:ext cx="0" cy="64770"/>
+            </a:xfrm>
+            <a:prstGeom prst="line">
+              <a:avLst/>
+            </a:prstGeom>
+            <a:ln w="12700" cap="rnd">
+              <a:solidFill>
+                <a:schemeClr val="tx1"/>
+              </a:solidFill>
+              <a:round/>
+            </a:ln>
+          </p:spPr>
+          <p:style>
+            <a:lnRef idx="2">
+              <a:schemeClr val="accent1"/>
+            </a:lnRef>
+            <a:fillRef idx="0">
+              <a:schemeClr val="accent1"/>
+            </a:fillRef>
+            <a:effectRef idx="1">
+              <a:schemeClr val="accent1"/>
+            </a:effectRef>
+            <a:fontRef idx="minor">
+              <a:schemeClr val="tx1"/>
+            </a:fontRef>
+          </p:style>
+        </p:cxnSp>
+        <p:cxnSp>
+          <p:nvCxnSpPr>
+            <p:cNvPr id="31" name="Gerader Verbinder 30">
+              <a:extLst>
+                <a:ext uri="{FF2B5EF4-FFF2-40B4-BE49-F238E27FC236}">
+                  <a16:creationId xmlns:a16="http://schemas.microsoft.com/office/drawing/2014/main" id="{8795920F-D712-91A1-E19B-4C737C040707}"/>
+                </a:ext>
+              </a:extLst>
+            </p:cNvPr>
+            <p:cNvCxnSpPr>
+              <a:cxnSpLocks/>
+            </p:cNvCxnSpPr>
+            <p:nvPr/>
+          </p:nvCxnSpPr>
+          <p:spPr>
+            <a:xfrm>
+              <a:off x="2985500" y="2952750"/>
+              <a:ext cx="0" cy="64770"/>
+            </a:xfrm>
+            <a:prstGeom prst="line">
+              <a:avLst/>
+            </a:prstGeom>
+            <a:ln w="12700" cap="rnd">
+              <a:solidFill>
+                <a:schemeClr val="tx1"/>
+              </a:solidFill>
+              <a:round/>
+            </a:ln>
+          </p:spPr>
+          <p:style>
+            <a:lnRef idx="2">
+              <a:schemeClr val="accent1"/>
+            </a:lnRef>
+            <a:fillRef idx="0">
+              <a:schemeClr val="accent1"/>
+            </a:fillRef>
+            <a:effectRef idx="1">
+              <a:schemeClr val="accent1"/>
+            </a:effectRef>
+            <a:fontRef idx="minor">
+              <a:schemeClr val="tx1"/>
+            </a:fontRef>
+          </p:style>
+        </p:cxnSp>
+        <p:cxnSp>
+          <p:nvCxnSpPr>
+            <p:cNvPr id="32" name="Gerader Verbinder 31">
+              <a:extLst>
+                <a:ext uri="{FF2B5EF4-FFF2-40B4-BE49-F238E27FC236}">
+                  <a16:creationId xmlns:a16="http://schemas.microsoft.com/office/drawing/2014/main" id="{3F7F2635-DAE7-14BD-0C44-468903B172E6}"/>
+                </a:ext>
+              </a:extLst>
+            </p:cNvPr>
+            <p:cNvCxnSpPr>
+              <a:cxnSpLocks/>
+            </p:cNvCxnSpPr>
+            <p:nvPr/>
+          </p:nvCxnSpPr>
+          <p:spPr>
+            <a:xfrm>
+              <a:off x="548640" y="2377156"/>
+              <a:ext cx="64170" cy="0"/>
+            </a:xfrm>
+            <a:prstGeom prst="line">
+              <a:avLst/>
+            </a:prstGeom>
+            <a:ln w="12700" cap="rnd">
+              <a:solidFill>
+                <a:schemeClr val="tx1"/>
+              </a:solidFill>
+              <a:round/>
+            </a:ln>
+          </p:spPr>
+          <p:style>
+            <a:lnRef idx="2">
+              <a:schemeClr val="accent1"/>
+            </a:lnRef>
+            <a:fillRef idx="0">
+              <a:schemeClr val="accent1"/>
+            </a:fillRef>
+            <a:effectRef idx="1">
+              <a:schemeClr val="accent1"/>
+            </a:effectRef>
+            <a:fontRef idx="minor">
+              <a:schemeClr val="tx1"/>
+            </a:fontRef>
+          </p:style>
+        </p:cxnSp>
+        <p:cxnSp>
+          <p:nvCxnSpPr>
+            <p:cNvPr id="35" name="Gerader Verbinder 34">
+              <a:extLst>
+                <a:ext uri="{FF2B5EF4-FFF2-40B4-BE49-F238E27FC236}">
+                  <a16:creationId xmlns:a16="http://schemas.microsoft.com/office/drawing/2014/main" id="{F43B1B4D-9FAE-0BE3-53E3-37706D20F506}"/>
+                </a:ext>
+              </a:extLst>
+            </p:cNvPr>
+            <p:cNvCxnSpPr>
+              <a:cxnSpLocks/>
+            </p:cNvCxnSpPr>
+            <p:nvPr/>
+          </p:nvCxnSpPr>
+          <p:spPr>
+            <a:xfrm>
+              <a:off x="548640" y="1799940"/>
+              <a:ext cx="64170" cy="0"/>
+            </a:xfrm>
+            <a:prstGeom prst="line">
+              <a:avLst/>
+            </a:prstGeom>
+            <a:ln w="12700" cap="rnd">
+              <a:solidFill>
+                <a:schemeClr val="tx1"/>
+              </a:solidFill>
+              <a:round/>
+            </a:ln>
+          </p:spPr>
+          <p:style>
+            <a:lnRef idx="2">
+              <a:schemeClr val="accent1"/>
+            </a:lnRef>
+            <a:fillRef idx="0">
+              <a:schemeClr val="accent1"/>
+            </a:fillRef>
+            <a:effectRef idx="1">
+              <a:schemeClr val="accent1"/>
+            </a:effectRef>
+            <a:fontRef idx="minor">
+              <a:schemeClr val="tx1"/>
+            </a:fontRef>
+          </p:style>
+        </p:cxnSp>
+        <p:cxnSp>
+          <p:nvCxnSpPr>
+            <p:cNvPr id="36" name="Gerader Verbinder 35">
+              <a:extLst>
+                <a:ext uri="{FF2B5EF4-FFF2-40B4-BE49-F238E27FC236}">
+                  <a16:creationId xmlns:a16="http://schemas.microsoft.com/office/drawing/2014/main" id="{D7464445-CD6B-584C-D198-E71A024869C0}"/>
+                </a:ext>
+              </a:extLst>
+            </p:cNvPr>
+            <p:cNvCxnSpPr>
+              <a:cxnSpLocks/>
+            </p:cNvCxnSpPr>
+            <p:nvPr/>
+          </p:nvCxnSpPr>
+          <p:spPr>
+            <a:xfrm>
+              <a:off x="548640" y="1226164"/>
+              <a:ext cx="64170" cy="0"/>
+            </a:xfrm>
+            <a:prstGeom prst="line">
+              <a:avLst/>
+            </a:prstGeom>
+            <a:ln w="12700" cap="rnd">
+              <a:solidFill>
+                <a:schemeClr val="tx1"/>
+              </a:solidFill>
+              <a:round/>
+            </a:ln>
+          </p:spPr>
+          <p:style>
+            <a:lnRef idx="2">
+              <a:schemeClr val="accent1"/>
+            </a:lnRef>
+            <a:fillRef idx="0">
+              <a:schemeClr val="accent1"/>
+            </a:fillRef>
+            <a:effectRef idx="1">
+              <a:schemeClr val="accent1"/>
+            </a:effectRef>
+            <a:fontRef idx="minor">
+              <a:schemeClr val="tx1"/>
+            </a:fontRef>
+          </p:style>
+        </p:cxnSp>
+        <p:cxnSp>
+          <p:nvCxnSpPr>
+            <p:cNvPr id="37" name="Gerader Verbinder 36">
+              <a:extLst>
+                <a:ext uri="{FF2B5EF4-FFF2-40B4-BE49-F238E27FC236}">
+                  <a16:creationId xmlns:a16="http://schemas.microsoft.com/office/drawing/2014/main" id="{C981F174-DEEF-9363-3996-7552953D15EA}"/>
+                </a:ext>
+              </a:extLst>
+            </p:cNvPr>
+            <p:cNvCxnSpPr>
+              <a:cxnSpLocks/>
+            </p:cNvCxnSpPr>
+            <p:nvPr/>
+          </p:nvCxnSpPr>
+          <p:spPr>
+            <a:xfrm>
+              <a:off x="550545" y="650668"/>
+              <a:ext cx="64170" cy="0"/>
+            </a:xfrm>
+            <a:prstGeom prst="line">
+              <a:avLst/>
+            </a:prstGeom>
+            <a:ln w="12700" cap="rnd">
+              <a:solidFill>
+                <a:schemeClr val="tx1"/>
+              </a:solidFill>
+              <a:round/>
+            </a:ln>
+          </p:spPr>
+          <p:style>
+            <a:lnRef idx="2">
+              <a:schemeClr val="accent1"/>
+            </a:lnRef>
+            <a:fillRef idx="0">
+              <a:schemeClr val="accent1"/>
+            </a:fillRef>
+            <a:effectRef idx="1">
+              <a:schemeClr val="accent1"/>
+            </a:effectRef>
+            <a:fontRef idx="minor">
+              <a:schemeClr val="tx1"/>
+            </a:fontRef>
+          </p:style>
+        </p:cxnSp>
+        <p:sp>
+          <p:nvSpPr>
+            <p:cNvPr id="38" name="Textfeld 37">
+              <a:extLst>
+                <a:ext uri="{FF2B5EF4-FFF2-40B4-BE49-F238E27FC236}">
+                  <a16:creationId xmlns:a16="http://schemas.microsoft.com/office/drawing/2014/main" id="{B721A7DB-1C56-58B6-F7C5-A1ABBC24CCA2}"/>
+                </a:ext>
+              </a:extLst>
+            </p:cNvPr>
+            <p:cNvSpPr txBox="1"/>
+            <p:nvPr/>
+          </p:nvSpPr>
+          <p:spPr>
+            <a:xfrm>
+              <a:off x="181106" y="541227"/>
+              <a:ext cx="412147" cy="215444"/>
+            </a:xfrm>
+            <a:prstGeom prst="rect">
+              <a:avLst/>
+            </a:prstGeom>
+            <a:noFill/>
+          </p:spPr>
+          <p:txBody>
+            <a:bodyPr wrap="square" rtlCol="0" anchor="ctr">
+              <a:spAutoFit/>
+            </a:bodyPr>
+            <a:lstStyle/>
+            <a:p>
+              <a:pPr algn="ctr"/>
+              <a:r>
+                <a:rPr lang="de-DE" sz="800" dirty="0">
+                  <a:latin typeface="CMU Serif" panose="02000603000000000000" pitchFamily="2" charset="0"/>
+                  <a:ea typeface="CMU Serif" panose="02000603000000000000" pitchFamily="2" charset="0"/>
+                  <a:cs typeface="CMU Serif" panose="02000603000000000000" pitchFamily="2" charset="0"/>
+                </a:rPr>
+                <a:t>0,16</a:t>
+              </a:r>
+              <a:endParaRPr lang="de-DE" sz="800" baseline="-25000" dirty="0">
+                <a:latin typeface="CMU Serif" panose="02000603000000000000" pitchFamily="2" charset="0"/>
+                <a:ea typeface="CMU Serif" panose="02000603000000000000" pitchFamily="2" charset="0"/>
+                <a:cs typeface="CMU Serif" panose="02000603000000000000" pitchFamily="2" charset="0"/>
+              </a:endParaRPr>
+            </a:p>
+          </p:txBody>
+        </p:sp>
+        <p:sp>
+          <p:nvSpPr>
+            <p:cNvPr id="39" name="Textfeld 38">
+              <a:extLst>
+                <a:ext uri="{FF2B5EF4-FFF2-40B4-BE49-F238E27FC236}">
+                  <a16:creationId xmlns:a16="http://schemas.microsoft.com/office/drawing/2014/main" id="{DEB91C06-67E0-30F7-D4E6-3B838A656804}"/>
+                </a:ext>
+              </a:extLst>
+            </p:cNvPr>
+            <p:cNvSpPr txBox="1"/>
+            <p:nvPr/>
+          </p:nvSpPr>
+          <p:spPr>
+            <a:xfrm>
+              <a:off x="181106" y="1115863"/>
+              <a:ext cx="412147" cy="215444"/>
+            </a:xfrm>
+            <a:prstGeom prst="rect">
+              <a:avLst/>
+            </a:prstGeom>
+            <a:noFill/>
+          </p:spPr>
+          <p:txBody>
+            <a:bodyPr wrap="square" rtlCol="0" anchor="ctr">
+              <a:spAutoFit/>
+            </a:bodyPr>
+            <a:lstStyle/>
+            <a:p>
+              <a:pPr algn="ctr"/>
+              <a:r>
+                <a:rPr lang="de-DE" sz="800" dirty="0">
+                  <a:latin typeface="CMU Serif" panose="02000603000000000000" pitchFamily="2" charset="0"/>
+                  <a:ea typeface="CMU Serif" panose="02000603000000000000" pitchFamily="2" charset="0"/>
+                  <a:cs typeface="CMU Serif" panose="02000603000000000000" pitchFamily="2" charset="0"/>
+                </a:rPr>
+                <a:t>0,12</a:t>
+              </a:r>
+            </a:p>
+          </p:txBody>
+        </p:sp>
+        <p:sp>
+          <p:nvSpPr>
+            <p:cNvPr id="40" name="Textfeld 39">
+              <a:extLst>
+                <a:ext uri="{FF2B5EF4-FFF2-40B4-BE49-F238E27FC236}">
+                  <a16:creationId xmlns:a16="http://schemas.microsoft.com/office/drawing/2014/main" id="{0D460FE6-49BA-A131-B01D-0336D5937EB1}"/>
+                </a:ext>
+              </a:extLst>
+            </p:cNvPr>
+            <p:cNvSpPr txBox="1"/>
+            <p:nvPr/>
+          </p:nvSpPr>
+          <p:spPr>
+            <a:xfrm>
+              <a:off x="181105" y="1690499"/>
+              <a:ext cx="412147" cy="215444"/>
+            </a:xfrm>
+            <a:prstGeom prst="rect">
+              <a:avLst/>
+            </a:prstGeom>
+            <a:noFill/>
+          </p:spPr>
+          <p:txBody>
+            <a:bodyPr wrap="square" rtlCol="0" anchor="ctr">
+              <a:spAutoFit/>
+            </a:bodyPr>
+            <a:lstStyle/>
+            <a:p>
+              <a:pPr algn="ctr"/>
+              <a:r>
+                <a:rPr lang="de-DE" sz="800" dirty="0">
+                  <a:latin typeface="CMU Serif" panose="02000603000000000000" pitchFamily="2" charset="0"/>
+                  <a:ea typeface="CMU Serif" panose="02000603000000000000" pitchFamily="2" charset="0"/>
+                  <a:cs typeface="CMU Serif" panose="02000603000000000000" pitchFamily="2" charset="0"/>
+                </a:rPr>
+                <a:t>0,08</a:t>
+              </a:r>
+              <a:endParaRPr lang="de-DE" sz="800" baseline="-25000" dirty="0">
+                <a:latin typeface="CMU Serif" panose="02000603000000000000" pitchFamily="2" charset="0"/>
+                <a:ea typeface="CMU Serif" panose="02000603000000000000" pitchFamily="2" charset="0"/>
+                <a:cs typeface="CMU Serif" panose="02000603000000000000" pitchFamily="2" charset="0"/>
+              </a:endParaRPr>
+            </a:p>
+          </p:txBody>
+        </p:sp>
+        <p:sp>
+          <p:nvSpPr>
+            <p:cNvPr id="41" name="Textfeld 40">
+              <a:extLst>
+                <a:ext uri="{FF2B5EF4-FFF2-40B4-BE49-F238E27FC236}">
+                  <a16:creationId xmlns:a16="http://schemas.microsoft.com/office/drawing/2014/main" id="{D9E7EF81-AB4C-2EFE-FBB9-48CBFE359100}"/>
+                </a:ext>
+              </a:extLst>
+            </p:cNvPr>
+            <p:cNvSpPr txBox="1"/>
+            <p:nvPr/>
+          </p:nvSpPr>
+          <p:spPr>
+            <a:xfrm>
+              <a:off x="181105" y="2265994"/>
+              <a:ext cx="412147" cy="215444"/>
+            </a:xfrm>
+            <a:prstGeom prst="rect">
+              <a:avLst/>
+            </a:prstGeom>
+            <a:noFill/>
+          </p:spPr>
+          <p:txBody>
+            <a:bodyPr wrap="square" rtlCol="0" anchor="ctr">
+              <a:spAutoFit/>
+            </a:bodyPr>
+            <a:lstStyle/>
+            <a:p>
+              <a:pPr algn="ctr"/>
+              <a:r>
+                <a:rPr lang="de-DE" sz="800" dirty="0">
+                  <a:latin typeface="CMU Serif" panose="02000603000000000000" pitchFamily="2" charset="0"/>
+                  <a:ea typeface="CMU Serif" panose="02000603000000000000" pitchFamily="2" charset="0"/>
+                  <a:cs typeface="CMU Serif" panose="02000603000000000000" pitchFamily="2" charset="0"/>
+                </a:rPr>
+                <a:t>0,04</a:t>
+              </a:r>
+              <a:endParaRPr lang="de-DE" sz="800" baseline="-25000" dirty="0">
+                <a:latin typeface="CMU Serif" panose="02000603000000000000" pitchFamily="2" charset="0"/>
+                <a:ea typeface="CMU Serif" panose="02000603000000000000" pitchFamily="2" charset="0"/>
+                <a:cs typeface="CMU Serif" panose="02000603000000000000" pitchFamily="2" charset="0"/>
+              </a:endParaRPr>
+            </a:p>
+          </p:txBody>
+        </p:sp>
+        <p:sp>
+          <p:nvSpPr>
+            <p:cNvPr id="42" name="Textfeld 41">
+              <a:extLst>
+                <a:ext uri="{FF2B5EF4-FFF2-40B4-BE49-F238E27FC236}">
+                  <a16:creationId xmlns:a16="http://schemas.microsoft.com/office/drawing/2014/main" id="{8A06907F-8457-E947-E3B0-3B11B00B7271}"/>
+                </a:ext>
+              </a:extLst>
+            </p:cNvPr>
+            <p:cNvSpPr txBox="1"/>
+            <p:nvPr/>
+          </p:nvSpPr>
+          <p:spPr>
+            <a:xfrm>
+              <a:off x="213190" y="2848371"/>
+              <a:ext cx="412147" cy="215444"/>
+            </a:xfrm>
+            <a:prstGeom prst="rect">
+              <a:avLst/>
+            </a:prstGeom>
+            <a:noFill/>
+          </p:spPr>
+          <p:txBody>
+            <a:bodyPr wrap="square" rtlCol="0" anchor="ctr">
+              <a:spAutoFit/>
+            </a:bodyPr>
+            <a:lstStyle/>
+            <a:p>
+              <a:pPr algn="ctr"/>
+              <a:r>
+                <a:rPr lang="de-DE" sz="800" dirty="0">
+                  <a:latin typeface="CMU Serif" panose="02000603000000000000" pitchFamily="2" charset="0"/>
+                  <a:ea typeface="CMU Serif" panose="02000603000000000000" pitchFamily="2" charset="0"/>
+                  <a:cs typeface="CMU Serif" panose="02000603000000000000" pitchFamily="2" charset="0"/>
+                </a:rPr>
+                <a:t>0</a:t>
+              </a:r>
+              <a:endParaRPr lang="de-DE" sz="800" baseline="-25000" dirty="0">
+                <a:latin typeface="CMU Serif" panose="02000603000000000000" pitchFamily="2" charset="0"/>
+                <a:ea typeface="CMU Serif" panose="02000603000000000000" pitchFamily="2" charset="0"/>
+                <a:cs typeface="CMU Serif" panose="02000603000000000000" pitchFamily="2" charset="0"/>
+              </a:endParaRPr>
+            </a:p>
+          </p:txBody>
+        </p:sp>
+        <p:sp>
+          <p:nvSpPr>
+            <p:cNvPr id="43" name="Textfeld 42">
+              <a:extLst>
+                <a:ext uri="{FF2B5EF4-FFF2-40B4-BE49-F238E27FC236}">
+                  <a16:creationId xmlns:a16="http://schemas.microsoft.com/office/drawing/2014/main" id="{16130A72-B53A-0FFC-FF21-41B57CDA68B8}"/>
+                </a:ext>
+              </a:extLst>
+            </p:cNvPr>
+            <p:cNvSpPr txBox="1"/>
+            <p:nvPr/>
+          </p:nvSpPr>
+          <p:spPr>
+            <a:xfrm>
+              <a:off x="434356" y="3030411"/>
+              <a:ext cx="356907" cy="215444"/>
+            </a:xfrm>
+            <a:prstGeom prst="rect">
+              <a:avLst/>
+            </a:prstGeom>
+            <a:noFill/>
+          </p:spPr>
+          <p:txBody>
+            <a:bodyPr wrap="square" rtlCol="0" anchor="ctr">
+              <a:spAutoFit/>
+            </a:bodyPr>
+            <a:lstStyle/>
+            <a:p>
+              <a:pPr algn="ctr"/>
+              <a:r>
+                <a:rPr lang="de-DE" sz="800" dirty="0">
+                  <a:latin typeface="CMU Serif" panose="02000603000000000000" pitchFamily="2" charset="0"/>
+                  <a:ea typeface="CMU Serif" panose="02000603000000000000" pitchFamily="2" charset="0"/>
+                  <a:cs typeface="CMU Serif" panose="02000603000000000000" pitchFamily="2" charset="0"/>
+                </a:rPr>
+                <a:t>0</a:t>
+              </a:r>
+              <a:endParaRPr lang="de-DE" sz="800" baseline="-25000" dirty="0">
+                <a:latin typeface="CMU Serif" panose="02000603000000000000" pitchFamily="2" charset="0"/>
+                <a:ea typeface="CMU Serif" panose="02000603000000000000" pitchFamily="2" charset="0"/>
+                <a:cs typeface="CMU Serif" panose="02000603000000000000" pitchFamily="2" charset="0"/>
+              </a:endParaRPr>
+            </a:p>
+          </p:txBody>
+        </p:sp>
+        <p:sp>
+          <p:nvSpPr>
+            <p:cNvPr id="44" name="Textfeld 43">
+              <a:extLst>
+                <a:ext uri="{FF2B5EF4-FFF2-40B4-BE49-F238E27FC236}">
+                  <a16:creationId xmlns:a16="http://schemas.microsoft.com/office/drawing/2014/main" id="{1EE4F030-7E5E-6278-3244-D2813CC18B29}"/>
+                </a:ext>
+              </a:extLst>
+            </p:cNvPr>
+            <p:cNvSpPr txBox="1"/>
+            <p:nvPr/>
+          </p:nvSpPr>
+          <p:spPr>
+            <a:xfrm>
+              <a:off x="908462" y="3025596"/>
+              <a:ext cx="356907" cy="215444"/>
+            </a:xfrm>
+            <a:prstGeom prst="rect">
+              <a:avLst/>
+            </a:prstGeom>
+            <a:noFill/>
+          </p:spPr>
+          <p:txBody>
+            <a:bodyPr wrap="square" rtlCol="0" anchor="ctr">
+              <a:spAutoFit/>
+            </a:bodyPr>
+            <a:lstStyle/>
+            <a:p>
+              <a:pPr algn="ctr"/>
+              <a:r>
+                <a:rPr lang="de-DE" sz="800" dirty="0">
+                  <a:latin typeface="CMU Serif" panose="02000603000000000000" pitchFamily="2" charset="0"/>
+                  <a:ea typeface="CMU Serif" panose="02000603000000000000" pitchFamily="2" charset="0"/>
+                  <a:cs typeface="CMU Serif" panose="02000603000000000000" pitchFamily="2" charset="0"/>
+                </a:rPr>
+                <a:t>0,2</a:t>
+              </a:r>
+              <a:endParaRPr lang="de-DE" sz="800" baseline="-25000" dirty="0">
+                <a:latin typeface="CMU Serif" panose="02000603000000000000" pitchFamily="2" charset="0"/>
+                <a:ea typeface="CMU Serif" panose="02000603000000000000" pitchFamily="2" charset="0"/>
+                <a:cs typeface="CMU Serif" panose="02000603000000000000" pitchFamily="2" charset="0"/>
+              </a:endParaRPr>
+            </a:p>
+          </p:txBody>
+        </p:sp>
+        <p:sp>
+          <p:nvSpPr>
+            <p:cNvPr id="45" name="Textfeld 44">
+              <a:extLst>
+                <a:ext uri="{FF2B5EF4-FFF2-40B4-BE49-F238E27FC236}">
+                  <a16:creationId xmlns:a16="http://schemas.microsoft.com/office/drawing/2014/main" id="{589CF959-E7E1-7C61-46C4-2E98A5EF95B5}"/>
+                </a:ext>
+              </a:extLst>
+            </p:cNvPr>
+            <p:cNvSpPr txBox="1"/>
+            <p:nvPr/>
+          </p:nvSpPr>
+          <p:spPr>
+            <a:xfrm>
+              <a:off x="1382568" y="3025595"/>
+              <a:ext cx="356907" cy="215444"/>
+            </a:xfrm>
+            <a:prstGeom prst="rect">
+              <a:avLst/>
+            </a:prstGeom>
+            <a:noFill/>
+          </p:spPr>
+          <p:txBody>
+            <a:bodyPr wrap="square" rtlCol="0" anchor="ctr">
+              <a:spAutoFit/>
+            </a:bodyPr>
+            <a:lstStyle/>
+            <a:p>
+              <a:pPr algn="ctr"/>
+              <a:r>
+                <a:rPr lang="de-DE" sz="800" dirty="0">
+                  <a:latin typeface="CMU Serif" panose="02000603000000000000" pitchFamily="2" charset="0"/>
+                  <a:ea typeface="CMU Serif" panose="02000603000000000000" pitchFamily="2" charset="0"/>
+                  <a:cs typeface="CMU Serif" panose="02000603000000000000" pitchFamily="2" charset="0"/>
+                </a:rPr>
+                <a:t>0,4</a:t>
+              </a:r>
+              <a:endParaRPr lang="de-DE" sz="800" baseline="-25000" dirty="0">
+                <a:latin typeface="CMU Serif" panose="02000603000000000000" pitchFamily="2" charset="0"/>
+                <a:ea typeface="CMU Serif" panose="02000603000000000000" pitchFamily="2" charset="0"/>
+                <a:cs typeface="CMU Serif" panose="02000603000000000000" pitchFamily="2" charset="0"/>
+              </a:endParaRPr>
+            </a:p>
+          </p:txBody>
+        </p:sp>
+        <p:sp>
+          <p:nvSpPr>
+            <p:cNvPr id="46" name="Textfeld 45">
+              <a:extLst>
+                <a:ext uri="{FF2B5EF4-FFF2-40B4-BE49-F238E27FC236}">
+                  <a16:creationId xmlns:a16="http://schemas.microsoft.com/office/drawing/2014/main" id="{DBE7F180-3B61-07D6-3C90-E46A0E995FF5}"/>
+                </a:ext>
+              </a:extLst>
+            </p:cNvPr>
+            <p:cNvSpPr txBox="1"/>
+            <p:nvPr/>
+          </p:nvSpPr>
+          <p:spPr>
+            <a:xfrm>
+              <a:off x="1856674" y="3025594"/>
+              <a:ext cx="356907" cy="215444"/>
+            </a:xfrm>
+            <a:prstGeom prst="rect">
+              <a:avLst/>
+            </a:prstGeom>
+            <a:noFill/>
+          </p:spPr>
+          <p:txBody>
+            <a:bodyPr wrap="square" rtlCol="0" anchor="ctr">
+              <a:spAutoFit/>
+            </a:bodyPr>
+            <a:lstStyle/>
+            <a:p>
+              <a:pPr algn="ctr"/>
+              <a:r>
+                <a:rPr lang="de-DE" sz="800" dirty="0">
+                  <a:latin typeface="CMU Serif" panose="02000603000000000000" pitchFamily="2" charset="0"/>
+                  <a:ea typeface="CMU Serif" panose="02000603000000000000" pitchFamily="2" charset="0"/>
+                  <a:cs typeface="CMU Serif" panose="02000603000000000000" pitchFamily="2" charset="0"/>
+                </a:rPr>
+                <a:t>0,6</a:t>
+              </a:r>
+              <a:endParaRPr lang="de-DE" sz="800" baseline="-25000" dirty="0">
+                <a:latin typeface="CMU Serif" panose="02000603000000000000" pitchFamily="2" charset="0"/>
+                <a:ea typeface="CMU Serif" panose="02000603000000000000" pitchFamily="2" charset="0"/>
+                <a:cs typeface="CMU Serif" panose="02000603000000000000" pitchFamily="2" charset="0"/>
+              </a:endParaRPr>
+            </a:p>
+          </p:txBody>
+        </p:sp>
+        <p:sp>
+          <p:nvSpPr>
+            <p:cNvPr id="47" name="Textfeld 46">
+              <a:extLst>
+                <a:ext uri="{FF2B5EF4-FFF2-40B4-BE49-F238E27FC236}">
+                  <a16:creationId xmlns:a16="http://schemas.microsoft.com/office/drawing/2014/main" id="{A6107613-11D1-5E4B-4933-0A5FD50C5D8E}"/>
+                </a:ext>
+              </a:extLst>
+            </p:cNvPr>
+            <p:cNvSpPr txBox="1"/>
+            <p:nvPr/>
+          </p:nvSpPr>
+          <p:spPr>
+            <a:xfrm>
+              <a:off x="2330780" y="3025593"/>
+              <a:ext cx="356907" cy="215444"/>
+            </a:xfrm>
+            <a:prstGeom prst="rect">
+              <a:avLst/>
+            </a:prstGeom>
+            <a:noFill/>
+          </p:spPr>
+          <p:txBody>
+            <a:bodyPr wrap="square" rtlCol="0" anchor="ctr">
+              <a:spAutoFit/>
+            </a:bodyPr>
+            <a:lstStyle/>
+            <a:p>
+              <a:pPr algn="ctr"/>
+              <a:r>
+                <a:rPr lang="de-DE" sz="800" dirty="0">
+                  <a:latin typeface="CMU Serif" panose="02000603000000000000" pitchFamily="2" charset="0"/>
+                  <a:ea typeface="CMU Serif" panose="02000603000000000000" pitchFamily="2" charset="0"/>
+                  <a:cs typeface="CMU Serif" panose="02000603000000000000" pitchFamily="2" charset="0"/>
+                </a:rPr>
+                <a:t>0,8</a:t>
+              </a:r>
+              <a:endParaRPr lang="de-DE" sz="800" baseline="-25000" dirty="0">
+                <a:latin typeface="CMU Serif" panose="02000603000000000000" pitchFamily="2" charset="0"/>
+                <a:ea typeface="CMU Serif" panose="02000603000000000000" pitchFamily="2" charset="0"/>
+                <a:cs typeface="CMU Serif" panose="02000603000000000000" pitchFamily="2" charset="0"/>
+              </a:endParaRPr>
+            </a:p>
+          </p:txBody>
+        </p:sp>
+        <p:sp>
+          <p:nvSpPr>
+            <p:cNvPr id="48" name="Textfeld 47">
+              <a:extLst>
+                <a:ext uri="{FF2B5EF4-FFF2-40B4-BE49-F238E27FC236}">
+                  <a16:creationId xmlns:a16="http://schemas.microsoft.com/office/drawing/2014/main" id="{CA4066A9-6BC8-B0F8-3E47-BA7B47274121}"/>
+                </a:ext>
+              </a:extLst>
+            </p:cNvPr>
+            <p:cNvSpPr txBox="1"/>
+            <p:nvPr/>
+          </p:nvSpPr>
+          <p:spPr>
+            <a:xfrm>
+              <a:off x="2804886" y="3023580"/>
+              <a:ext cx="356907" cy="215444"/>
+            </a:xfrm>
+            <a:prstGeom prst="rect">
+              <a:avLst/>
+            </a:prstGeom>
+            <a:noFill/>
+          </p:spPr>
+          <p:txBody>
+            <a:bodyPr wrap="square" rtlCol="0" anchor="ctr">
+              <a:spAutoFit/>
+            </a:bodyPr>
+            <a:lstStyle/>
+            <a:p>
+              <a:pPr algn="ctr"/>
+              <a:r>
+                <a:rPr lang="de-DE" sz="800" dirty="0">
+                  <a:latin typeface="CMU Serif" panose="02000603000000000000" pitchFamily="2" charset="0"/>
+                  <a:ea typeface="CMU Serif" panose="02000603000000000000" pitchFamily="2" charset="0"/>
+                  <a:cs typeface="CMU Serif" panose="02000603000000000000" pitchFamily="2" charset="0"/>
+                </a:rPr>
+                <a:t>1,0</a:t>
+              </a:r>
+              <a:endParaRPr lang="de-DE" sz="800" baseline="-25000" dirty="0">
+                <a:latin typeface="CMU Serif" panose="02000603000000000000" pitchFamily="2" charset="0"/>
+                <a:ea typeface="CMU Serif" panose="02000603000000000000" pitchFamily="2" charset="0"/>
+                <a:cs typeface="CMU Serif" panose="02000603000000000000" pitchFamily="2" charset="0"/>
+              </a:endParaRPr>
+            </a:p>
+          </p:txBody>
+        </p:sp>
+      </p:grpSp>
+      <p:sp>
+        <p:nvSpPr>
+          <p:cNvPr id="62" name="Rechteck 61">
+            <a:extLst>
+              <a:ext uri="{FF2B5EF4-FFF2-40B4-BE49-F238E27FC236}">
+                <a16:creationId xmlns:a16="http://schemas.microsoft.com/office/drawing/2014/main" id="{4C9A8623-824D-5A61-F8E1-0F7607F3BC5F}"/>
+              </a:ext>
+            </a:extLst>
+          </p:cNvPr>
+          <p:cNvSpPr/>
+          <p:nvPr/>
+        </p:nvSpPr>
+        <p:spPr>
+          <a:xfrm>
+            <a:off x="2461030" y="1545193"/>
+            <a:ext cx="254874" cy="137108"/>
+          </a:xfrm>
+          <a:prstGeom prst="rect">
+            <a:avLst/>
+          </a:prstGeom>
+          <a:solidFill>
+            <a:schemeClr val="bg1"/>
+          </a:solidFill>
+          <a:ln>
+            <a:noFill/>
+          </a:ln>
+        </p:spPr>
+        <p:style>
+          <a:lnRef idx="2">
+            <a:schemeClr val="accent1">
+              <a:shade val="15000"/>
+            </a:schemeClr>
+          </a:lnRef>
+          <a:fillRef idx="1">
+            <a:schemeClr val="accent1"/>
+          </a:fillRef>
+          <a:effectRef idx="0">
+            <a:schemeClr val="accent1"/>
+          </a:effectRef>
+          <a:fontRef idx="minor">
+            <a:schemeClr val="lt1"/>
+          </a:fontRef>
+        </p:style>
+        <p:txBody>
+          <a:bodyPr rtlCol="0" anchor="ctr"/>
+          <a:lstStyle/>
+          <a:p>
+            <a:pPr algn="ctr"/>
+            <a:endParaRPr lang="de-DE"/>
+          </a:p>
+        </p:txBody>
+      </p:sp>
+      <p:sp>
+        <p:nvSpPr>
+          <p:cNvPr id="52" name="Textfeld 51">
+            <a:extLst>
+              <a:ext uri="{FF2B5EF4-FFF2-40B4-BE49-F238E27FC236}">
+                <a16:creationId xmlns:a16="http://schemas.microsoft.com/office/drawing/2014/main" id="{546A3AD7-2388-FF4D-094F-AB47E15F56F8}"/>
+              </a:ext>
+            </a:extLst>
+          </p:cNvPr>
+          <p:cNvSpPr txBox="1"/>
+          <p:nvPr/>
+        </p:nvSpPr>
+        <p:spPr>
+          <a:xfrm>
+            <a:off x="1711156" y="3126962"/>
+            <a:ext cx="356907" cy="215444"/>
+          </a:xfrm>
+          <a:prstGeom prst="rect">
+            <a:avLst/>
+          </a:prstGeom>
+          <a:noFill/>
+        </p:spPr>
+        <p:txBody>
+          <a:bodyPr wrap="square" rtlCol="0" anchor="ctr">
+            <a:spAutoFit/>
+          </a:bodyPr>
+          <a:lstStyle/>
+          <a:p>
+            <a:pPr algn="ctr"/>
+            <a:r>
+              <a:rPr lang="de-DE" sz="800" i="1" dirty="0">
+                <a:latin typeface="Latin Modern Math" panose="02000503000000000000" pitchFamily="50" charset="0"/>
+                <a:ea typeface="Latin Modern Math" panose="02000503000000000000" pitchFamily="50" charset="0"/>
+                <a:cs typeface="CMU Serif" panose="02000603000000000000" pitchFamily="2" charset="0"/>
+              </a:rPr>
+              <a:t>λ</a:t>
+            </a:r>
+            <a:endParaRPr lang="de-DE" sz="800" i="1" baseline="-25000" dirty="0">
+              <a:latin typeface="Latin Modern Math" panose="02000503000000000000" pitchFamily="50" charset="0"/>
+              <a:ea typeface="Latin Modern Math" panose="02000503000000000000" pitchFamily="50" charset="0"/>
+              <a:cs typeface="CMU Serif" panose="02000603000000000000" pitchFamily="2" charset="0"/>
+            </a:endParaRPr>
+          </a:p>
+        </p:txBody>
+      </p:sp>
+      <p:sp>
+        <p:nvSpPr>
+          <p:cNvPr id="53" name="Textfeld 52">
+            <a:extLst>
+              <a:ext uri="{FF2B5EF4-FFF2-40B4-BE49-F238E27FC236}">
+                <a16:creationId xmlns:a16="http://schemas.microsoft.com/office/drawing/2014/main" id="{7F4CB9EF-4F44-BC04-E829-6A9E01CEEE50}"/>
+              </a:ext>
+            </a:extLst>
+          </p:cNvPr>
+          <p:cNvSpPr txBox="1"/>
+          <p:nvPr/>
+        </p:nvSpPr>
+        <p:spPr>
+          <a:xfrm>
+            <a:off x="318711" y="768863"/>
+            <a:ext cx="356907" cy="215444"/>
+          </a:xfrm>
+          <a:prstGeom prst="rect">
+            <a:avLst/>
+          </a:prstGeom>
+          <a:noFill/>
+        </p:spPr>
+        <p:txBody>
+          <a:bodyPr wrap="square" rtlCol="0" anchor="ctr">
+            <a:spAutoFit/>
+          </a:bodyPr>
+          <a:lstStyle/>
+          <a:p>
+            <a:pPr algn="ctr"/>
+            <a:r>
+              <a:rPr lang="de-DE" sz="800" i="1" dirty="0">
+                <a:latin typeface="Latin Modern Math" panose="02000503000000000000" pitchFamily="50" charset="0"/>
+                <a:ea typeface="Latin Modern Math" panose="02000503000000000000" pitchFamily="50" charset="0"/>
+                <a:cs typeface="CMU Serif" panose="02000603000000000000" pitchFamily="2" charset="0"/>
+              </a:rPr>
+              <a:t>δ</a:t>
+            </a:r>
+            <a:endParaRPr lang="de-DE" sz="800" i="1" baseline="-25000" dirty="0">
+              <a:latin typeface="Latin Modern Math" panose="02000503000000000000" pitchFamily="50" charset="0"/>
+              <a:ea typeface="Latin Modern Math" panose="02000503000000000000" pitchFamily="50" charset="0"/>
+              <a:cs typeface="CMU Serif" panose="02000603000000000000" pitchFamily="2" charset="0"/>
+            </a:endParaRPr>
+          </a:p>
+        </p:txBody>
+      </p:sp>
+      <p:sp>
+        <p:nvSpPr>
+          <p:cNvPr id="54" name="Freihandform: Form 53">
+            <a:extLst>
+              <a:ext uri="{FF2B5EF4-FFF2-40B4-BE49-F238E27FC236}">
+                <a16:creationId xmlns:a16="http://schemas.microsoft.com/office/drawing/2014/main" id="{B94B4EC5-74EE-1552-5E90-561BED20E40C}"/>
+              </a:ext>
+            </a:extLst>
+          </p:cNvPr>
+          <p:cNvSpPr/>
+          <p:nvPr/>
+        </p:nvSpPr>
+        <p:spPr>
+          <a:xfrm>
+            <a:off x="710565" y="692064"/>
+            <a:ext cx="2366010" cy="2106640"/>
+          </a:xfrm>
+          <a:custGeom>
+            <a:avLst/>
+            <a:gdLst>
+              <a:gd name="csX0" fmla="*/ 0 w 2383076"/>
+              <a:gd name="csY0" fmla="*/ 0 h 2082558"/>
+              <a:gd name="csX1" fmla="*/ 303756 w 2383076"/>
+              <a:gd name="csY1" fmla="*/ 1734855 h 2082558"/>
+              <a:gd name="csX2" fmla="*/ 591854 w 2383076"/>
+              <a:gd name="csY2" fmla="*/ 2076189 h 2082558"/>
+              <a:gd name="csX3" fmla="*/ 1180578 w 2383076"/>
+              <a:gd name="csY3" fmla="*/ 1910219 h 2082558"/>
+              <a:gd name="csX4" fmla="*/ 1781827 w 2383076"/>
+              <a:gd name="csY4" fmla="*/ 1349679 h 2082558"/>
+              <a:gd name="csX5" fmla="*/ 2383076 w 2383076"/>
+              <a:gd name="csY5" fmla="*/ 670142 h 2082558"/>
+              <a:gd name="csX0" fmla="*/ 0 w 2383076"/>
+              <a:gd name="csY0" fmla="*/ 0 h 2082558"/>
+              <a:gd name="csX1" fmla="*/ 303756 w 2383076"/>
+              <a:gd name="csY1" fmla="*/ 1734855 h 2082558"/>
+              <a:gd name="csX2" fmla="*/ 591854 w 2383076"/>
+              <a:gd name="csY2" fmla="*/ 2076189 h 2082558"/>
+              <a:gd name="csX3" fmla="*/ 1180578 w 2383076"/>
+              <a:gd name="csY3" fmla="*/ 1910219 h 2082558"/>
+              <a:gd name="csX4" fmla="*/ 1781827 w 2383076"/>
+              <a:gd name="csY4" fmla="*/ 1349679 h 2082558"/>
+              <a:gd name="csX5" fmla="*/ 2383076 w 2383076"/>
+              <a:gd name="csY5" fmla="*/ 670142 h 2082558"/>
+              <a:gd name="csX0" fmla="*/ 0 w 2383076"/>
+              <a:gd name="csY0" fmla="*/ 0 h 2103263"/>
+              <a:gd name="csX1" fmla="*/ 303756 w 2383076"/>
+              <a:gd name="csY1" fmla="*/ 1734855 h 2103263"/>
+              <a:gd name="csX2" fmla="*/ 591854 w 2383076"/>
+              <a:gd name="csY2" fmla="*/ 2076189 h 2103263"/>
+              <a:gd name="csX3" fmla="*/ 1180578 w 2383076"/>
+              <a:gd name="csY3" fmla="*/ 1910219 h 2103263"/>
+              <a:gd name="csX4" fmla="*/ 1781827 w 2383076"/>
+              <a:gd name="csY4" fmla="*/ 1349679 h 2103263"/>
+              <a:gd name="csX5" fmla="*/ 2383076 w 2383076"/>
+              <a:gd name="csY5" fmla="*/ 670142 h 2103263"/>
+              <a:gd name="csX0" fmla="*/ 0 w 2383076"/>
+              <a:gd name="csY0" fmla="*/ 0 h 2106144"/>
+              <a:gd name="csX1" fmla="*/ 303756 w 2383076"/>
+              <a:gd name="csY1" fmla="*/ 1734855 h 2106144"/>
+              <a:gd name="csX2" fmla="*/ 591854 w 2383076"/>
+              <a:gd name="csY2" fmla="*/ 2076189 h 2106144"/>
+              <a:gd name="csX3" fmla="*/ 1180578 w 2383076"/>
+              <a:gd name="csY3" fmla="*/ 1910219 h 2106144"/>
+              <a:gd name="csX4" fmla="*/ 1781827 w 2383076"/>
+              <a:gd name="csY4" fmla="*/ 1349679 h 2106144"/>
+              <a:gd name="csX5" fmla="*/ 2383076 w 2383076"/>
+              <a:gd name="csY5" fmla="*/ 670142 h 2106144"/>
+              <a:gd name="csX0" fmla="*/ 0 w 2383076"/>
+              <a:gd name="csY0" fmla="*/ 0 h 2108624"/>
+              <a:gd name="csX1" fmla="*/ 303756 w 2383076"/>
+              <a:gd name="csY1" fmla="*/ 1734855 h 2108624"/>
+              <a:gd name="csX2" fmla="*/ 591854 w 2383076"/>
+              <a:gd name="csY2" fmla="*/ 2076189 h 2108624"/>
+              <a:gd name="csX3" fmla="*/ 1180578 w 2383076"/>
+              <a:gd name="csY3" fmla="*/ 1910219 h 2108624"/>
+              <a:gd name="csX4" fmla="*/ 1781827 w 2383076"/>
+              <a:gd name="csY4" fmla="*/ 1349679 h 2108624"/>
+              <a:gd name="csX5" fmla="*/ 2383076 w 2383076"/>
+              <a:gd name="csY5" fmla="*/ 670142 h 2108624"/>
+              <a:gd name="csX0" fmla="*/ 0 w 2383076"/>
+              <a:gd name="csY0" fmla="*/ 0 h 2085300"/>
+              <a:gd name="csX1" fmla="*/ 303756 w 2383076"/>
+              <a:gd name="csY1" fmla="*/ 1734855 h 2085300"/>
+              <a:gd name="csX2" fmla="*/ 591854 w 2383076"/>
+              <a:gd name="csY2" fmla="*/ 2076189 h 2085300"/>
+              <a:gd name="csX3" fmla="*/ 1178673 w 2383076"/>
+              <a:gd name="csY3" fmla="*/ 1908314 h 2085300"/>
+              <a:gd name="csX4" fmla="*/ 1781827 w 2383076"/>
+              <a:gd name="csY4" fmla="*/ 1349679 h 2085300"/>
+              <a:gd name="csX5" fmla="*/ 2383076 w 2383076"/>
+              <a:gd name="csY5" fmla="*/ 670142 h 2085300"/>
+              <a:gd name="csX0" fmla="*/ 0 w 2383076"/>
+              <a:gd name="csY0" fmla="*/ 0 h 2104106"/>
+              <a:gd name="csX1" fmla="*/ 303756 w 2383076"/>
+              <a:gd name="csY1" fmla="*/ 1734855 h 2104106"/>
+              <a:gd name="csX2" fmla="*/ 591854 w 2383076"/>
+              <a:gd name="csY2" fmla="*/ 2076189 h 2104106"/>
+              <a:gd name="csX3" fmla="*/ 1178673 w 2383076"/>
+              <a:gd name="csY3" fmla="*/ 1908314 h 2104106"/>
+              <a:gd name="csX4" fmla="*/ 1781827 w 2383076"/>
+              <a:gd name="csY4" fmla="*/ 1349679 h 2104106"/>
+              <a:gd name="csX5" fmla="*/ 2383076 w 2383076"/>
+              <a:gd name="csY5" fmla="*/ 670142 h 2104106"/>
+              <a:gd name="csX0" fmla="*/ 0 w 2383076"/>
+              <a:gd name="csY0" fmla="*/ 0 h 2098989"/>
+              <a:gd name="csX1" fmla="*/ 303756 w 2383076"/>
+              <a:gd name="csY1" fmla="*/ 1734855 h 2098989"/>
+              <a:gd name="csX2" fmla="*/ 591854 w 2383076"/>
+              <a:gd name="csY2" fmla="*/ 2076189 h 2098989"/>
+              <a:gd name="csX3" fmla="*/ 1178673 w 2383076"/>
+              <a:gd name="csY3" fmla="*/ 1908314 h 2098989"/>
+              <a:gd name="csX4" fmla="*/ 1774207 w 2383076"/>
+              <a:gd name="csY4" fmla="*/ 1355394 h 2098989"/>
+              <a:gd name="csX5" fmla="*/ 2383076 w 2383076"/>
+              <a:gd name="csY5" fmla="*/ 670142 h 2098989"/>
+              <a:gd name="csX0" fmla="*/ 0 w 2383076"/>
+              <a:gd name="csY0" fmla="*/ 0 h 2104321"/>
+              <a:gd name="csX1" fmla="*/ 303756 w 2383076"/>
+              <a:gd name="csY1" fmla="*/ 1734855 h 2104321"/>
+              <a:gd name="csX2" fmla="*/ 591854 w 2383076"/>
+              <a:gd name="csY2" fmla="*/ 2076189 h 2104321"/>
+              <a:gd name="csX3" fmla="*/ 1178673 w 2383076"/>
+              <a:gd name="csY3" fmla="*/ 1908314 h 2104321"/>
+              <a:gd name="csX4" fmla="*/ 1774207 w 2383076"/>
+              <a:gd name="csY4" fmla="*/ 1355394 h 2104321"/>
+              <a:gd name="csX5" fmla="*/ 2383076 w 2383076"/>
+              <a:gd name="csY5" fmla="*/ 670142 h 2104321"/>
+              <a:gd name="csX0" fmla="*/ 0 w 2383076"/>
+              <a:gd name="csY0" fmla="*/ 0 h 2106640"/>
+              <a:gd name="csX1" fmla="*/ 303756 w 2383076"/>
+              <a:gd name="csY1" fmla="*/ 1734855 h 2106640"/>
+              <a:gd name="csX2" fmla="*/ 591854 w 2383076"/>
+              <a:gd name="csY2" fmla="*/ 2076189 h 2106640"/>
+              <a:gd name="csX3" fmla="*/ 1178673 w 2383076"/>
+              <a:gd name="csY3" fmla="*/ 1908314 h 2106640"/>
+              <a:gd name="csX4" fmla="*/ 1774207 w 2383076"/>
+              <a:gd name="csY4" fmla="*/ 1355394 h 2106640"/>
+              <a:gd name="csX5" fmla="*/ 2383076 w 2383076"/>
+              <a:gd name="csY5" fmla="*/ 670142 h 2106640"/>
+              <a:gd name="csX0" fmla="*/ 0 w 2383076"/>
+              <a:gd name="csY0" fmla="*/ 0 h 2106640"/>
+              <a:gd name="csX1" fmla="*/ 303756 w 2383076"/>
+              <a:gd name="csY1" fmla="*/ 1734855 h 2106640"/>
+              <a:gd name="csX2" fmla="*/ 591854 w 2383076"/>
+              <a:gd name="csY2" fmla="*/ 2076189 h 2106640"/>
+              <a:gd name="csX3" fmla="*/ 1178673 w 2383076"/>
+              <a:gd name="csY3" fmla="*/ 1908314 h 2106640"/>
+              <a:gd name="csX4" fmla="*/ 1774207 w 2383076"/>
+              <a:gd name="csY4" fmla="*/ 1355394 h 2106640"/>
+              <a:gd name="csX5" fmla="*/ 2383076 w 2383076"/>
+              <a:gd name="csY5" fmla="*/ 670142 h 2106640"/>
+            </a:gdLst>
+            <a:ahLst/>
+            <a:cxnLst>
+              <a:cxn ang="0">
+                <a:pos x="csX0" y="csY0"/>
+              </a:cxn>
+              <a:cxn ang="0">
+                <a:pos x="csX1" y="csY1"/>
+              </a:cxn>
+              <a:cxn ang="0">
+                <a:pos x="csX2" y="csY2"/>
+              </a:cxn>
+              <a:cxn ang="0">
+                <a:pos x="csX3" y="csY3"/>
+              </a:cxn>
+              <a:cxn ang="0">
+                <a:pos x="csX4" y="csY4"/>
+              </a:cxn>
+              <a:cxn ang="0">
+                <a:pos x="csX5" y="csY5"/>
+              </a:cxn>
+            </a:cxnLst>
+            <a:rect l="l" t="t" r="r" b="b"/>
+            <a:pathLst>
+              <a:path w="2383076" h="2106640">
+                <a:moveTo>
+                  <a:pt x="0" y="0"/>
+                </a:moveTo>
+                <a:cubicBezTo>
+                  <a:pt x="68267" y="1109702"/>
+                  <a:pt x="218449" y="1567894"/>
+                  <a:pt x="303756" y="1734855"/>
+                </a:cubicBezTo>
+                <a:cubicBezTo>
+                  <a:pt x="389063" y="1901816"/>
+                  <a:pt x="423175" y="1982509"/>
+                  <a:pt x="591854" y="2076189"/>
+                </a:cubicBezTo>
+                <a:cubicBezTo>
+                  <a:pt x="760533" y="2169869"/>
+                  <a:pt x="981614" y="2028446"/>
+                  <a:pt x="1178673" y="1908314"/>
+                </a:cubicBezTo>
+                <a:cubicBezTo>
+                  <a:pt x="1375732" y="1788182"/>
+                  <a:pt x="1573791" y="1562073"/>
+                  <a:pt x="1774207" y="1355394"/>
+                </a:cubicBezTo>
+                <a:cubicBezTo>
+                  <a:pt x="1974623" y="1148715"/>
+                  <a:pt x="2182659" y="906571"/>
+                  <a:pt x="2383076" y="670142"/>
+                </a:cubicBezTo>
+              </a:path>
+            </a:pathLst>
+          </a:custGeom>
+          <a:noFill/>
+          <a:ln cap="rnd">
+            <a:solidFill>
+              <a:schemeClr val="accent6">
+                <a:lumMod val="75000"/>
+              </a:schemeClr>
+            </a:solidFill>
+            <a:round/>
+          </a:ln>
+        </p:spPr>
+        <p:style>
+          <a:lnRef idx="2">
+            <a:schemeClr val="accent1">
+              <a:shade val="15000"/>
+            </a:schemeClr>
+          </a:lnRef>
+          <a:fillRef idx="1">
+            <a:schemeClr val="accent1"/>
+          </a:fillRef>
+          <a:effectRef idx="0">
+            <a:schemeClr val="accent1"/>
+          </a:effectRef>
+          <a:fontRef idx="minor">
+            <a:schemeClr val="lt1"/>
+          </a:fontRef>
+        </p:style>
+        <p:txBody>
+          <a:bodyPr rtlCol="0" anchor="ctr"/>
+          <a:lstStyle/>
+          <a:p>
+            <a:pPr algn="ctr"/>
+            <a:endParaRPr lang="de-DE"/>
+          </a:p>
+        </p:txBody>
+      </p:sp>
+      <p:sp>
+        <p:nvSpPr>
+          <p:cNvPr id="55" name="Freihandform: Form 54">
+            <a:extLst>
+              <a:ext uri="{FF2B5EF4-FFF2-40B4-BE49-F238E27FC236}">
+                <a16:creationId xmlns:a16="http://schemas.microsoft.com/office/drawing/2014/main" id="{523CF2AF-B700-41B1-56DF-079E37A9F36F}"/>
+              </a:ext>
+            </a:extLst>
+          </p:cNvPr>
+          <p:cNvSpPr/>
+          <p:nvPr/>
+        </p:nvSpPr>
+        <p:spPr>
+          <a:xfrm>
+            <a:off x="710565" y="986791"/>
+            <a:ext cx="2367915" cy="1866984"/>
+          </a:xfrm>
+          <a:custGeom>
+            <a:avLst/>
+            <a:gdLst>
+              <a:gd name="csX0" fmla="*/ 0 w 2377440"/>
+              <a:gd name="csY0" fmla="*/ 0 h 1851059"/>
+              <a:gd name="csX1" fmla="*/ 300990 w 2377440"/>
+              <a:gd name="csY1" fmla="*/ 1550670 h 1851059"/>
+              <a:gd name="csX2" fmla="*/ 586740 w 2377440"/>
+              <a:gd name="csY2" fmla="*/ 1845945 h 1851059"/>
+              <a:gd name="csX3" fmla="*/ 1175385 w 2377440"/>
+              <a:gd name="csY3" fmla="*/ 1701165 h 1851059"/>
+              <a:gd name="csX4" fmla="*/ 1771650 w 2377440"/>
+              <a:gd name="csY4" fmla="*/ 1247775 h 1851059"/>
+              <a:gd name="csX5" fmla="*/ 2377440 w 2377440"/>
+              <a:gd name="csY5" fmla="*/ 672465 h 1851059"/>
+              <a:gd name="csX0" fmla="*/ 0 w 2377440"/>
+              <a:gd name="csY0" fmla="*/ 0 h 1851059"/>
+              <a:gd name="csX1" fmla="*/ 300990 w 2377440"/>
+              <a:gd name="csY1" fmla="*/ 1550670 h 1851059"/>
+              <a:gd name="csX2" fmla="*/ 586740 w 2377440"/>
+              <a:gd name="csY2" fmla="*/ 1845945 h 1851059"/>
+              <a:gd name="csX3" fmla="*/ 1175385 w 2377440"/>
+              <a:gd name="csY3" fmla="*/ 1701165 h 1851059"/>
+              <a:gd name="csX4" fmla="*/ 1771650 w 2377440"/>
+              <a:gd name="csY4" fmla="*/ 1247775 h 1851059"/>
+              <a:gd name="csX5" fmla="*/ 2377440 w 2377440"/>
+              <a:gd name="csY5" fmla="*/ 672465 h 1851059"/>
+              <a:gd name="csX0" fmla="*/ 0 w 2377440"/>
+              <a:gd name="csY0" fmla="*/ 0 h 1851059"/>
+              <a:gd name="csX1" fmla="*/ 300990 w 2377440"/>
+              <a:gd name="csY1" fmla="*/ 1550670 h 1851059"/>
+              <a:gd name="csX2" fmla="*/ 586740 w 2377440"/>
+              <a:gd name="csY2" fmla="*/ 1845945 h 1851059"/>
+              <a:gd name="csX3" fmla="*/ 1175385 w 2377440"/>
+              <a:gd name="csY3" fmla="*/ 1701165 h 1851059"/>
+              <a:gd name="csX4" fmla="*/ 1771650 w 2377440"/>
+              <a:gd name="csY4" fmla="*/ 1247775 h 1851059"/>
+              <a:gd name="csX5" fmla="*/ 2377440 w 2377440"/>
+              <a:gd name="csY5" fmla="*/ 672465 h 1851059"/>
+              <a:gd name="csX0" fmla="*/ 0 w 2377440"/>
+              <a:gd name="csY0" fmla="*/ 0 h 1866984"/>
+              <a:gd name="csX1" fmla="*/ 300990 w 2377440"/>
+              <a:gd name="csY1" fmla="*/ 1550670 h 1866984"/>
+              <a:gd name="csX2" fmla="*/ 586740 w 2377440"/>
+              <a:gd name="csY2" fmla="*/ 1845945 h 1866984"/>
+              <a:gd name="csX3" fmla="*/ 1175385 w 2377440"/>
+              <a:gd name="csY3" fmla="*/ 1701165 h 1866984"/>
+              <a:gd name="csX4" fmla="*/ 1771650 w 2377440"/>
+              <a:gd name="csY4" fmla="*/ 1247775 h 1866984"/>
+              <a:gd name="csX5" fmla="*/ 2377440 w 2377440"/>
+              <a:gd name="csY5" fmla="*/ 672465 h 1866984"/>
+              <a:gd name="csX0" fmla="*/ 0 w 2377440"/>
+              <a:gd name="csY0" fmla="*/ 0 h 1866984"/>
+              <a:gd name="csX1" fmla="*/ 300990 w 2377440"/>
+              <a:gd name="csY1" fmla="*/ 1550670 h 1866984"/>
+              <a:gd name="csX2" fmla="*/ 586740 w 2377440"/>
+              <a:gd name="csY2" fmla="*/ 1845945 h 1866984"/>
+              <a:gd name="csX3" fmla="*/ 1175385 w 2377440"/>
+              <a:gd name="csY3" fmla="*/ 1701165 h 1866984"/>
+              <a:gd name="csX4" fmla="*/ 1771650 w 2377440"/>
+              <a:gd name="csY4" fmla="*/ 1247775 h 1866984"/>
+              <a:gd name="csX5" fmla="*/ 2377440 w 2377440"/>
+              <a:gd name="csY5" fmla="*/ 672465 h 1866984"/>
+              <a:gd name="csX0" fmla="*/ 0 w 2377440"/>
+              <a:gd name="csY0" fmla="*/ 0 h 1866984"/>
+              <a:gd name="csX1" fmla="*/ 300990 w 2377440"/>
+              <a:gd name="csY1" fmla="*/ 1550670 h 1866984"/>
+              <a:gd name="csX2" fmla="*/ 586740 w 2377440"/>
+              <a:gd name="csY2" fmla="*/ 1845945 h 1866984"/>
+              <a:gd name="csX3" fmla="*/ 1175385 w 2377440"/>
+              <a:gd name="csY3" fmla="*/ 1701165 h 1866984"/>
+              <a:gd name="csX4" fmla="*/ 1771650 w 2377440"/>
+              <a:gd name="csY4" fmla="*/ 1247775 h 1866984"/>
+              <a:gd name="csX5" fmla="*/ 2377440 w 2377440"/>
+              <a:gd name="csY5" fmla="*/ 672465 h 1866984"/>
+            </a:gdLst>
+            <a:ahLst/>
+            <a:cxnLst>
+              <a:cxn ang="0">
+                <a:pos x="csX0" y="csY0"/>
+              </a:cxn>
+              <a:cxn ang="0">
+                <a:pos x="csX1" y="csY1"/>
+              </a:cxn>
+              <a:cxn ang="0">
+                <a:pos x="csX2" y="csY2"/>
+              </a:cxn>
+              <a:cxn ang="0">
+                <a:pos x="csX3" y="csY3"/>
+              </a:cxn>
+              <a:cxn ang="0">
+                <a:pos x="csX4" y="csY4"/>
+              </a:cxn>
+              <a:cxn ang="0">
+                <a:pos x="csX5" y="csY5"/>
+              </a:cxn>
+            </a:cxnLst>
+            <a:rect l="l" t="t" r="r" b="b"/>
+            <a:pathLst>
+              <a:path w="2377440" h="1866984">
+                <a:moveTo>
+                  <a:pt x="0" y="0"/>
+                </a:moveTo>
+                <a:cubicBezTo>
+                  <a:pt x="25400" y="741521"/>
+                  <a:pt x="191770" y="1349692"/>
+                  <a:pt x="300990" y="1550670"/>
+                </a:cubicBezTo>
+                <a:cubicBezTo>
+                  <a:pt x="410210" y="1751648"/>
+                  <a:pt x="427673" y="1777048"/>
+                  <a:pt x="586740" y="1845945"/>
+                </a:cubicBezTo>
+                <a:cubicBezTo>
+                  <a:pt x="745807" y="1914842"/>
+                  <a:pt x="977900" y="1800860"/>
+                  <a:pt x="1175385" y="1701165"/>
+                </a:cubicBezTo>
+                <a:cubicBezTo>
+                  <a:pt x="1372870" y="1601470"/>
+                  <a:pt x="1571307" y="1419225"/>
+                  <a:pt x="1771650" y="1247775"/>
+                </a:cubicBezTo>
+                <a:cubicBezTo>
+                  <a:pt x="1971993" y="1076325"/>
+                  <a:pt x="2174716" y="874395"/>
+                  <a:pt x="2377440" y="672465"/>
+                </a:cubicBezTo>
+              </a:path>
+            </a:pathLst>
+          </a:custGeom>
+          <a:noFill/>
+          <a:ln cap="rnd">
+            <a:solidFill>
+              <a:schemeClr val="accent2">
+                <a:lumMod val="75000"/>
+              </a:schemeClr>
+            </a:solidFill>
+            <a:round/>
+          </a:ln>
+        </p:spPr>
+        <p:style>
+          <a:lnRef idx="2">
+            <a:schemeClr val="accent1">
+              <a:shade val="15000"/>
+            </a:schemeClr>
+          </a:lnRef>
+          <a:fillRef idx="1">
+            <a:schemeClr val="accent1"/>
+          </a:fillRef>
+          <a:effectRef idx="0">
+            <a:schemeClr val="accent1"/>
+          </a:effectRef>
+          <a:fontRef idx="minor">
+            <a:schemeClr val="lt1"/>
+          </a:fontRef>
+        </p:style>
+        <p:txBody>
+          <a:bodyPr rtlCol="0" anchor="ctr"/>
+          <a:lstStyle/>
+          <a:p>
+            <a:pPr algn="ctr"/>
+            <a:endParaRPr lang="de-DE"/>
+          </a:p>
+        </p:txBody>
+      </p:sp>
+      <p:sp>
+        <p:nvSpPr>
+          <p:cNvPr id="56" name="Freihandform: Form 55">
+            <a:extLst>
+              <a:ext uri="{FF2B5EF4-FFF2-40B4-BE49-F238E27FC236}">
+                <a16:creationId xmlns:a16="http://schemas.microsoft.com/office/drawing/2014/main" id="{FB15F09D-AD2B-4F98-AD3A-4C6409BD6D87}"/>
+              </a:ext>
+            </a:extLst>
+          </p:cNvPr>
+          <p:cNvSpPr/>
+          <p:nvPr/>
+        </p:nvSpPr>
+        <p:spPr>
+          <a:xfrm>
+            <a:off x="710564" y="1327785"/>
+            <a:ext cx="2367915" cy="1552444"/>
+          </a:xfrm>
+          <a:custGeom>
+            <a:avLst/>
+            <a:gdLst>
+              <a:gd name="csX0" fmla="*/ 0 w 2377440"/>
+              <a:gd name="csY0" fmla="*/ 0 h 1541972"/>
+              <a:gd name="csX1" fmla="*/ 300990 w 2377440"/>
+              <a:gd name="csY1" fmla="*/ 1301115 h 1541972"/>
+              <a:gd name="csX2" fmla="*/ 588645 w 2377440"/>
+              <a:gd name="csY2" fmla="*/ 1537335 h 1541972"/>
+              <a:gd name="csX3" fmla="*/ 1181100 w 2377440"/>
+              <a:gd name="csY3" fmla="*/ 1428750 h 1541972"/>
+              <a:gd name="csX4" fmla="*/ 1781175 w 2377440"/>
+              <a:gd name="csY4" fmla="*/ 1085850 h 1541972"/>
+              <a:gd name="csX5" fmla="*/ 2377440 w 2377440"/>
+              <a:gd name="csY5" fmla="*/ 645795 h 1541972"/>
+              <a:gd name="csX0" fmla="*/ 0 w 2377440"/>
+              <a:gd name="csY0" fmla="*/ 0 h 1541972"/>
+              <a:gd name="csX1" fmla="*/ 300990 w 2377440"/>
+              <a:gd name="csY1" fmla="*/ 1301115 h 1541972"/>
+              <a:gd name="csX2" fmla="*/ 588645 w 2377440"/>
+              <a:gd name="csY2" fmla="*/ 1537335 h 1541972"/>
+              <a:gd name="csX3" fmla="*/ 1181100 w 2377440"/>
+              <a:gd name="csY3" fmla="*/ 1428750 h 1541972"/>
+              <a:gd name="csX4" fmla="*/ 1781175 w 2377440"/>
+              <a:gd name="csY4" fmla="*/ 1085850 h 1541972"/>
+              <a:gd name="csX5" fmla="*/ 2377440 w 2377440"/>
+              <a:gd name="csY5" fmla="*/ 645795 h 1541972"/>
+              <a:gd name="csX0" fmla="*/ 0 w 2377440"/>
+              <a:gd name="csY0" fmla="*/ 0 h 1548034"/>
+              <a:gd name="csX1" fmla="*/ 300990 w 2377440"/>
+              <a:gd name="csY1" fmla="*/ 1301115 h 1548034"/>
+              <a:gd name="csX2" fmla="*/ 588645 w 2377440"/>
+              <a:gd name="csY2" fmla="*/ 1537335 h 1548034"/>
+              <a:gd name="csX3" fmla="*/ 1181100 w 2377440"/>
+              <a:gd name="csY3" fmla="*/ 1428750 h 1548034"/>
+              <a:gd name="csX4" fmla="*/ 1781175 w 2377440"/>
+              <a:gd name="csY4" fmla="*/ 1085850 h 1548034"/>
+              <a:gd name="csX5" fmla="*/ 2377440 w 2377440"/>
+              <a:gd name="csY5" fmla="*/ 645795 h 1548034"/>
+              <a:gd name="csX0" fmla="*/ 0 w 2377440"/>
+              <a:gd name="csY0" fmla="*/ 0 h 1552444"/>
+              <a:gd name="csX1" fmla="*/ 300990 w 2377440"/>
+              <a:gd name="csY1" fmla="*/ 1301115 h 1552444"/>
+              <a:gd name="csX2" fmla="*/ 588645 w 2377440"/>
+              <a:gd name="csY2" fmla="*/ 1537335 h 1552444"/>
+              <a:gd name="csX3" fmla="*/ 1181100 w 2377440"/>
+              <a:gd name="csY3" fmla="*/ 1428750 h 1552444"/>
+              <a:gd name="csX4" fmla="*/ 1781175 w 2377440"/>
+              <a:gd name="csY4" fmla="*/ 1085850 h 1552444"/>
+              <a:gd name="csX5" fmla="*/ 2377440 w 2377440"/>
+              <a:gd name="csY5" fmla="*/ 645795 h 1552444"/>
+              <a:gd name="csX0" fmla="*/ 0 w 2377440"/>
+              <a:gd name="csY0" fmla="*/ 0 h 1552444"/>
+              <a:gd name="csX1" fmla="*/ 300990 w 2377440"/>
+              <a:gd name="csY1" fmla="*/ 1301115 h 1552444"/>
+              <a:gd name="csX2" fmla="*/ 588645 w 2377440"/>
+              <a:gd name="csY2" fmla="*/ 1537335 h 1552444"/>
+              <a:gd name="csX3" fmla="*/ 1181100 w 2377440"/>
+              <a:gd name="csY3" fmla="*/ 1428750 h 1552444"/>
+              <a:gd name="csX4" fmla="*/ 1781175 w 2377440"/>
+              <a:gd name="csY4" fmla="*/ 1085850 h 1552444"/>
+              <a:gd name="csX5" fmla="*/ 2377440 w 2377440"/>
+              <a:gd name="csY5" fmla="*/ 645795 h 1552444"/>
+              <a:gd name="csX0" fmla="*/ 0 w 2377440"/>
+              <a:gd name="csY0" fmla="*/ 0 h 1552444"/>
+              <a:gd name="csX1" fmla="*/ 300990 w 2377440"/>
+              <a:gd name="csY1" fmla="*/ 1301115 h 1552444"/>
+              <a:gd name="csX2" fmla="*/ 588645 w 2377440"/>
+              <a:gd name="csY2" fmla="*/ 1537335 h 1552444"/>
+              <a:gd name="csX3" fmla="*/ 1181100 w 2377440"/>
+              <a:gd name="csY3" fmla="*/ 1428750 h 1552444"/>
+              <a:gd name="csX4" fmla="*/ 1781175 w 2377440"/>
+              <a:gd name="csY4" fmla="*/ 1085850 h 1552444"/>
+              <a:gd name="csX5" fmla="*/ 2377440 w 2377440"/>
+              <a:gd name="csY5" fmla="*/ 645795 h 1552444"/>
+              <a:gd name="csX0" fmla="*/ 0 w 2377440"/>
+              <a:gd name="csY0" fmla="*/ 0 h 1552444"/>
+              <a:gd name="csX1" fmla="*/ 300990 w 2377440"/>
+              <a:gd name="csY1" fmla="*/ 1301115 h 1552444"/>
+              <a:gd name="csX2" fmla="*/ 588645 w 2377440"/>
+              <a:gd name="csY2" fmla="*/ 1537335 h 1552444"/>
+              <a:gd name="csX3" fmla="*/ 1181100 w 2377440"/>
+              <a:gd name="csY3" fmla="*/ 1428750 h 1552444"/>
+              <a:gd name="csX4" fmla="*/ 1781175 w 2377440"/>
+              <a:gd name="csY4" fmla="*/ 1085850 h 1552444"/>
+              <a:gd name="csX5" fmla="*/ 2377440 w 2377440"/>
+              <a:gd name="csY5" fmla="*/ 645795 h 1552444"/>
+            </a:gdLst>
+            <a:ahLst/>
+            <a:cxnLst>
+              <a:cxn ang="0">
+                <a:pos x="csX0" y="csY0"/>
+              </a:cxn>
+              <a:cxn ang="0">
+                <a:pos x="csX1" y="csY1"/>
+              </a:cxn>
+              <a:cxn ang="0">
+                <a:pos x="csX2" y="csY2"/>
+              </a:cxn>
+              <a:cxn ang="0">
+                <a:pos x="csX3" y="csY3"/>
+              </a:cxn>
+              <a:cxn ang="0">
+                <a:pos x="csX4" y="csY4"/>
+              </a:cxn>
+              <a:cxn ang="0">
+                <a:pos x="csX5" y="csY5"/>
+              </a:cxn>
+            </a:cxnLst>
+            <a:rect l="l" t="t" r="r" b="b"/>
+            <a:pathLst>
+              <a:path w="2377440" h="1552444">
+                <a:moveTo>
+                  <a:pt x="0" y="0"/>
+                </a:moveTo>
+                <a:cubicBezTo>
+                  <a:pt x="70961" y="667226"/>
+                  <a:pt x="216218" y="1159193"/>
+                  <a:pt x="300990" y="1301115"/>
+                </a:cubicBezTo>
+                <a:cubicBezTo>
+                  <a:pt x="385762" y="1443037"/>
+                  <a:pt x="430530" y="1487488"/>
+                  <a:pt x="588645" y="1537335"/>
+                </a:cubicBezTo>
+                <a:cubicBezTo>
+                  <a:pt x="746760" y="1587182"/>
+                  <a:pt x="982345" y="1503997"/>
+                  <a:pt x="1181100" y="1428750"/>
+                </a:cubicBezTo>
+                <a:cubicBezTo>
+                  <a:pt x="1379855" y="1353503"/>
+                  <a:pt x="1581785" y="1216343"/>
+                  <a:pt x="1781175" y="1085850"/>
+                </a:cubicBezTo>
+                <a:cubicBezTo>
+                  <a:pt x="1980565" y="955358"/>
+                  <a:pt x="2179002" y="800576"/>
+                  <a:pt x="2377440" y="645795"/>
+                </a:cubicBezTo>
+              </a:path>
+            </a:pathLst>
+          </a:custGeom>
+          <a:noFill/>
+          <a:ln cap="rnd">
+            <a:solidFill>
+              <a:schemeClr val="tx2">
+                <a:lumMod val="75000"/>
+                <a:lumOff val="25000"/>
+              </a:schemeClr>
+            </a:solidFill>
+            <a:round/>
+          </a:ln>
+        </p:spPr>
+        <p:style>
+          <a:lnRef idx="2">
+            <a:schemeClr val="accent1">
+              <a:shade val="15000"/>
+            </a:schemeClr>
+          </a:lnRef>
+          <a:fillRef idx="1">
+            <a:schemeClr val="accent1"/>
+          </a:fillRef>
+          <a:effectRef idx="0">
+            <a:schemeClr val="accent1"/>
+          </a:effectRef>
+          <a:fontRef idx="minor">
+            <a:schemeClr val="lt1"/>
+          </a:fontRef>
+        </p:style>
+        <p:txBody>
+          <a:bodyPr rtlCol="0" anchor="ctr"/>
+          <a:lstStyle/>
+          <a:p>
+            <a:pPr algn="ctr"/>
+            <a:endParaRPr lang="de-DE"/>
+          </a:p>
+        </p:txBody>
+      </p:sp>
+      <p:sp>
+        <p:nvSpPr>
+          <p:cNvPr id="57" name="Freihandform: Form 56">
+            <a:extLst>
+              <a:ext uri="{FF2B5EF4-FFF2-40B4-BE49-F238E27FC236}">
+                <a16:creationId xmlns:a16="http://schemas.microsoft.com/office/drawing/2014/main" id="{4B657633-4455-548B-D0AE-A6DA3F8759BE}"/>
+              </a:ext>
+            </a:extLst>
+          </p:cNvPr>
+          <p:cNvSpPr/>
+          <p:nvPr/>
+        </p:nvSpPr>
+        <p:spPr>
+          <a:xfrm>
+            <a:off x="710565" y="1794510"/>
+            <a:ext cx="2369820" cy="1119167"/>
+          </a:xfrm>
+          <a:custGeom>
+            <a:avLst/>
+            <a:gdLst>
+              <a:gd name="csX0" fmla="*/ 0 w 2375535"/>
+              <a:gd name="csY0" fmla="*/ 0 h 1127289"/>
+              <a:gd name="csX1" fmla="*/ 297180 w 2375535"/>
+              <a:gd name="csY1" fmla="*/ 998220 h 1127289"/>
+              <a:gd name="csX2" fmla="*/ 582930 w 2375535"/>
+              <a:gd name="csY2" fmla="*/ 1118235 h 1127289"/>
+              <a:gd name="csX3" fmla="*/ 1173480 w 2375535"/>
+              <a:gd name="csY3" fmla="*/ 1032510 h 1127289"/>
+              <a:gd name="csX4" fmla="*/ 1775460 w 2375535"/>
+              <a:gd name="csY4" fmla="*/ 798195 h 1127289"/>
+              <a:gd name="csX5" fmla="*/ 2375535 w 2375535"/>
+              <a:gd name="csY5" fmla="*/ 502920 h 1127289"/>
+              <a:gd name="csX0" fmla="*/ 0 w 2375535"/>
+              <a:gd name="csY0" fmla="*/ 0 h 1127289"/>
+              <a:gd name="csX1" fmla="*/ 297180 w 2375535"/>
+              <a:gd name="csY1" fmla="*/ 998220 h 1127289"/>
+              <a:gd name="csX2" fmla="*/ 582930 w 2375535"/>
+              <a:gd name="csY2" fmla="*/ 1118235 h 1127289"/>
+              <a:gd name="csX3" fmla="*/ 1173480 w 2375535"/>
+              <a:gd name="csY3" fmla="*/ 1032510 h 1127289"/>
+              <a:gd name="csX4" fmla="*/ 1775460 w 2375535"/>
+              <a:gd name="csY4" fmla="*/ 798195 h 1127289"/>
+              <a:gd name="csX5" fmla="*/ 2375535 w 2375535"/>
+              <a:gd name="csY5" fmla="*/ 502920 h 1127289"/>
+              <a:gd name="csX0" fmla="*/ 0 w 2375535"/>
+              <a:gd name="csY0" fmla="*/ 0 h 1118802"/>
+              <a:gd name="csX1" fmla="*/ 297180 w 2375535"/>
+              <a:gd name="csY1" fmla="*/ 998220 h 1118802"/>
+              <a:gd name="csX2" fmla="*/ 582930 w 2375535"/>
+              <a:gd name="csY2" fmla="*/ 1118235 h 1118802"/>
+              <a:gd name="csX3" fmla="*/ 1173480 w 2375535"/>
+              <a:gd name="csY3" fmla="*/ 1032510 h 1118802"/>
+              <a:gd name="csX4" fmla="*/ 1775460 w 2375535"/>
+              <a:gd name="csY4" fmla="*/ 798195 h 1118802"/>
+              <a:gd name="csX5" fmla="*/ 2375535 w 2375535"/>
+              <a:gd name="csY5" fmla="*/ 502920 h 1118802"/>
+              <a:gd name="csX0" fmla="*/ 0 w 2375535"/>
+              <a:gd name="csY0" fmla="*/ 0 h 1119167"/>
+              <a:gd name="csX1" fmla="*/ 297180 w 2375535"/>
+              <a:gd name="csY1" fmla="*/ 998220 h 1119167"/>
+              <a:gd name="csX2" fmla="*/ 582930 w 2375535"/>
+              <a:gd name="csY2" fmla="*/ 1118235 h 1119167"/>
+              <a:gd name="csX3" fmla="*/ 1173480 w 2375535"/>
+              <a:gd name="csY3" fmla="*/ 1032510 h 1119167"/>
+              <a:gd name="csX4" fmla="*/ 1775460 w 2375535"/>
+              <a:gd name="csY4" fmla="*/ 798195 h 1119167"/>
+              <a:gd name="csX5" fmla="*/ 2375535 w 2375535"/>
+              <a:gd name="csY5" fmla="*/ 502920 h 1119167"/>
+              <a:gd name="csX0" fmla="*/ 0 w 2375535"/>
+              <a:gd name="csY0" fmla="*/ 0 h 1119167"/>
+              <a:gd name="csX1" fmla="*/ 297180 w 2375535"/>
+              <a:gd name="csY1" fmla="*/ 998220 h 1119167"/>
+              <a:gd name="csX2" fmla="*/ 582930 w 2375535"/>
+              <a:gd name="csY2" fmla="*/ 1118235 h 1119167"/>
+              <a:gd name="csX3" fmla="*/ 1173480 w 2375535"/>
+              <a:gd name="csY3" fmla="*/ 1032510 h 1119167"/>
+              <a:gd name="csX4" fmla="*/ 1775460 w 2375535"/>
+              <a:gd name="csY4" fmla="*/ 798195 h 1119167"/>
+              <a:gd name="csX5" fmla="*/ 2375535 w 2375535"/>
+              <a:gd name="csY5" fmla="*/ 502920 h 1119167"/>
+            </a:gdLst>
+            <a:ahLst/>
+            <a:cxnLst>
+              <a:cxn ang="0">
+                <a:pos x="csX0" y="csY0"/>
+              </a:cxn>
+              <a:cxn ang="0">
+                <a:pos x="csX1" y="csY1"/>
+              </a:cxn>
+              <a:cxn ang="0">
+                <a:pos x="csX2" y="csY2"/>
+              </a:cxn>
+              <a:cxn ang="0">
+                <a:pos x="csX3" y="csY3"/>
+              </a:cxn>
+              <a:cxn ang="0">
+                <a:pos x="csX4" y="csY4"/>
+              </a:cxn>
+              <a:cxn ang="0">
+                <a:pos x="csX5" y="csY5"/>
+              </a:cxn>
+            </a:cxnLst>
+            <a:rect l="l" t="t" r="r" b="b"/>
+            <a:pathLst>
+              <a:path w="2375535" h="1119167">
+                <a:moveTo>
+                  <a:pt x="0" y="0"/>
+                </a:moveTo>
+                <a:cubicBezTo>
+                  <a:pt x="46672" y="579279"/>
+                  <a:pt x="175260" y="893763"/>
+                  <a:pt x="297180" y="998220"/>
+                </a:cubicBezTo>
+                <a:cubicBezTo>
+                  <a:pt x="419100" y="1102677"/>
+                  <a:pt x="486410" y="1110615"/>
+                  <a:pt x="582930" y="1118235"/>
+                </a:cubicBezTo>
+                <a:cubicBezTo>
+                  <a:pt x="679450" y="1125855"/>
+                  <a:pt x="974725" y="1085850"/>
+                  <a:pt x="1173480" y="1032510"/>
+                </a:cubicBezTo>
+                <a:cubicBezTo>
+                  <a:pt x="1372235" y="979170"/>
+                  <a:pt x="1575118" y="886460"/>
+                  <a:pt x="1775460" y="798195"/>
+                </a:cubicBezTo>
+                <a:cubicBezTo>
+                  <a:pt x="1975802" y="709930"/>
+                  <a:pt x="2175668" y="606425"/>
+                  <a:pt x="2375535" y="502920"/>
+                </a:cubicBezTo>
+              </a:path>
+            </a:pathLst>
+          </a:custGeom>
+          <a:noFill/>
+          <a:ln cap="rnd">
+            <a:solidFill>
+              <a:srgbClr val="C00000"/>
+            </a:solidFill>
+            <a:round/>
+          </a:ln>
+        </p:spPr>
+        <p:style>
+          <a:lnRef idx="2">
+            <a:schemeClr val="accent1">
+              <a:shade val="15000"/>
+            </a:schemeClr>
+          </a:lnRef>
+          <a:fillRef idx="1">
+            <a:schemeClr val="accent1"/>
+          </a:fillRef>
+          <a:effectRef idx="0">
+            <a:schemeClr val="accent1"/>
+          </a:effectRef>
+          <a:fontRef idx="minor">
+            <a:schemeClr val="lt1"/>
+          </a:fontRef>
+        </p:style>
+        <p:txBody>
+          <a:bodyPr rtlCol="0" anchor="ctr"/>
+          <a:lstStyle/>
+          <a:p>
+            <a:pPr algn="ctr"/>
+            <a:endParaRPr lang="de-DE"/>
+          </a:p>
+        </p:txBody>
+      </p:sp>
+      <p:sp>
+        <p:nvSpPr>
+          <p:cNvPr id="58" name="Textfeld 57">
+            <a:extLst>
+              <a:ext uri="{FF2B5EF4-FFF2-40B4-BE49-F238E27FC236}">
+                <a16:creationId xmlns:a16="http://schemas.microsoft.com/office/drawing/2014/main" id="{AB7511FA-0BC9-8A60-4D77-A73A7BB6954D}"/>
+              </a:ext>
+            </a:extLst>
+          </p:cNvPr>
+          <p:cNvSpPr txBox="1"/>
+          <p:nvPr/>
+        </p:nvSpPr>
+        <p:spPr>
+          <a:xfrm>
+            <a:off x="2196692" y="1522184"/>
+            <a:ext cx="819176" cy="215444"/>
+          </a:xfrm>
+          <a:prstGeom prst="rect">
+            <a:avLst/>
+          </a:prstGeom>
+          <a:noFill/>
+        </p:spPr>
+        <p:txBody>
+          <a:bodyPr wrap="square" rtlCol="0" anchor="ctr">
+            <a:spAutoFit/>
+          </a:bodyPr>
+          <a:lstStyle/>
+          <a:p>
+            <a:pPr algn="ctr"/>
+            <a:r>
+              <a:rPr lang="de-DE" sz="800" dirty="0">
+                <a:solidFill>
+                  <a:schemeClr val="accent6">
+                    <a:lumMod val="75000"/>
+                  </a:schemeClr>
+                </a:solidFill>
+                <a:latin typeface="Latin Modern Math" panose="02000503000000000000" pitchFamily="50" charset="0"/>
+                <a:ea typeface="Latin Modern Math" panose="02000503000000000000" pitchFamily="50" charset="0"/>
+                <a:cs typeface="CMU Serif" panose="02000603000000000000" pitchFamily="2" charset="0"/>
+              </a:rPr>
+              <a:t>Λ</a:t>
+            </a:r>
+            <a:r>
+              <a:rPr lang="de-DE" sz="800" dirty="0">
+                <a:solidFill>
+                  <a:schemeClr val="accent6">
+                    <a:lumMod val="75000"/>
+                  </a:schemeClr>
+                </a:solidFill>
+                <a:latin typeface="CMU Serif" panose="02000603000000000000" pitchFamily="2" charset="0"/>
+                <a:ea typeface="CMU Serif" panose="02000603000000000000" pitchFamily="2" charset="0"/>
+                <a:cs typeface="CMU Serif" panose="02000603000000000000" pitchFamily="2" charset="0"/>
+              </a:rPr>
+              <a:t> = 10</a:t>
+            </a:r>
+            <a:endParaRPr lang="de-DE" sz="800" baseline="-25000" dirty="0">
+              <a:solidFill>
+                <a:schemeClr val="accent6">
+                  <a:lumMod val="75000"/>
+                </a:schemeClr>
+              </a:solidFill>
+              <a:latin typeface="CMU Serif" panose="02000603000000000000" pitchFamily="2" charset="0"/>
+              <a:ea typeface="CMU Serif" panose="02000603000000000000" pitchFamily="2" charset="0"/>
+              <a:cs typeface="CMU Serif" panose="02000603000000000000" pitchFamily="2" charset="0"/>
+            </a:endParaRPr>
+          </a:p>
+        </p:txBody>
+      </p:sp>
+      <p:sp>
+        <p:nvSpPr>
+          <p:cNvPr id="59" name="Textfeld 58">
+            <a:extLst>
+              <a:ext uri="{FF2B5EF4-FFF2-40B4-BE49-F238E27FC236}">
+                <a16:creationId xmlns:a16="http://schemas.microsoft.com/office/drawing/2014/main" id="{C7297B51-2F35-F8F9-F307-C0E63B0B1DC3}"/>
+              </a:ext>
+            </a:extLst>
+          </p:cNvPr>
+          <p:cNvSpPr txBox="1"/>
+          <p:nvPr/>
+        </p:nvSpPr>
+        <p:spPr>
+          <a:xfrm>
+            <a:off x="2649223" y="1745384"/>
+            <a:ext cx="266716" cy="215444"/>
+          </a:xfrm>
+          <a:prstGeom prst="rect">
+            <a:avLst/>
+          </a:prstGeom>
+          <a:noFill/>
+        </p:spPr>
+        <p:txBody>
+          <a:bodyPr wrap="square" rtlCol="0" anchor="ctr">
+            <a:spAutoFit/>
+          </a:bodyPr>
+          <a:lstStyle/>
+          <a:p>
+            <a:pPr algn="ctr"/>
+            <a:r>
+              <a:rPr lang="de-DE" sz="800" dirty="0">
+                <a:solidFill>
+                  <a:schemeClr val="accent2">
+                    <a:lumMod val="75000"/>
+                  </a:schemeClr>
+                </a:solidFill>
+                <a:latin typeface="CMU Serif" panose="02000603000000000000" pitchFamily="2" charset="0"/>
+                <a:ea typeface="CMU Serif" panose="02000603000000000000" pitchFamily="2" charset="0"/>
+                <a:cs typeface="CMU Serif" panose="02000603000000000000" pitchFamily="2" charset="0"/>
+              </a:rPr>
+              <a:t>8</a:t>
+            </a:r>
+            <a:endParaRPr lang="de-DE" sz="800" baseline="-25000" dirty="0">
+              <a:solidFill>
+                <a:schemeClr val="accent2">
+                  <a:lumMod val="75000"/>
+                </a:schemeClr>
+              </a:solidFill>
+              <a:latin typeface="CMU Serif" panose="02000603000000000000" pitchFamily="2" charset="0"/>
+              <a:ea typeface="CMU Serif" panose="02000603000000000000" pitchFamily="2" charset="0"/>
+              <a:cs typeface="CMU Serif" panose="02000603000000000000" pitchFamily="2" charset="0"/>
+            </a:endParaRPr>
+          </a:p>
+        </p:txBody>
+      </p:sp>
+      <p:sp>
+        <p:nvSpPr>
+          <p:cNvPr id="60" name="Textfeld 59">
+            <a:extLst>
+              <a:ext uri="{FF2B5EF4-FFF2-40B4-BE49-F238E27FC236}">
+                <a16:creationId xmlns:a16="http://schemas.microsoft.com/office/drawing/2014/main" id="{1F6F98CD-370F-2331-9B89-A0C2006DB1EC}"/>
+              </a:ext>
+            </a:extLst>
+          </p:cNvPr>
+          <p:cNvSpPr txBox="1"/>
+          <p:nvPr/>
+        </p:nvSpPr>
+        <p:spPr>
+          <a:xfrm>
+            <a:off x="2729541" y="1926686"/>
+            <a:ext cx="266716" cy="215444"/>
+          </a:xfrm>
+          <a:prstGeom prst="rect">
+            <a:avLst/>
+          </a:prstGeom>
+          <a:noFill/>
+        </p:spPr>
+        <p:txBody>
+          <a:bodyPr wrap="square" rtlCol="0" anchor="ctr">
+            <a:spAutoFit/>
+          </a:bodyPr>
+          <a:lstStyle/>
+          <a:p>
+            <a:pPr algn="ctr"/>
+            <a:r>
+              <a:rPr lang="de-DE" sz="800" dirty="0">
+                <a:solidFill>
+                  <a:schemeClr val="tx2">
+                    <a:lumMod val="75000"/>
+                    <a:lumOff val="25000"/>
+                  </a:schemeClr>
+                </a:solidFill>
+                <a:latin typeface="CMU Serif" panose="02000603000000000000" pitchFamily="2" charset="0"/>
+                <a:ea typeface="CMU Serif" panose="02000603000000000000" pitchFamily="2" charset="0"/>
+                <a:cs typeface="CMU Serif" panose="02000603000000000000" pitchFamily="2" charset="0"/>
+              </a:rPr>
+              <a:t>6</a:t>
+            </a:r>
+            <a:endParaRPr lang="de-DE" sz="800" baseline="-25000" dirty="0">
+              <a:solidFill>
+                <a:schemeClr val="tx2">
+                  <a:lumMod val="75000"/>
+                  <a:lumOff val="25000"/>
+                </a:schemeClr>
+              </a:solidFill>
+              <a:latin typeface="CMU Serif" panose="02000603000000000000" pitchFamily="2" charset="0"/>
+              <a:ea typeface="CMU Serif" panose="02000603000000000000" pitchFamily="2" charset="0"/>
+              <a:cs typeface="CMU Serif" panose="02000603000000000000" pitchFamily="2" charset="0"/>
+            </a:endParaRPr>
+          </a:p>
+        </p:txBody>
+      </p:sp>
+      <p:sp>
+        <p:nvSpPr>
+          <p:cNvPr id="61" name="Textfeld 60">
+            <a:extLst>
+              <a:ext uri="{FF2B5EF4-FFF2-40B4-BE49-F238E27FC236}">
+                <a16:creationId xmlns:a16="http://schemas.microsoft.com/office/drawing/2014/main" id="{39949C8F-FD7E-0322-6959-3D6ADBCFE408}"/>
+              </a:ext>
+            </a:extLst>
+          </p:cNvPr>
+          <p:cNvSpPr txBox="1"/>
+          <p:nvPr/>
+        </p:nvSpPr>
+        <p:spPr>
+          <a:xfrm>
+            <a:off x="2809860" y="2133160"/>
+            <a:ext cx="266716" cy="215444"/>
+          </a:xfrm>
+          <a:prstGeom prst="rect">
+            <a:avLst/>
+          </a:prstGeom>
+          <a:noFill/>
+        </p:spPr>
+        <p:txBody>
+          <a:bodyPr wrap="square" rtlCol="0" anchor="ctr">
+            <a:spAutoFit/>
+          </a:bodyPr>
+          <a:lstStyle/>
+          <a:p>
+            <a:pPr algn="ctr"/>
+            <a:r>
+              <a:rPr lang="de-DE" sz="800" dirty="0">
+                <a:solidFill>
+                  <a:srgbClr val="C00000"/>
+                </a:solidFill>
+                <a:latin typeface="CMU Serif" panose="02000603000000000000" pitchFamily="2" charset="0"/>
+                <a:ea typeface="CMU Serif" panose="02000603000000000000" pitchFamily="2" charset="0"/>
+                <a:cs typeface="CMU Serif" panose="02000603000000000000" pitchFamily="2" charset="0"/>
+              </a:rPr>
+              <a:t>4</a:t>
+            </a:r>
+            <a:endParaRPr lang="de-DE" sz="800" baseline="-25000" dirty="0">
+              <a:solidFill>
+                <a:srgbClr val="C00000"/>
+              </a:solidFill>
+              <a:latin typeface="CMU Serif" panose="02000603000000000000" pitchFamily="2" charset="0"/>
+              <a:ea typeface="CMU Serif" panose="02000603000000000000" pitchFamily="2" charset="0"/>
+              <a:cs typeface="CMU Serif" panose="02000603000000000000" pitchFamily="2" charset="0"/>
+            </a:endParaRPr>
+          </a:p>
+        </p:txBody>
+      </p:sp>
+    </p:spTree>
+    <p:extLst>
+      <p:ext uri="{BB962C8B-B14F-4D97-AF65-F5344CB8AC3E}">
+        <p14:creationId xmlns:p14="http://schemas.microsoft.com/office/powerpoint/2010/main" val="1508409965"/>
+      </p:ext>
+    </p:extLst>
+  </p:cSld>
+  <p:clrMapOvr>
+    <a:masterClrMapping/>
+  </p:clrMapOvr>
+</p:sld>
+</file>
+
 <file path=ppt/theme/theme1.xml><?xml version="1.0" encoding="utf-8"?>
 <a:theme xmlns:a="http://schemas.openxmlformats.org/drawingml/2006/main" name="Office">
   <a:themeElements>
